--- a/rus/UrFU/SberML/2023/Presentations/Лекция 1.05 - Классификация.pptx
+++ b/rus/UrFU/SberML/2023/Presentations/Лекция 1.05 - Классификация.pptx
@@ -5,7 +5,7 @@
     <p:sldMasterId id="2147483648" r:id="rId1"/>
   </p:sldMasterIdLst>
   <p:notesMasterIdLst>
-    <p:notesMasterId r:id="rId28"/>
+    <p:notesMasterId r:id="rId29"/>
   </p:notesMasterIdLst>
   <p:sldIdLst>
     <p:sldId id="256" r:id="rId2"/>
@@ -13,27 +13,28 @@
     <p:sldId id="264" r:id="rId4"/>
     <p:sldId id="380" r:id="rId5"/>
     <p:sldId id="378" r:id="rId6"/>
-    <p:sldId id="503" r:id="rId7"/>
-    <p:sldId id="488" r:id="rId8"/>
-    <p:sldId id="298" r:id="rId9"/>
-    <p:sldId id="469" r:id="rId10"/>
-    <p:sldId id="470" r:id="rId11"/>
-    <p:sldId id="471" r:id="rId12"/>
-    <p:sldId id="472" r:id="rId13"/>
-    <p:sldId id="473" r:id="rId14"/>
-    <p:sldId id="491" r:id="rId15"/>
-    <p:sldId id="479" r:id="rId16"/>
-    <p:sldId id="504" r:id="rId17"/>
-    <p:sldId id="438" r:id="rId18"/>
-    <p:sldId id="487" r:id="rId19"/>
-    <p:sldId id="492" r:id="rId20"/>
-    <p:sldId id="497" r:id="rId21"/>
-    <p:sldId id="505" r:id="rId22"/>
-    <p:sldId id="486" r:id="rId23"/>
-    <p:sldId id="496" r:id="rId24"/>
-    <p:sldId id="480" r:id="rId25"/>
-    <p:sldId id="467" r:id="rId26"/>
-    <p:sldId id="261" r:id="rId27"/>
+    <p:sldId id="506" r:id="rId7"/>
+    <p:sldId id="507" r:id="rId8"/>
+    <p:sldId id="488" r:id="rId9"/>
+    <p:sldId id="298" r:id="rId10"/>
+    <p:sldId id="469" r:id="rId11"/>
+    <p:sldId id="470" r:id="rId12"/>
+    <p:sldId id="471" r:id="rId13"/>
+    <p:sldId id="472" r:id="rId14"/>
+    <p:sldId id="473" r:id="rId15"/>
+    <p:sldId id="491" r:id="rId16"/>
+    <p:sldId id="479" r:id="rId17"/>
+    <p:sldId id="504" r:id="rId18"/>
+    <p:sldId id="438" r:id="rId19"/>
+    <p:sldId id="487" r:id="rId20"/>
+    <p:sldId id="492" r:id="rId21"/>
+    <p:sldId id="497" r:id="rId22"/>
+    <p:sldId id="508" r:id="rId23"/>
+    <p:sldId id="486" r:id="rId24"/>
+    <p:sldId id="496" r:id="rId25"/>
+    <p:sldId id="480" r:id="rId26"/>
+    <p:sldId id="467" r:id="rId27"/>
+    <p:sldId id="261" r:id="rId28"/>
   </p:sldIdLst>
   <p:sldSz cx="12192000" cy="6858000"/>
   <p:notesSz cx="6858000" cy="9144000"/>
@@ -233,7 +234,7 @@
           <a:p>
             <a:fld id="{FC905E3C-4BAB-4A96-A922-7BFAEF974B87}" type="datetimeFigureOut">
               <a:rPr lang="ru-RU" smtClean="0"/>
-              <a:t>04.10.2023</a:t>
+              <a:t>22.09.2025</a:t>
             </a:fld>
             <a:endParaRPr lang="ru-RU"/>
           </a:p>
@@ -678,7 +679,7 @@
     </p:spTree>
     <p:extLst>
       <p:ext uri="{BB962C8B-B14F-4D97-AF65-F5344CB8AC3E}">
-        <p14:creationId xmlns:p14="http://schemas.microsoft.com/office/powerpoint/2010/main" val="3885657099"/>
+        <p14:creationId xmlns:p14="http://schemas.microsoft.com/office/powerpoint/2010/main" val="2722951575"/>
       </p:ext>
     </p:extLst>
   </p:cSld>
@@ -772,7 +773,7 @@
     </p:spTree>
     <p:extLst>
       <p:ext uri="{BB962C8B-B14F-4D97-AF65-F5344CB8AC3E}">
-        <p14:creationId xmlns:p14="http://schemas.microsoft.com/office/powerpoint/2010/main" val="3986414824"/>
+        <p14:creationId xmlns:p14="http://schemas.microsoft.com/office/powerpoint/2010/main" val="3885657099"/>
       </p:ext>
     </p:extLst>
   </p:cSld>
@@ -866,7 +867,7 @@
     </p:spTree>
     <p:extLst>
       <p:ext uri="{BB962C8B-B14F-4D97-AF65-F5344CB8AC3E}">
-        <p14:creationId xmlns:p14="http://schemas.microsoft.com/office/powerpoint/2010/main" val="3996933982"/>
+        <p14:creationId xmlns:p14="http://schemas.microsoft.com/office/powerpoint/2010/main" val="3986414824"/>
       </p:ext>
     </p:extLst>
   </p:cSld>
@@ -925,7 +926,7 @@
           <a:bodyPr/>
           <a:lstStyle/>
           <a:p>
-            <a:endParaRPr lang="ru-RU"/>
+            <a:endParaRPr lang="ru-RU" dirty="0"/>
           </a:p>
         </p:txBody>
       </p:sp>
@@ -960,7 +961,7 @@
     </p:spTree>
     <p:extLst>
       <p:ext uri="{BB962C8B-B14F-4D97-AF65-F5344CB8AC3E}">
-        <p14:creationId xmlns:p14="http://schemas.microsoft.com/office/powerpoint/2010/main" val="2778049858"/>
+        <p14:creationId xmlns:p14="http://schemas.microsoft.com/office/powerpoint/2010/main" val="3996933982"/>
       </p:ext>
     </p:extLst>
   </p:cSld>
@@ -1019,7 +1020,7 @@
           <a:bodyPr/>
           <a:lstStyle/>
           <a:p>
-            <a:endParaRPr lang="ru-RU" dirty="0"/>
+            <a:endParaRPr lang="ru-RU"/>
           </a:p>
         </p:txBody>
       </p:sp>
@@ -1054,7 +1055,7 @@
     </p:spTree>
     <p:extLst>
       <p:ext uri="{BB962C8B-B14F-4D97-AF65-F5344CB8AC3E}">
-        <p14:creationId xmlns:p14="http://schemas.microsoft.com/office/powerpoint/2010/main" val="1274152573"/>
+        <p14:creationId xmlns:p14="http://schemas.microsoft.com/office/powerpoint/2010/main" val="2778049858"/>
       </p:ext>
     </p:extLst>
   </p:cSld>
@@ -1148,7 +1149,7 @@
     </p:spTree>
     <p:extLst>
       <p:ext uri="{BB962C8B-B14F-4D97-AF65-F5344CB8AC3E}">
-        <p14:creationId xmlns:p14="http://schemas.microsoft.com/office/powerpoint/2010/main" val="1412844767"/>
+        <p14:creationId xmlns:p14="http://schemas.microsoft.com/office/powerpoint/2010/main" val="1274152573"/>
       </p:ext>
     </p:extLst>
   </p:cSld>
@@ -1242,7 +1243,7 @@
     </p:spTree>
     <p:extLst>
       <p:ext uri="{BB962C8B-B14F-4D97-AF65-F5344CB8AC3E}">
-        <p14:creationId xmlns:p14="http://schemas.microsoft.com/office/powerpoint/2010/main" val="1253452349"/>
+        <p14:creationId xmlns:p14="http://schemas.microsoft.com/office/powerpoint/2010/main" val="1412844767"/>
       </p:ext>
     </p:extLst>
   </p:cSld>
@@ -1336,7 +1337,7 @@
     </p:spTree>
     <p:extLst>
       <p:ext uri="{BB962C8B-B14F-4D97-AF65-F5344CB8AC3E}">
-        <p14:creationId xmlns:p14="http://schemas.microsoft.com/office/powerpoint/2010/main" val="285832721"/>
+        <p14:creationId xmlns:p14="http://schemas.microsoft.com/office/powerpoint/2010/main" val="1253452349"/>
       </p:ext>
     </p:extLst>
   </p:cSld>
@@ -1430,7 +1431,7 @@
     </p:spTree>
     <p:extLst>
       <p:ext uri="{BB962C8B-B14F-4D97-AF65-F5344CB8AC3E}">
-        <p14:creationId xmlns:p14="http://schemas.microsoft.com/office/powerpoint/2010/main" val="731124767"/>
+        <p14:creationId xmlns:p14="http://schemas.microsoft.com/office/powerpoint/2010/main" val="285832721"/>
       </p:ext>
     </p:extLst>
   </p:cSld>
@@ -1524,7 +1525,7 @@
     </p:spTree>
     <p:extLst>
       <p:ext uri="{BB962C8B-B14F-4D97-AF65-F5344CB8AC3E}">
-        <p14:creationId xmlns:p14="http://schemas.microsoft.com/office/powerpoint/2010/main" val="2511452222"/>
+        <p14:creationId xmlns:p14="http://schemas.microsoft.com/office/powerpoint/2010/main" val="731124767"/>
       </p:ext>
     </p:extLst>
   </p:cSld>
@@ -1712,7 +1713,7 @@
     </p:spTree>
     <p:extLst>
       <p:ext uri="{BB962C8B-B14F-4D97-AF65-F5344CB8AC3E}">
-        <p14:creationId xmlns:p14="http://schemas.microsoft.com/office/powerpoint/2010/main" val="43460455"/>
+        <p14:creationId xmlns:p14="http://schemas.microsoft.com/office/powerpoint/2010/main" val="2511452222"/>
       </p:ext>
     </p:extLst>
   </p:cSld>
@@ -1806,7 +1807,7 @@
     </p:spTree>
     <p:extLst>
       <p:ext uri="{BB962C8B-B14F-4D97-AF65-F5344CB8AC3E}">
-        <p14:creationId xmlns:p14="http://schemas.microsoft.com/office/powerpoint/2010/main" val="3635283943"/>
+        <p14:creationId xmlns:p14="http://schemas.microsoft.com/office/powerpoint/2010/main" val="2038040621"/>
       </p:ext>
     </p:extLst>
   </p:cSld>
@@ -1900,7 +1901,7 @@
     </p:spTree>
     <p:extLst>
       <p:ext uri="{BB962C8B-B14F-4D97-AF65-F5344CB8AC3E}">
-        <p14:creationId xmlns:p14="http://schemas.microsoft.com/office/powerpoint/2010/main" val="555600876"/>
+        <p14:creationId xmlns:p14="http://schemas.microsoft.com/office/powerpoint/2010/main" val="3635283943"/>
       </p:ext>
     </p:extLst>
   </p:cSld>
@@ -1994,7 +1995,7 @@
     </p:spTree>
     <p:extLst>
       <p:ext uri="{BB962C8B-B14F-4D97-AF65-F5344CB8AC3E}">
-        <p14:creationId xmlns:p14="http://schemas.microsoft.com/office/powerpoint/2010/main" val="1465230751"/>
+        <p14:creationId xmlns:p14="http://schemas.microsoft.com/office/powerpoint/2010/main" val="555600876"/>
       </p:ext>
     </p:extLst>
   </p:cSld>
@@ -2053,7 +2054,7 @@
           <a:bodyPr/>
           <a:lstStyle/>
           <a:p>
-            <a:endParaRPr lang="ru-RU"/>
+            <a:endParaRPr lang="ru-RU" dirty="0"/>
           </a:p>
         </p:txBody>
       </p:sp>
@@ -2088,7 +2089,7 @@
     </p:spTree>
     <p:extLst>
       <p:ext uri="{BB962C8B-B14F-4D97-AF65-F5344CB8AC3E}">
-        <p14:creationId xmlns:p14="http://schemas.microsoft.com/office/powerpoint/2010/main" val="2434373799"/>
+        <p14:creationId xmlns:p14="http://schemas.microsoft.com/office/powerpoint/2010/main" val="1465230751"/>
       </p:ext>
     </p:extLst>
   </p:cSld>
@@ -2172,6 +2173,100 @@
                 <a:latin typeface="Times New Roman"/>
               </a:rPr>
               <a:t>26</a:t>
+            </a:fld>
+            <a:endParaRPr lang="ru-RU" sz="1400" b="0" strike="noStrike" spc="-1">
+              <a:latin typeface="Times New Roman"/>
+            </a:endParaRPr>
+          </a:p>
+        </p:txBody>
+      </p:sp>
+    </p:spTree>
+    <p:extLst>
+      <p:ext uri="{BB962C8B-B14F-4D97-AF65-F5344CB8AC3E}">
+        <p14:creationId xmlns:p14="http://schemas.microsoft.com/office/powerpoint/2010/main" val="2434373799"/>
+      </p:ext>
+    </p:extLst>
+  </p:cSld>
+  <p:clrMapOvr>
+    <a:masterClrMapping/>
+  </p:clrMapOvr>
+</p:notes>
+</file>
+
+<file path=ppt/notesSlides/notesSlide26.xml><?xml version="1.0" encoding="utf-8"?>
+<p:notes xmlns:a="http://schemas.openxmlformats.org/drawingml/2006/main" xmlns:r="http://schemas.openxmlformats.org/officeDocument/2006/relationships" xmlns:p="http://schemas.openxmlformats.org/presentationml/2006/main">
+  <p:cSld>
+    <p:spTree>
+      <p:nvGrpSpPr>
+        <p:cNvPr id="1" name=""/>
+        <p:cNvGrpSpPr/>
+        <p:nvPr/>
+      </p:nvGrpSpPr>
+      <p:grpSpPr>
+        <a:xfrm>
+          <a:off x="0" y="0"/>
+          <a:ext cx="0" cy="0"/>
+          <a:chOff x="0" y="0"/>
+          <a:chExt cx="0" cy="0"/>
+        </a:xfrm>
+      </p:grpSpPr>
+      <p:sp>
+        <p:nvSpPr>
+          <p:cNvPr id="2" name="Образ слайда 1"/>
+          <p:cNvSpPr>
+            <a:spLocks noGrp="1" noRot="1" noChangeAspect="1"/>
+          </p:cNvSpPr>
+          <p:nvPr>
+            <p:ph type="sldImg"/>
+          </p:nvPr>
+        </p:nvSpPr>
+        <p:spPr>
+          <a:xfrm>
+            <a:off x="531813" y="749300"/>
+            <a:ext cx="6562725" cy="3692525"/>
+          </a:xfrm>
+        </p:spPr>
+      </p:sp>
+      <p:sp>
+        <p:nvSpPr>
+          <p:cNvPr id="3" name="Заметки 2"/>
+          <p:cNvSpPr>
+            <a:spLocks noGrp="1"/>
+          </p:cNvSpPr>
+          <p:nvPr>
+            <p:ph type="body" idx="1"/>
+          </p:nvPr>
+        </p:nvSpPr>
+        <p:spPr/>
+        <p:txBody>
+          <a:bodyPr/>
+          <a:lstStyle/>
+          <a:p>
+            <a:endParaRPr lang="ru-RU"/>
+          </a:p>
+        </p:txBody>
+      </p:sp>
+      <p:sp>
+        <p:nvSpPr>
+          <p:cNvPr id="4" name="Номер слайда 3"/>
+          <p:cNvSpPr>
+            <a:spLocks noGrp="1"/>
+          </p:cNvSpPr>
+          <p:nvPr>
+            <p:ph type="sldNum" idx="10"/>
+          </p:nvPr>
+        </p:nvSpPr>
+        <p:spPr/>
+        <p:txBody>
+          <a:bodyPr/>
+          <a:lstStyle/>
+          <a:p>
+            <a:pPr algn="r"/>
+            <a:fld id="{CA7C9CE0-C161-4B1C-AB5A-205FFC85AFA7}" type="slidenum">
+              <a:rPr lang="ru-RU" sz="1400" b="0" strike="noStrike" spc="-1" smtClean="0">
+                <a:latin typeface="Times New Roman"/>
+              </a:rPr>
+              <a:t>27</a:t>
             </a:fld>
             <a:endParaRPr lang="ru-RU" sz="1400" b="0" strike="noStrike" spc="-1">
               <a:latin typeface="Times New Roman"/>
@@ -2464,7 +2559,7 @@
     </p:spTree>
     <p:extLst>
       <p:ext uri="{BB962C8B-B14F-4D97-AF65-F5344CB8AC3E}">
-        <p14:creationId xmlns:p14="http://schemas.microsoft.com/office/powerpoint/2010/main" val="2336736077"/>
+        <p14:creationId xmlns:p14="http://schemas.microsoft.com/office/powerpoint/2010/main" val="1146245133"/>
       </p:ext>
     </p:extLst>
   </p:cSld>
@@ -2558,7 +2653,7 @@
     </p:spTree>
     <p:extLst>
       <p:ext uri="{BB962C8B-B14F-4D97-AF65-F5344CB8AC3E}">
-        <p14:creationId xmlns:p14="http://schemas.microsoft.com/office/powerpoint/2010/main" val="1846002433"/>
+        <p14:creationId xmlns:p14="http://schemas.microsoft.com/office/powerpoint/2010/main" val="2354571799"/>
       </p:ext>
     </p:extLst>
   </p:cSld>
@@ -2617,7 +2712,7 @@
           <a:bodyPr/>
           <a:lstStyle/>
           <a:p>
-            <a:endParaRPr lang="ru-RU" dirty="0"/>
+            <a:endParaRPr lang="ru-RU"/>
           </a:p>
         </p:txBody>
       </p:sp>
@@ -2652,7 +2747,7 @@
     </p:spTree>
     <p:extLst>
       <p:ext uri="{BB962C8B-B14F-4D97-AF65-F5344CB8AC3E}">
-        <p14:creationId xmlns:p14="http://schemas.microsoft.com/office/powerpoint/2010/main" val="3404446664"/>
+        <p14:creationId xmlns:p14="http://schemas.microsoft.com/office/powerpoint/2010/main" val="1846002433"/>
       </p:ext>
     </p:extLst>
   </p:cSld>
@@ -2746,7 +2841,7 @@
     </p:spTree>
     <p:extLst>
       <p:ext uri="{BB962C8B-B14F-4D97-AF65-F5344CB8AC3E}">
-        <p14:creationId xmlns:p14="http://schemas.microsoft.com/office/powerpoint/2010/main" val="1958640478"/>
+        <p14:creationId xmlns:p14="http://schemas.microsoft.com/office/powerpoint/2010/main" val="3404446664"/>
       </p:ext>
     </p:extLst>
   </p:cSld>
@@ -2840,7 +2935,7 @@
     </p:spTree>
     <p:extLst>
       <p:ext uri="{BB962C8B-B14F-4D97-AF65-F5344CB8AC3E}">
-        <p14:creationId xmlns:p14="http://schemas.microsoft.com/office/powerpoint/2010/main" val="2722951575"/>
+        <p14:creationId xmlns:p14="http://schemas.microsoft.com/office/powerpoint/2010/main" val="1958640478"/>
       </p:ext>
     </p:extLst>
   </p:cSld>
@@ -3029,7 +3124,7 @@
           <a:p>
             <a:fld id="{894D7FE9-E167-4C1A-9882-ED30199F1B66}" type="datetimeFigureOut">
               <a:rPr lang="ru-RU" smtClean="0"/>
-              <a:t>04.10.2023</a:t>
+              <a:t>22.09.2025</a:t>
             </a:fld>
             <a:endParaRPr lang="ru-RU"/>
           </a:p>
@@ -3197,7 +3292,7 @@
           <a:p>
             <a:fld id="{894D7FE9-E167-4C1A-9882-ED30199F1B66}" type="datetimeFigureOut">
               <a:rPr lang="ru-RU" smtClean="0"/>
-              <a:t>04.10.2023</a:t>
+              <a:t>22.09.2025</a:t>
             </a:fld>
             <a:endParaRPr lang="ru-RU"/>
           </a:p>
@@ -3375,7 +3470,7 @@
           <a:p>
             <a:fld id="{894D7FE9-E167-4C1A-9882-ED30199F1B66}" type="datetimeFigureOut">
               <a:rPr lang="ru-RU" smtClean="0"/>
-              <a:t>04.10.2023</a:t>
+              <a:t>22.09.2025</a:t>
             </a:fld>
             <a:endParaRPr lang="ru-RU"/>
           </a:p>
@@ -3543,7 +3638,7 @@
           <a:p>
             <a:fld id="{894D7FE9-E167-4C1A-9882-ED30199F1B66}" type="datetimeFigureOut">
               <a:rPr lang="ru-RU" smtClean="0"/>
-              <a:t>04.10.2023</a:t>
+              <a:t>22.09.2025</a:t>
             </a:fld>
             <a:endParaRPr lang="ru-RU"/>
           </a:p>
@@ -3788,7 +3883,7 @@
           <a:p>
             <a:fld id="{894D7FE9-E167-4C1A-9882-ED30199F1B66}" type="datetimeFigureOut">
               <a:rPr lang="ru-RU" smtClean="0"/>
-              <a:t>04.10.2023</a:t>
+              <a:t>22.09.2025</a:t>
             </a:fld>
             <a:endParaRPr lang="ru-RU"/>
           </a:p>
@@ -4073,7 +4168,7 @@
           <a:p>
             <a:fld id="{894D7FE9-E167-4C1A-9882-ED30199F1B66}" type="datetimeFigureOut">
               <a:rPr lang="ru-RU" smtClean="0"/>
-              <a:t>04.10.2023</a:t>
+              <a:t>22.09.2025</a:t>
             </a:fld>
             <a:endParaRPr lang="ru-RU"/>
           </a:p>
@@ -4492,7 +4587,7 @@
           <a:p>
             <a:fld id="{894D7FE9-E167-4C1A-9882-ED30199F1B66}" type="datetimeFigureOut">
               <a:rPr lang="ru-RU" smtClean="0"/>
-              <a:t>04.10.2023</a:t>
+              <a:t>22.09.2025</a:t>
             </a:fld>
             <a:endParaRPr lang="ru-RU"/>
           </a:p>
@@ -4609,7 +4704,7 @@
           <a:p>
             <a:fld id="{894D7FE9-E167-4C1A-9882-ED30199F1B66}" type="datetimeFigureOut">
               <a:rPr lang="ru-RU" smtClean="0"/>
-              <a:t>04.10.2023</a:t>
+              <a:t>22.09.2025</a:t>
             </a:fld>
             <a:endParaRPr lang="ru-RU"/>
           </a:p>
@@ -4704,7 +4799,7 @@
           <a:p>
             <a:fld id="{894D7FE9-E167-4C1A-9882-ED30199F1B66}" type="datetimeFigureOut">
               <a:rPr lang="ru-RU" smtClean="0"/>
-              <a:t>04.10.2023</a:t>
+              <a:t>22.09.2025</a:t>
             </a:fld>
             <a:endParaRPr lang="ru-RU"/>
           </a:p>
@@ -4979,7 +5074,7 @@
           <a:p>
             <a:fld id="{894D7FE9-E167-4C1A-9882-ED30199F1B66}" type="datetimeFigureOut">
               <a:rPr lang="ru-RU" smtClean="0"/>
-              <a:t>04.10.2023</a:t>
+              <a:t>22.09.2025</a:t>
             </a:fld>
             <a:endParaRPr lang="ru-RU"/>
           </a:p>
@@ -5231,7 +5326,7 @@
           <a:p>
             <a:fld id="{894D7FE9-E167-4C1A-9882-ED30199F1B66}" type="datetimeFigureOut">
               <a:rPr lang="ru-RU" smtClean="0"/>
-              <a:t>04.10.2023</a:t>
+              <a:t>22.09.2025</a:t>
             </a:fld>
             <a:endParaRPr lang="ru-RU"/>
           </a:p>
@@ -5445,7 +5540,7 @@
           <a:p>
             <a:fld id="{894D7FE9-E167-4C1A-9882-ED30199F1B66}" type="datetimeFigureOut">
               <a:rPr lang="ru-RU" smtClean="0"/>
-              <a:t>04.10.2023</a:t>
+              <a:t>22.09.2025</a:t>
             </a:fld>
             <a:endParaRPr lang="ru-RU"/>
           </a:p>
@@ -6340,6 +6435,722 @@
         </p:nvSpPr>
         <p:spPr>
           <a:xfrm>
+            <a:off x="0" y="1268760"/>
+            <a:ext cx="12072664" cy="1692771"/>
+          </a:xfrm>
+          <a:prstGeom prst="rect">
+            <a:avLst/>
+          </a:prstGeom>
+        </p:spPr>
+        <p:txBody>
+          <a:bodyPr wrap="square">
+            <a:spAutoFit/>
+          </a:bodyPr>
+          <a:lstStyle/>
+          <a:p>
+            <a:r>
+              <a:rPr lang="ru-RU" sz="2800" dirty="0">
+                <a:solidFill>
+                  <a:schemeClr val="bg1"/>
+                </a:solidFill>
+                <a:latin typeface="Verdana" panose="020B0604030504040204" pitchFamily="34" charset="0"/>
+                <a:ea typeface="Verdana" panose="020B0604030504040204" pitchFamily="34" charset="0"/>
+                <a:cs typeface="Verdana" panose="020B0604030504040204" pitchFamily="34" charset="0"/>
+              </a:rPr>
+              <a:t>Бинарная классификация </a:t>
+            </a:r>
+            <a:r>
+              <a:rPr lang="ru-RU" sz="2800" dirty="0" smtClean="0">
+                <a:solidFill>
+                  <a:schemeClr val="bg1"/>
+                </a:solidFill>
+                <a:latin typeface="Verdana" panose="020B0604030504040204" pitchFamily="34" charset="0"/>
+                <a:ea typeface="Verdana" panose="020B0604030504040204" pitchFamily="34" charset="0"/>
+                <a:cs typeface="Verdana" panose="020B0604030504040204" pitchFamily="34" charset="0"/>
+              </a:rPr>
+              <a:t>(</a:t>
+            </a:r>
+            <a:r>
+              <a:rPr lang="ru-RU" sz="2800" dirty="0" err="1" smtClean="0">
+                <a:solidFill>
+                  <a:schemeClr val="bg1"/>
+                </a:solidFill>
+                <a:latin typeface="Verdana" panose="020B0604030504040204" pitchFamily="34" charset="0"/>
+                <a:ea typeface="Verdana" panose="020B0604030504040204" pitchFamily="34" charset="0"/>
+                <a:cs typeface="Verdana" panose="020B0604030504040204" pitchFamily="34" charset="0"/>
+              </a:rPr>
+              <a:t>двухклассовая</a:t>
+            </a:r>
+            <a:r>
+              <a:rPr lang="ru-RU" sz="2800" dirty="0" smtClean="0">
+                <a:solidFill>
+                  <a:schemeClr val="bg1"/>
+                </a:solidFill>
+                <a:latin typeface="Verdana" panose="020B0604030504040204" pitchFamily="34" charset="0"/>
+                <a:ea typeface="Verdana" panose="020B0604030504040204" pitchFamily="34" charset="0"/>
+                <a:cs typeface="Verdana" panose="020B0604030504040204" pitchFamily="34" charset="0"/>
+              </a:rPr>
+              <a:t> </a:t>
+            </a:r>
+            <a:r>
+              <a:rPr lang="ru-RU" sz="2800" dirty="0">
+                <a:solidFill>
+                  <a:schemeClr val="bg1"/>
+                </a:solidFill>
+                <a:latin typeface="Verdana" panose="020B0604030504040204" pitchFamily="34" charset="0"/>
+                <a:ea typeface="Verdana" panose="020B0604030504040204" pitchFamily="34" charset="0"/>
+                <a:cs typeface="Verdana" panose="020B0604030504040204" pitchFamily="34" charset="0"/>
+              </a:rPr>
+              <a:t>классификация )</a:t>
+            </a:r>
+          </a:p>
+          <a:p>
+            <a:endParaRPr lang="ru-RU" sz="2800" dirty="0">
+              <a:solidFill>
+                <a:schemeClr val="bg1"/>
+              </a:solidFill>
+              <a:latin typeface="Verdana" panose="020B0604030504040204" pitchFamily="34" charset="0"/>
+              <a:ea typeface="Verdana" panose="020B0604030504040204" pitchFamily="34" charset="0"/>
+              <a:cs typeface="Verdana" panose="020B0604030504040204" pitchFamily="34" charset="0"/>
+            </a:endParaRPr>
+          </a:p>
+          <a:p>
+            <a:r>
+              <a:rPr lang="ru-RU" sz="2400" dirty="0">
+                <a:solidFill>
+                  <a:schemeClr val="bg1"/>
+                </a:solidFill>
+                <a:latin typeface="Verdana" panose="020B0604030504040204" pitchFamily="34" charset="0"/>
+                <a:ea typeface="Verdana" panose="020B0604030504040204" pitchFamily="34" charset="0"/>
+                <a:cs typeface="Verdana" panose="020B0604030504040204" pitchFamily="34" charset="0"/>
+              </a:rPr>
+              <a:t>Самый технически простой случай, который служит основой для решения более сложных задач.</a:t>
+            </a:r>
+            <a:endParaRPr lang="ru-RU" dirty="0">
+              <a:solidFill>
+                <a:schemeClr val="bg1"/>
+              </a:solidFill>
+              <a:latin typeface="Verdana" panose="020B0604030504040204" pitchFamily="34" charset="0"/>
+              <a:ea typeface="Verdana" panose="020B0604030504040204" pitchFamily="34" charset="0"/>
+              <a:cs typeface="Verdana" panose="020B0604030504040204" pitchFamily="34" charset="0"/>
+            </a:endParaRPr>
+          </a:p>
+        </p:txBody>
+      </p:sp>
+      <p:pic>
+        <p:nvPicPr>
+          <p:cNvPr id="13" name="Picture 2" descr="Image Classifier - Cats🐱 vs Dogs🐶 - Towards Data Science">
+            <a:extLst>
+              <a:ext uri="{FF2B5EF4-FFF2-40B4-BE49-F238E27FC236}">
+                <a16:creationId xmlns:a16="http://schemas.microsoft.com/office/drawing/2014/main" id="{6E8652D6-3622-4194-819C-98E14200B387}"/>
+              </a:ext>
+            </a:extLst>
+          </p:cNvPr>
+          <p:cNvPicPr>
+            <a:picLocks noChangeAspect="1" noChangeArrowheads="1"/>
+          </p:cNvPicPr>
+          <p:nvPr/>
+        </p:nvPicPr>
+        <p:blipFill>
+          <a:blip r:embed="rId4" cstate="print">
+            <a:extLst>
+              <a:ext uri="{28A0092B-C50C-407E-A947-70E740481C1C}">
+                <a14:useLocalDpi xmlns:a14="http://schemas.microsoft.com/office/drawing/2010/main" val="0"/>
+              </a:ext>
+            </a:extLst>
+          </a:blip>
+          <a:srcRect/>
+          <a:stretch>
+            <a:fillRect/>
+          </a:stretch>
+        </p:blipFill>
+        <p:spPr bwMode="auto">
+          <a:xfrm>
+            <a:off x="-11930" y="3645024"/>
+            <a:ext cx="4146482" cy="2332397"/>
+          </a:xfrm>
+          <a:prstGeom prst="rect">
+            <a:avLst/>
+          </a:prstGeom>
+          <a:noFill/>
+          <a:extLst>
+            <a:ext uri="{909E8E84-426E-40DD-AFC4-6F175D3DCCD1}">
+              <a14:hiddenFill xmlns:a14="http://schemas.microsoft.com/office/drawing/2010/main">
+                <a:solidFill>
+                  <a:srgbClr val="FFFFFF"/>
+                </a:solidFill>
+              </a14:hiddenFill>
+            </a:ext>
+          </a:extLst>
+        </p:spPr>
+      </p:pic>
+      <p:pic>
+        <p:nvPicPr>
+          <p:cNvPr id="15" name="Picture 4" descr="The Great War Between Good And Evil - Good Vs Evil Cartoon ...">
+            <a:extLst>
+              <a:ext uri="{FF2B5EF4-FFF2-40B4-BE49-F238E27FC236}">
+                <a16:creationId xmlns:a16="http://schemas.microsoft.com/office/drawing/2014/main" id="{5713E765-965F-466A-9A8C-12B7674DBCD4}"/>
+              </a:ext>
+            </a:extLst>
+          </p:cNvPr>
+          <p:cNvPicPr>
+            <a:picLocks noChangeAspect="1" noChangeArrowheads="1"/>
+          </p:cNvPicPr>
+          <p:nvPr/>
+        </p:nvPicPr>
+        <p:blipFill rotWithShape="1">
+          <a:blip r:embed="rId5">
+            <a:extLst>
+              <a:ext uri="{28A0092B-C50C-407E-A947-70E740481C1C}">
+                <a14:useLocalDpi xmlns:a14="http://schemas.microsoft.com/office/drawing/2010/main" val="0"/>
+              </a:ext>
+            </a:extLst>
+          </a:blip>
+          <a:srcRect l="26128" t="15442" r="21989" b="8072"/>
+          <a:stretch/>
+        </p:blipFill>
+        <p:spPr bwMode="auto">
+          <a:xfrm>
+            <a:off x="7896200" y="3356992"/>
+            <a:ext cx="3913853" cy="2575335"/>
+          </a:xfrm>
+          <a:prstGeom prst="rect">
+            <a:avLst/>
+          </a:prstGeom>
+          <a:noFill/>
+          <a:extLst>
+            <a:ext uri="{909E8E84-426E-40DD-AFC4-6F175D3DCCD1}">
+              <a14:hiddenFill xmlns:a14="http://schemas.microsoft.com/office/drawing/2010/main">
+                <a:solidFill>
+                  <a:srgbClr val="FFFFFF"/>
+                </a:solidFill>
+              </a14:hiddenFill>
+            </a:ext>
+          </a:extLst>
+        </p:spPr>
+      </p:pic>
+      <p:pic>
+        <p:nvPicPr>
+          <p:cNvPr id="16" name="Picture 6" descr="Healthy Living And Unhealthy Lifestyle Comparison, Healthy Fit ...">
+            <a:extLst>
+              <a:ext uri="{FF2B5EF4-FFF2-40B4-BE49-F238E27FC236}">
+                <a16:creationId xmlns:a16="http://schemas.microsoft.com/office/drawing/2014/main" id="{48CA30B7-6BEC-4B31-8C35-03F952E8FB8E}"/>
+              </a:ext>
+            </a:extLst>
+          </p:cNvPr>
+          <p:cNvPicPr>
+            <a:picLocks noChangeAspect="1" noChangeArrowheads="1"/>
+          </p:cNvPicPr>
+          <p:nvPr/>
+        </p:nvPicPr>
+        <p:blipFill rotWithShape="1">
+          <a:blip r:embed="rId6" cstate="print">
+            <a:extLst>
+              <a:ext uri="{28A0092B-C50C-407E-A947-70E740481C1C}">
+                <a14:useLocalDpi xmlns:a14="http://schemas.microsoft.com/office/drawing/2010/main" val="0"/>
+              </a:ext>
+            </a:extLst>
+          </a:blip>
+          <a:srcRect l="6034" t="8368" r="4679" b="7798"/>
+          <a:stretch/>
+        </p:blipFill>
+        <p:spPr bwMode="auto">
+          <a:xfrm>
+            <a:off x="4367808" y="3356992"/>
+            <a:ext cx="3240360" cy="3042475"/>
+          </a:xfrm>
+          <a:prstGeom prst="rect">
+            <a:avLst/>
+          </a:prstGeom>
+          <a:noFill/>
+          <a:extLst>
+            <a:ext uri="{909E8E84-426E-40DD-AFC4-6F175D3DCCD1}">
+              <a14:hiddenFill xmlns:a14="http://schemas.microsoft.com/office/drawing/2010/main">
+                <a:solidFill>
+                  <a:srgbClr val="FFFFFF"/>
+                </a:solidFill>
+              </a14:hiddenFill>
+            </a:ext>
+          </a:extLst>
+        </p:spPr>
+      </p:pic>
+      <p:sp>
+        <p:nvSpPr>
+          <p:cNvPr id="17" name="Нижний колонтитул 6"/>
+          <p:cNvSpPr>
+            <a:spLocks noGrp="1"/>
+          </p:cNvSpPr>
+          <p:nvPr>
+            <p:ph type="ftr" idx="4294967295"/>
+          </p:nvPr>
+        </p:nvSpPr>
+        <p:spPr>
+          <a:xfrm>
+            <a:off x="3143672" y="176904"/>
+            <a:ext cx="7180730" cy="484915"/>
+          </a:xfrm>
+          <a:prstGeom prst="rect">
+            <a:avLst/>
+          </a:prstGeom>
+        </p:spPr>
+        <p:txBody>
+          <a:bodyPr/>
+          <a:lstStyle/>
+          <a:p>
+            <a:r>
+              <a:rPr lang="ru-RU" sz="3200" b="1" spc="-1" dirty="0">
+                <a:solidFill>
+                  <a:schemeClr val="bg1"/>
+                </a:solidFill>
+                <a:latin typeface="Verdana" panose="020B0604030504040204" pitchFamily="34" charset="0"/>
+                <a:ea typeface="Verdana" panose="020B0604030504040204" pitchFamily="34" charset="0"/>
+              </a:rPr>
+              <a:t>Типы классов</a:t>
+            </a:r>
+          </a:p>
+        </p:txBody>
+      </p:sp>
+    </p:spTree>
+    <p:extLst>
+      <p:ext uri="{BB962C8B-B14F-4D97-AF65-F5344CB8AC3E}">
+        <p14:creationId xmlns:p14="http://schemas.microsoft.com/office/powerpoint/2010/main" val="3839313772"/>
+      </p:ext>
+    </p:extLst>
+  </p:cSld>
+  <p:clrMapOvr>
+    <a:masterClrMapping/>
+  </p:clrMapOvr>
+  <p:timing>
+    <p:tnLst>
+      <p:par>
+        <p:cTn id="1" dur="indefinite" restart="never" nodeType="tmRoot">
+          <p:childTnLst>
+            <p:seq concurrent="1" nextAc="seek">
+              <p:cTn id="2" dur="indefinite" nodeType="mainSeq">
+                <p:childTnLst>
+                  <p:par>
+                    <p:cTn id="3" fill="hold">
+                      <p:stCondLst>
+                        <p:cond delay="indefinite"/>
+                      </p:stCondLst>
+                      <p:childTnLst>
+                        <p:par>
+                          <p:cTn id="4" fill="hold">
+                            <p:stCondLst>
+                              <p:cond delay="0"/>
+                            </p:stCondLst>
+                            <p:childTnLst>
+                              <p:par>
+                                <p:cTn id="5" presetID="1" presetClass="entr" presetSubtype="0" fill="hold" nodeType="clickEffect">
+                                  <p:stCondLst>
+                                    <p:cond delay="0"/>
+                                  </p:stCondLst>
+                                  <p:childTnLst>
+                                    <p:set>
+                                      <p:cBhvr>
+                                        <p:cTn id="6" dur="1" fill="hold">
+                                          <p:stCondLst>
+                                            <p:cond delay="0"/>
+                                          </p:stCondLst>
+                                        </p:cTn>
+                                        <p:tgtEl>
+                                          <p:spTgt spid="16"/>
+                                        </p:tgtEl>
+                                        <p:attrNameLst>
+                                          <p:attrName>style.visibility</p:attrName>
+                                        </p:attrNameLst>
+                                      </p:cBhvr>
+                                      <p:to>
+                                        <p:strVal val="visible"/>
+                                      </p:to>
+                                    </p:set>
+                                  </p:childTnLst>
+                                </p:cTn>
+                              </p:par>
+                            </p:childTnLst>
+                          </p:cTn>
+                        </p:par>
+                      </p:childTnLst>
+                    </p:cTn>
+                  </p:par>
+                  <p:par>
+                    <p:cTn id="7" fill="hold">
+                      <p:stCondLst>
+                        <p:cond delay="indefinite"/>
+                      </p:stCondLst>
+                      <p:childTnLst>
+                        <p:par>
+                          <p:cTn id="8" fill="hold">
+                            <p:stCondLst>
+                              <p:cond delay="0"/>
+                            </p:stCondLst>
+                            <p:childTnLst>
+                              <p:par>
+                                <p:cTn id="9" presetID="1" presetClass="entr" presetSubtype="0" fill="hold" nodeType="clickEffect">
+                                  <p:stCondLst>
+                                    <p:cond delay="0"/>
+                                  </p:stCondLst>
+                                  <p:childTnLst>
+                                    <p:set>
+                                      <p:cBhvr>
+                                        <p:cTn id="10" dur="1" fill="hold">
+                                          <p:stCondLst>
+                                            <p:cond delay="0"/>
+                                          </p:stCondLst>
+                                        </p:cTn>
+                                        <p:tgtEl>
+                                          <p:spTgt spid="13"/>
+                                        </p:tgtEl>
+                                        <p:attrNameLst>
+                                          <p:attrName>style.visibility</p:attrName>
+                                        </p:attrNameLst>
+                                      </p:cBhvr>
+                                      <p:to>
+                                        <p:strVal val="visible"/>
+                                      </p:to>
+                                    </p:set>
+                                  </p:childTnLst>
+                                </p:cTn>
+                              </p:par>
+                            </p:childTnLst>
+                          </p:cTn>
+                        </p:par>
+                      </p:childTnLst>
+                    </p:cTn>
+                  </p:par>
+                  <p:par>
+                    <p:cTn id="11" fill="hold">
+                      <p:stCondLst>
+                        <p:cond delay="indefinite"/>
+                      </p:stCondLst>
+                      <p:childTnLst>
+                        <p:par>
+                          <p:cTn id="12" fill="hold">
+                            <p:stCondLst>
+                              <p:cond delay="0"/>
+                            </p:stCondLst>
+                            <p:childTnLst>
+                              <p:par>
+                                <p:cTn id="13" presetID="1" presetClass="entr" presetSubtype="0" fill="hold" nodeType="clickEffect">
+                                  <p:stCondLst>
+                                    <p:cond delay="0"/>
+                                  </p:stCondLst>
+                                  <p:childTnLst>
+                                    <p:set>
+                                      <p:cBhvr>
+                                        <p:cTn id="14" dur="1" fill="hold">
+                                          <p:stCondLst>
+                                            <p:cond delay="0"/>
+                                          </p:stCondLst>
+                                        </p:cTn>
+                                        <p:tgtEl>
+                                          <p:spTgt spid="15"/>
+                                        </p:tgtEl>
+                                        <p:attrNameLst>
+                                          <p:attrName>style.visibility</p:attrName>
+                                        </p:attrNameLst>
+                                      </p:cBhvr>
+                                      <p:to>
+                                        <p:strVal val="visible"/>
+                                      </p:to>
+                                    </p:set>
+                                  </p:childTnLst>
+                                </p:cTn>
+                              </p:par>
+                            </p:childTnLst>
+                          </p:cTn>
+                        </p:par>
+                      </p:childTnLst>
+                    </p:cTn>
+                  </p:par>
+                  <p:par>
+                    <p:cTn id="15" fill="hold">
+                      <p:stCondLst>
+                        <p:cond delay="indefinite"/>
+                      </p:stCondLst>
+                      <p:childTnLst>
+                        <p:par>
+                          <p:cTn id="16" fill="hold">
+                            <p:stCondLst>
+                              <p:cond delay="0"/>
+                            </p:stCondLst>
+                            <p:childTnLst>
+                              <p:par>
+                                <p:cTn id="17" presetID="1" presetClass="entr" presetSubtype="0" fill="hold" grpId="0" nodeType="clickEffect">
+                                  <p:stCondLst>
+                                    <p:cond delay="0"/>
+                                  </p:stCondLst>
+                                  <p:childTnLst>
+                                    <p:set>
+                                      <p:cBhvr>
+                                        <p:cTn id="18" dur="1" fill="hold">
+                                          <p:stCondLst>
+                                            <p:cond delay="0"/>
+                                          </p:stCondLst>
+                                        </p:cTn>
+                                        <p:tgtEl>
+                                          <p:spTgt spid="21"/>
+                                        </p:tgtEl>
+                                        <p:attrNameLst>
+                                          <p:attrName>style.visibility</p:attrName>
+                                        </p:attrNameLst>
+                                      </p:cBhvr>
+                                      <p:to>
+                                        <p:strVal val="visible"/>
+                                      </p:to>
+                                    </p:set>
+                                  </p:childTnLst>
+                                </p:cTn>
+                              </p:par>
+                            </p:childTnLst>
+                          </p:cTn>
+                        </p:par>
+                      </p:childTnLst>
+                    </p:cTn>
+                  </p:par>
+                </p:childTnLst>
+              </p:cTn>
+              <p:prevCondLst>
+                <p:cond evt="onPrev" delay="0">
+                  <p:tgtEl>
+                    <p:sldTgt/>
+                  </p:tgtEl>
+                </p:cond>
+              </p:prevCondLst>
+              <p:nextCondLst>
+                <p:cond evt="onNext" delay="0">
+                  <p:tgtEl>
+                    <p:sldTgt/>
+                  </p:tgtEl>
+                </p:cond>
+              </p:nextCondLst>
+            </p:seq>
+          </p:childTnLst>
+        </p:cTn>
+      </p:par>
+    </p:tnLst>
+    <p:bldLst>
+      <p:bldP spid="21" grpId="0"/>
+    </p:bldLst>
+  </p:timing>
+</p:sld>
+</file>
+
+<file path=ppt/slides/slide11.xml><?xml version="1.0" encoding="utf-8"?>
+<p:sld xmlns:a="http://schemas.openxmlformats.org/drawingml/2006/main" xmlns:r="http://schemas.openxmlformats.org/officeDocument/2006/relationships" xmlns:p="http://schemas.openxmlformats.org/presentationml/2006/main">
+  <p:cSld>
+    <p:spTree>
+      <p:nvGrpSpPr>
+        <p:cNvPr id="1" name=""/>
+        <p:cNvGrpSpPr/>
+        <p:nvPr/>
+      </p:nvGrpSpPr>
+      <p:grpSpPr>
+        <a:xfrm>
+          <a:off x="0" y="0"/>
+          <a:ext cx="0" cy="0"/>
+          <a:chOff x="0" y="0"/>
+          <a:chExt cx="0" cy="0"/>
+        </a:xfrm>
+      </p:grpSpPr>
+      <p:sp>
+        <p:nvSpPr>
+          <p:cNvPr id="8" name="Номер слайда 7"/>
+          <p:cNvSpPr>
+            <a:spLocks noGrp="1"/>
+          </p:cNvSpPr>
+          <p:nvPr>
+            <p:ph type="sldNum" idx="4294967295"/>
+          </p:nvPr>
+        </p:nvSpPr>
+        <p:spPr>
+          <a:xfrm>
+            <a:off x="11235591" y="6475125"/>
+            <a:ext cx="956409" cy="382875"/>
+          </a:xfrm>
+          <a:prstGeom prst="rect">
+            <a:avLst/>
+          </a:prstGeom>
+        </p:spPr>
+        <p:txBody>
+          <a:bodyPr/>
+          <a:lstStyle/>
+          <a:p>
+            <a:fld id="{3CD50FA3-7693-4AD1-9E83-82DEDF06D4CE}" type="slidenum">
+              <a:rPr lang="ru-RU" sz="2400" spc="-1">
+                <a:solidFill>
+                  <a:schemeClr val="bg1"/>
+                </a:solidFill>
+                <a:latin typeface="Verdana" panose="020B0604030504040204" pitchFamily="34" charset="0"/>
+                <a:ea typeface="Verdana" panose="020B0604030504040204" pitchFamily="34" charset="0"/>
+              </a:rPr>
+              <a:pPr/>
+              <a:t>11</a:t>
+            </a:fld>
+            <a:endParaRPr lang="ru-RU" sz="2400" spc="-1" dirty="0">
+              <a:solidFill>
+                <a:schemeClr val="bg1"/>
+              </a:solidFill>
+              <a:latin typeface="Verdana" panose="020B0604030504040204" pitchFamily="34" charset="0"/>
+              <a:ea typeface="Verdana" panose="020B0604030504040204" pitchFamily="34" charset="0"/>
+            </a:endParaRPr>
+          </a:p>
+        </p:txBody>
+      </p:sp>
+      <p:pic>
+        <p:nvPicPr>
+          <p:cNvPr id="12" name="Picture 2"/>
+          <p:cNvPicPr>
+            <a:picLocks noChangeAspect="1" noChangeArrowheads="1"/>
+          </p:cNvPicPr>
+          <p:nvPr/>
+        </p:nvPicPr>
+        <p:blipFill>
+          <a:blip r:embed="rId3" cstate="print">
+            <a:extLst>
+              <a:ext uri="{28A0092B-C50C-407E-A947-70E740481C1C}">
+                <a14:useLocalDpi xmlns:a14="http://schemas.microsoft.com/office/drawing/2010/main" val="0"/>
+              </a:ext>
+            </a:extLst>
+          </a:blip>
+          <a:srcRect/>
+          <a:stretch>
+            <a:fillRect/>
+          </a:stretch>
+        </p:blipFill>
+        <p:spPr bwMode="auto">
+          <a:xfrm>
+            <a:off x="0" y="0"/>
+            <a:ext cx="1769838" cy="1121419"/>
+          </a:xfrm>
+          <a:prstGeom prst="rect">
+            <a:avLst/>
+          </a:prstGeom>
+          <a:noFill/>
+          <a:ln>
+            <a:noFill/>
+          </a:ln>
+          <a:extLst>
+            <a:ext uri="{909E8E84-426E-40DD-AFC4-6F175D3DCCD1}">
+              <a14:hiddenFill xmlns:a14="http://schemas.microsoft.com/office/drawing/2010/main">
+                <a:solidFill>
+                  <a:schemeClr val="accent1"/>
+                </a:solidFill>
+              </a14:hiddenFill>
+            </a:ext>
+            <a:ext uri="{91240B29-F687-4F45-9708-019B960494DF}">
+              <a14:hiddenLine xmlns:a14="http://schemas.microsoft.com/office/drawing/2010/main" w="9525">
+                <a:solidFill>
+                  <a:schemeClr val="tx1"/>
+                </a:solidFill>
+                <a:miter lim="800000"/>
+                <a:headEnd/>
+                <a:tailEnd/>
+              </a14:hiddenLine>
+            </a:ext>
+          </a:extLst>
+        </p:spPr>
+      </p:pic>
+      <p:cxnSp>
+        <p:nvCxnSpPr>
+          <p:cNvPr id="14" name="Прямая соединительная линия 13"/>
+          <p:cNvCxnSpPr>
+            <a:cxnSpLocks/>
+          </p:cNvCxnSpPr>
+          <p:nvPr/>
+        </p:nvCxnSpPr>
+        <p:spPr>
+          <a:xfrm>
+            <a:off x="0" y="884681"/>
+            <a:ext cx="12192000" cy="21704"/>
+          </a:xfrm>
+          <a:prstGeom prst="line">
+            <a:avLst/>
+          </a:prstGeom>
+          <a:ln w="28575">
+            <a:solidFill>
+              <a:schemeClr val="bg1">
+                <a:lumMod val="95000"/>
+              </a:schemeClr>
+            </a:solidFill>
+          </a:ln>
+        </p:spPr>
+        <p:style>
+          <a:lnRef idx="1">
+            <a:schemeClr val="accent3"/>
+          </a:lnRef>
+          <a:fillRef idx="0">
+            <a:schemeClr val="accent3"/>
+          </a:fillRef>
+          <a:effectRef idx="0">
+            <a:schemeClr val="accent3"/>
+          </a:effectRef>
+          <a:fontRef idx="minor">
+            <a:schemeClr val="tx1"/>
+          </a:fontRef>
+        </p:style>
+      </p:cxnSp>
+      <p:sp>
+        <p:nvSpPr>
+          <p:cNvPr id="21" name="Прямоугольник 20">
+            <a:extLst>
+              <a:ext uri="{FF2B5EF4-FFF2-40B4-BE49-F238E27FC236}">
+                <a16:creationId xmlns:a16="http://schemas.microsoft.com/office/drawing/2014/main" id="{07DA0CA1-74EB-40CF-9E51-E165A13A71BD}"/>
+              </a:ext>
+            </a:extLst>
+          </p:cNvPr>
+          <p:cNvSpPr/>
+          <p:nvPr/>
+        </p:nvSpPr>
+        <p:spPr>
+          <a:xfrm>
+            <a:off x="11556540" y="138599"/>
+            <a:ext cx="314510" cy="523220"/>
+          </a:xfrm>
+          <a:prstGeom prst="rect">
+            <a:avLst/>
+          </a:prstGeom>
+        </p:spPr>
+        <p:txBody>
+          <a:bodyPr wrap="none">
+            <a:spAutoFit/>
+          </a:bodyPr>
+          <a:lstStyle/>
+          <a:p>
+            <a:r>
+              <a:rPr lang="en-US" sz="2800" dirty="0">
+                <a:solidFill>
+                  <a:schemeClr val="bg1"/>
+                </a:solidFill>
+                <a:latin typeface="Verdana" panose="020B0604030504040204" pitchFamily="34" charset="0"/>
+                <a:ea typeface="Verdana" panose="020B0604030504040204" pitchFamily="34" charset="0"/>
+              </a:rPr>
+              <a:t>.</a:t>
+            </a:r>
+            <a:endParaRPr lang="ru-RU" sz="2800" dirty="0">
+              <a:solidFill>
+                <a:schemeClr val="bg1"/>
+              </a:solidFill>
+              <a:latin typeface="Verdana" panose="020B0604030504040204" pitchFamily="34" charset="0"/>
+              <a:ea typeface="Verdana" panose="020B0604030504040204" pitchFamily="34" charset="0"/>
+            </a:endParaRPr>
+          </a:p>
+        </p:txBody>
+      </p:sp>
+      <p:sp>
+        <p:nvSpPr>
+          <p:cNvPr id="11" name="Прямоугольник 10">
+            <a:extLst>
+              <a:ext uri="{FF2B5EF4-FFF2-40B4-BE49-F238E27FC236}">
+                <a16:creationId xmlns:a16="http://schemas.microsoft.com/office/drawing/2014/main" id="{9D8A01F7-D3FC-4FAD-8C8B-430469CDA6A6}"/>
+              </a:ext>
+            </a:extLst>
+          </p:cNvPr>
+          <p:cNvSpPr/>
+          <p:nvPr/>
+        </p:nvSpPr>
+        <p:spPr>
+          <a:xfrm>
             <a:off x="119336" y="1412776"/>
             <a:ext cx="7524029" cy="2062103"/>
           </a:xfrm>
@@ -6804,7 +7615,7 @@
 </p:sld>
 </file>
 
-<file path=ppt/slides/slide11.xml><?xml version="1.0" encoding="utf-8"?>
+<file path=ppt/slides/slide12.xml><?xml version="1.0" encoding="utf-8"?>
 <p:sld xmlns:a="http://schemas.openxmlformats.org/drawingml/2006/main" xmlns:r="http://schemas.openxmlformats.org/officeDocument/2006/relationships" xmlns:p="http://schemas.openxmlformats.org/presentationml/2006/main">
   <p:cSld>
     <p:spTree>
@@ -6853,7 +7664,7 @@
                 <a:ea typeface="Verdana" panose="020B0604030504040204" pitchFamily="34" charset="0"/>
               </a:rPr>
               <a:pPr/>
-              <a:t>11</a:t>
+              <a:t>12</a:t>
             </a:fld>
             <a:endParaRPr lang="ru-RU" sz="2400" spc="-1" dirty="0">
               <a:solidFill>
@@ -7705,7 +8516,7 @@
 </p:sld>
 </file>
 
-<file path=ppt/slides/slide12.xml><?xml version="1.0" encoding="utf-8"?>
+<file path=ppt/slides/slide13.xml><?xml version="1.0" encoding="utf-8"?>
 <p:sld xmlns:a="http://schemas.openxmlformats.org/drawingml/2006/main" xmlns:r="http://schemas.openxmlformats.org/officeDocument/2006/relationships" xmlns:p="http://schemas.openxmlformats.org/presentationml/2006/main">
   <p:cSld>
     <p:spTree>
@@ -7754,7 +8565,7 @@
                 <a:ea typeface="Verdana" panose="020B0604030504040204" pitchFamily="34" charset="0"/>
               </a:rPr>
               <a:pPr/>
-              <a:t>12</a:t>
+              <a:t>13</a:t>
             </a:fld>
             <a:endParaRPr lang="ru-RU" sz="2400" spc="-1" dirty="0">
               <a:solidFill>
@@ -8725,7 +9536,7 @@
 </p:sld>
 </file>
 
-<file path=ppt/slides/slide13.xml><?xml version="1.0" encoding="utf-8"?>
+<file path=ppt/slides/slide14.xml><?xml version="1.0" encoding="utf-8"?>
 <p:sld xmlns:a="http://schemas.openxmlformats.org/drawingml/2006/main" xmlns:r="http://schemas.openxmlformats.org/officeDocument/2006/relationships" xmlns:p="http://schemas.openxmlformats.org/presentationml/2006/main">
   <p:cSld>
     <p:spTree>
@@ -8774,7 +9585,7 @@
                 <a:ea typeface="Verdana" panose="020B0604030504040204" pitchFamily="34" charset="0"/>
               </a:rPr>
               <a:pPr/>
-              <a:t>13</a:t>
+              <a:t>14</a:t>
             </a:fld>
             <a:endParaRPr lang="ru-RU" sz="2400" spc="-1" dirty="0">
               <a:solidFill>
@@ -9359,7 +10170,7 @@
 </p:sld>
 </file>
 
-<file path=ppt/slides/slide14.xml><?xml version="1.0" encoding="utf-8"?>
+<file path=ppt/slides/slide15.xml><?xml version="1.0" encoding="utf-8"?>
 <p:sld xmlns:a="http://schemas.openxmlformats.org/drawingml/2006/main" xmlns:r="http://schemas.openxmlformats.org/officeDocument/2006/relationships" xmlns:p="http://schemas.openxmlformats.org/presentationml/2006/main">
   <p:cSld>
     <p:spTree>
@@ -9408,7 +10219,7 @@
                 <a:ea typeface="Verdana" panose="020B0604030504040204" pitchFamily="34" charset="0"/>
               </a:rPr>
               <a:pPr/>
-              <a:t>14</a:t>
+              <a:t>15</a:t>
             </a:fld>
             <a:endParaRPr lang="ru-RU" sz="2400" spc="-1" dirty="0">
               <a:solidFill>
@@ -9659,7 +10470,7 @@
 </p:sld>
 </file>
 
-<file path=ppt/slides/slide15.xml><?xml version="1.0" encoding="utf-8"?>
+<file path=ppt/slides/slide16.xml><?xml version="1.0" encoding="utf-8"?>
 <p:sld xmlns:a="http://schemas.openxmlformats.org/drawingml/2006/main" xmlns:r="http://schemas.openxmlformats.org/officeDocument/2006/relationships" xmlns:p="http://schemas.openxmlformats.org/presentationml/2006/main">
   <p:cSld>
     <p:spTree>
@@ -9708,7 +10519,7 @@
                 <a:ea typeface="Verdana" panose="020B0604030504040204" pitchFamily="34" charset="0"/>
               </a:rPr>
               <a:pPr/>
-              <a:t>15</a:t>
+              <a:t>16</a:t>
             </a:fld>
             <a:endParaRPr lang="ru-RU" sz="2400" spc="-1" dirty="0">
               <a:solidFill>
@@ -12387,7 +13198,7 @@
 </p:sld>
 </file>
 
-<file path=ppt/slides/slide16.xml><?xml version="1.0" encoding="utf-8"?>
+<file path=ppt/slides/slide17.xml><?xml version="1.0" encoding="utf-8"?>
 <p:sld xmlns:a="http://schemas.openxmlformats.org/drawingml/2006/main" xmlns:r="http://schemas.openxmlformats.org/officeDocument/2006/relationships" xmlns:p="http://schemas.openxmlformats.org/presentationml/2006/main">
   <p:cSld>
     <p:spTree>
@@ -12436,7 +13247,7 @@
                 <a:ea typeface="Verdana" panose="020B0604030504040204" pitchFamily="34" charset="0"/>
               </a:rPr>
               <a:pPr/>
-              <a:t>16</a:t>
+              <a:t>17</a:t>
             </a:fld>
             <a:endParaRPr lang="ru-RU" sz="2400" spc="-1" dirty="0">
               <a:solidFill>
@@ -12762,7 +13573,7 @@
 </p:sld>
 </file>
 
-<file path=ppt/slides/slide17.xml><?xml version="1.0" encoding="utf-8"?>
+<file path=ppt/slides/slide18.xml><?xml version="1.0" encoding="utf-8"?>
 <p:sld xmlns:a="http://schemas.openxmlformats.org/drawingml/2006/main" xmlns:r="http://schemas.openxmlformats.org/officeDocument/2006/relationships" xmlns:p="http://schemas.openxmlformats.org/presentationml/2006/main">
   <p:cSld>
     <p:spTree>
@@ -12811,7 +13622,7 @@
                 <a:ea typeface="Verdana" panose="020B0604030504040204" pitchFamily="34" charset="0"/>
               </a:rPr>
               <a:pPr/>
-              <a:t>17</a:t>
+              <a:t>18</a:t>
             </a:fld>
             <a:endParaRPr lang="ru-RU" sz="2400" spc="-1" dirty="0">
               <a:solidFill>
@@ -14565,13 +15376,6 @@
               </a:rPr>
               <a:t>Матрица Ошибок </a:t>
             </a:r>
-            <a:endParaRPr lang="ru-RU" sz="3200" b="1" dirty="0">
-              <a:solidFill>
-                <a:schemeClr val="bg1"/>
-              </a:solidFill>
-              <a:latin typeface="Verdana" panose="020B0604030504040204" pitchFamily="34" charset="0"/>
-              <a:ea typeface="Verdana" panose="020B0604030504040204" pitchFamily="34" charset="0"/>
-            </a:endParaRPr>
           </a:p>
         </p:txBody>
       </p:sp>
@@ -14711,7 +15515,7 @@
 </p:sld>
 </file>
 
-<file path=ppt/slides/slide18.xml><?xml version="1.0" encoding="utf-8"?>
+<file path=ppt/slides/slide19.xml><?xml version="1.0" encoding="utf-8"?>
 <p:sld xmlns:a="http://schemas.openxmlformats.org/drawingml/2006/main" xmlns:r="http://schemas.openxmlformats.org/officeDocument/2006/relationships" xmlns:p="http://schemas.openxmlformats.org/presentationml/2006/main">
   <p:cSld>
     <p:spTree>
@@ -14760,7 +15564,7 @@
                 <a:ea typeface="Verdana" panose="020B0604030504040204" pitchFamily="34" charset="0"/>
               </a:rPr>
               <a:pPr/>
-              <a:t>18</a:t>
+              <a:t>19</a:t>
             </a:fld>
             <a:endParaRPr lang="ru-RU" sz="2400" spc="-1" dirty="0">
               <a:solidFill>
@@ -15295,7 +16099,547 @@
 </p:sld>
 </file>
 
-<file path=ppt/slides/slide19.xml><?xml version="1.0" encoding="utf-8"?>
+<file path=ppt/slides/slide2.xml><?xml version="1.0" encoding="utf-8"?>
+<p:sld xmlns:a="http://schemas.openxmlformats.org/drawingml/2006/main" xmlns:r="http://schemas.openxmlformats.org/officeDocument/2006/relationships" xmlns:p="http://schemas.openxmlformats.org/presentationml/2006/main">
+  <p:cSld>
+    <p:spTree>
+      <p:nvGrpSpPr>
+        <p:cNvPr id="1" name=""/>
+        <p:cNvGrpSpPr/>
+        <p:nvPr/>
+      </p:nvGrpSpPr>
+      <p:grpSpPr>
+        <a:xfrm>
+          <a:off x="0" y="0"/>
+          <a:ext cx="0" cy="0"/>
+          <a:chOff x="0" y="0"/>
+          <a:chExt cx="0" cy="0"/>
+        </a:xfrm>
+      </p:grpSpPr>
+      <p:sp>
+        <p:nvSpPr>
+          <p:cNvPr id="8" name="Номер слайда 7"/>
+          <p:cNvSpPr>
+            <a:spLocks noGrp="1"/>
+          </p:cNvSpPr>
+          <p:nvPr>
+            <p:ph type="sldNum" idx="4294967295"/>
+          </p:nvPr>
+        </p:nvSpPr>
+        <p:spPr>
+          <a:xfrm>
+            <a:off x="11235591" y="6442266"/>
+            <a:ext cx="956409" cy="382875"/>
+          </a:xfrm>
+          <a:prstGeom prst="rect">
+            <a:avLst/>
+          </a:prstGeom>
+        </p:spPr>
+        <p:txBody>
+          <a:bodyPr/>
+          <a:lstStyle/>
+          <a:p>
+            <a:fld id="{3CD50FA3-7693-4AD1-9E83-82DEDF06D4CE}" type="slidenum">
+              <a:rPr lang="ru-RU" sz="2400" spc="-1">
+                <a:solidFill>
+                  <a:schemeClr val="bg1"/>
+                </a:solidFill>
+                <a:latin typeface="Verdana" panose="020B0604030504040204" pitchFamily="34" charset="0"/>
+                <a:ea typeface="Verdana" panose="020B0604030504040204" pitchFamily="34" charset="0"/>
+              </a:rPr>
+              <a:pPr/>
+              <a:t>2</a:t>
+            </a:fld>
+            <a:endParaRPr lang="ru-RU" sz="2400" spc="-1" dirty="0">
+              <a:solidFill>
+                <a:schemeClr val="bg1"/>
+              </a:solidFill>
+              <a:latin typeface="Verdana" panose="020B0604030504040204" pitchFamily="34" charset="0"/>
+              <a:ea typeface="Verdana" panose="020B0604030504040204" pitchFamily="34" charset="0"/>
+            </a:endParaRPr>
+          </a:p>
+        </p:txBody>
+      </p:sp>
+      <p:sp>
+        <p:nvSpPr>
+          <p:cNvPr id="10" name="Нижний колонтитул 6"/>
+          <p:cNvSpPr>
+            <a:spLocks noGrp="1"/>
+          </p:cNvSpPr>
+          <p:nvPr>
+            <p:ph type="ftr" idx="4294967295"/>
+          </p:nvPr>
+        </p:nvSpPr>
+        <p:spPr>
+          <a:xfrm>
+            <a:off x="3143672" y="176904"/>
+            <a:ext cx="7180730" cy="484915"/>
+          </a:xfrm>
+          <a:prstGeom prst="rect">
+            <a:avLst/>
+          </a:prstGeom>
+        </p:spPr>
+        <p:txBody>
+          <a:bodyPr/>
+          <a:lstStyle/>
+          <a:p>
+            <a:r>
+              <a:rPr lang="ru-RU" sz="3200" b="1" spc="-1" dirty="0">
+                <a:solidFill>
+                  <a:schemeClr val="bg1"/>
+                </a:solidFill>
+                <a:latin typeface="Verdana" panose="020B0604030504040204" pitchFamily="34" charset="0"/>
+                <a:ea typeface="Verdana" panose="020B0604030504040204" pitchFamily="34" charset="0"/>
+              </a:rPr>
+              <a:t>В предыдущей серии</a:t>
+            </a:r>
+          </a:p>
+        </p:txBody>
+      </p:sp>
+      <p:pic>
+        <p:nvPicPr>
+          <p:cNvPr id="12" name="Picture 2"/>
+          <p:cNvPicPr>
+            <a:picLocks noChangeAspect="1" noChangeArrowheads="1"/>
+          </p:cNvPicPr>
+          <p:nvPr/>
+        </p:nvPicPr>
+        <p:blipFill>
+          <a:blip r:embed="rId3" cstate="print">
+            <a:extLst>
+              <a:ext uri="{28A0092B-C50C-407E-A947-70E740481C1C}">
+                <a14:useLocalDpi xmlns:a14="http://schemas.microsoft.com/office/drawing/2010/main" val="0"/>
+              </a:ext>
+            </a:extLst>
+          </a:blip>
+          <a:srcRect/>
+          <a:stretch>
+            <a:fillRect/>
+          </a:stretch>
+        </p:blipFill>
+        <p:spPr bwMode="auto">
+          <a:xfrm>
+            <a:off x="0" y="0"/>
+            <a:ext cx="1769838" cy="1121419"/>
+          </a:xfrm>
+          <a:prstGeom prst="rect">
+            <a:avLst/>
+          </a:prstGeom>
+          <a:noFill/>
+          <a:ln>
+            <a:noFill/>
+          </a:ln>
+          <a:extLst>
+            <a:ext uri="{909E8E84-426E-40DD-AFC4-6F175D3DCCD1}">
+              <a14:hiddenFill xmlns:a14="http://schemas.microsoft.com/office/drawing/2010/main">
+                <a:solidFill>
+                  <a:schemeClr val="accent1"/>
+                </a:solidFill>
+              </a14:hiddenFill>
+            </a:ext>
+            <a:ext uri="{91240B29-F687-4F45-9708-019B960494DF}">
+              <a14:hiddenLine xmlns:a14="http://schemas.microsoft.com/office/drawing/2010/main" w="9525">
+                <a:solidFill>
+                  <a:schemeClr val="tx1"/>
+                </a:solidFill>
+                <a:miter lim="800000"/>
+                <a:headEnd/>
+                <a:tailEnd/>
+              </a14:hiddenLine>
+            </a:ext>
+          </a:extLst>
+        </p:spPr>
+      </p:pic>
+      <p:cxnSp>
+        <p:nvCxnSpPr>
+          <p:cNvPr id="14" name="Прямая соединительная линия 13"/>
+          <p:cNvCxnSpPr>
+            <a:cxnSpLocks/>
+          </p:cNvCxnSpPr>
+          <p:nvPr/>
+        </p:nvCxnSpPr>
+        <p:spPr>
+          <a:xfrm>
+            <a:off x="0" y="884681"/>
+            <a:ext cx="12192000" cy="21704"/>
+          </a:xfrm>
+          <a:prstGeom prst="line">
+            <a:avLst/>
+          </a:prstGeom>
+          <a:ln w="28575">
+            <a:solidFill>
+              <a:schemeClr val="bg1">
+                <a:lumMod val="95000"/>
+              </a:schemeClr>
+            </a:solidFill>
+          </a:ln>
+        </p:spPr>
+        <p:style>
+          <a:lnRef idx="1">
+            <a:schemeClr val="accent3"/>
+          </a:lnRef>
+          <a:fillRef idx="0">
+            <a:schemeClr val="accent3"/>
+          </a:fillRef>
+          <a:effectRef idx="0">
+            <a:schemeClr val="accent3"/>
+          </a:effectRef>
+          <a:fontRef idx="minor">
+            <a:schemeClr val="tx1"/>
+          </a:fontRef>
+        </p:style>
+      </p:cxnSp>
+      <p:sp>
+        <p:nvSpPr>
+          <p:cNvPr id="9" name="Прямоугольник 8">
+            <a:extLst>
+              <a:ext uri="{FF2B5EF4-FFF2-40B4-BE49-F238E27FC236}">
+                <a16:creationId xmlns:a16="http://schemas.microsoft.com/office/drawing/2014/main" id="{A764042A-EC52-463E-A7A7-164C646B1A2A}"/>
+              </a:ext>
+            </a:extLst>
+          </p:cNvPr>
+          <p:cNvSpPr/>
+          <p:nvPr/>
+        </p:nvSpPr>
+        <p:spPr>
+          <a:xfrm>
+            <a:off x="47328" y="1124744"/>
+            <a:ext cx="7632848" cy="584775"/>
+          </a:xfrm>
+          <a:prstGeom prst="rect">
+            <a:avLst/>
+          </a:prstGeom>
+        </p:spPr>
+        <p:txBody>
+          <a:bodyPr wrap="square">
+            <a:spAutoFit/>
+          </a:bodyPr>
+          <a:lstStyle/>
+          <a:p>
+            <a:r>
+              <a:rPr lang="ru-RU" sz="3200" b="1" dirty="0">
+                <a:solidFill>
+                  <a:schemeClr val="bg1"/>
+                </a:solidFill>
+                <a:latin typeface="Verdana" panose="020B0604030504040204" pitchFamily="34" charset="0"/>
+                <a:ea typeface="Verdana" panose="020B0604030504040204" pitchFamily="34" charset="0"/>
+                <a:cs typeface="Verdana" panose="020B0604030504040204" pitchFamily="34" charset="0"/>
+              </a:rPr>
+              <a:t>Регуляризация</a:t>
+            </a:r>
+            <a:endParaRPr lang="en-US" sz="3200" b="1" dirty="0">
+              <a:solidFill>
+                <a:schemeClr val="bg1"/>
+              </a:solidFill>
+              <a:latin typeface="Verdana" panose="020B0604030504040204" pitchFamily="34" charset="0"/>
+              <a:ea typeface="Verdana" panose="020B0604030504040204" pitchFamily="34" charset="0"/>
+              <a:cs typeface="Verdana" panose="020B0604030504040204" pitchFamily="34" charset="0"/>
+            </a:endParaRPr>
+          </a:p>
+        </p:txBody>
+      </p:sp>
+      <p:sp>
+        <p:nvSpPr>
+          <p:cNvPr id="11" name="TextBox 10">
+            <a:extLst>
+              <a:ext uri="{FF2B5EF4-FFF2-40B4-BE49-F238E27FC236}">
+                <a16:creationId xmlns:a16="http://schemas.microsoft.com/office/drawing/2014/main" id="{4ABE7244-E379-42C4-A68B-161F48D195A3}"/>
+              </a:ext>
+            </a:extLst>
+          </p:cNvPr>
+          <p:cNvSpPr txBox="1"/>
+          <p:nvPr/>
+        </p:nvSpPr>
+        <p:spPr>
+          <a:xfrm>
+            <a:off x="479376" y="1844824"/>
+            <a:ext cx="11233248" cy="1200329"/>
+          </a:xfrm>
+          <a:prstGeom prst="rect">
+            <a:avLst/>
+          </a:prstGeom>
+          <a:noFill/>
+        </p:spPr>
+        <p:txBody>
+          <a:bodyPr wrap="square" rtlCol="0">
+            <a:spAutoFit/>
+          </a:bodyPr>
+          <a:lstStyle/>
+          <a:p>
+            <a:pPr marL="342900" indent="-342900">
+              <a:buFont typeface="Arial" panose="020B0604020202020204" pitchFamily="34" charset="0"/>
+              <a:buChar char="•"/>
+            </a:pPr>
+            <a:r>
+              <a:rPr lang="ru-RU" sz="2400" dirty="0">
+                <a:solidFill>
+                  <a:schemeClr val="bg1"/>
+                </a:solidFill>
+                <a:latin typeface="IBM Plex Mono"/>
+                <a:ea typeface="Verdana" panose="020B0604030504040204" pitchFamily="34" charset="0"/>
+                <a:cs typeface="Times New Roman" panose="02020603050405020304" pitchFamily="18" charset="0"/>
+              </a:rPr>
+              <a:t>Уменьшаем переобучение накладывая дополнительные ограничения на функцию потерь</a:t>
+            </a:r>
+          </a:p>
+          <a:p>
+            <a:pPr marL="342900" indent="-342900">
+              <a:buFont typeface="Arial" panose="020B0604020202020204" pitchFamily="34" charset="0"/>
+              <a:buChar char="•"/>
+            </a:pPr>
+            <a:r>
+              <a:rPr lang="ru-RU" sz="2400" dirty="0" smtClean="0">
+                <a:solidFill>
+                  <a:schemeClr val="bg1"/>
+                </a:solidFill>
+                <a:latin typeface="IBM Plex Mono"/>
+                <a:ea typeface="Verdana" panose="020B0604030504040204" pitchFamily="34" charset="0"/>
+                <a:cs typeface="Times New Roman" panose="02020603050405020304" pitchFamily="18" charset="0"/>
+              </a:rPr>
+              <a:t>Можем отбирать «полезные» признаки</a:t>
+            </a:r>
+            <a:endParaRPr lang="ru-RU" sz="2400" dirty="0">
+              <a:solidFill>
+                <a:schemeClr val="bg1"/>
+              </a:solidFill>
+              <a:latin typeface="IBM Plex Mono"/>
+              <a:ea typeface="Verdana" panose="020B0604030504040204" pitchFamily="34" charset="0"/>
+              <a:cs typeface="Times New Roman" panose="02020603050405020304" pitchFamily="18" charset="0"/>
+            </a:endParaRPr>
+          </a:p>
+        </p:txBody>
+      </p:sp>
+      <p:sp>
+        <p:nvSpPr>
+          <p:cNvPr id="13" name="Прямоугольник 12">
+            <a:extLst>
+              <a:ext uri="{FF2B5EF4-FFF2-40B4-BE49-F238E27FC236}">
+                <a16:creationId xmlns:a16="http://schemas.microsoft.com/office/drawing/2014/main" id="{A764042A-EC52-463E-A7A7-164C646B1A2A}"/>
+              </a:ext>
+            </a:extLst>
+          </p:cNvPr>
+          <p:cNvSpPr/>
+          <p:nvPr/>
+        </p:nvSpPr>
+        <p:spPr>
+          <a:xfrm>
+            <a:off x="22134" y="3140968"/>
+            <a:ext cx="7632848" cy="584775"/>
+          </a:xfrm>
+          <a:prstGeom prst="rect">
+            <a:avLst/>
+          </a:prstGeom>
+        </p:spPr>
+        <p:txBody>
+          <a:bodyPr wrap="square">
+            <a:spAutoFit/>
+          </a:bodyPr>
+          <a:lstStyle/>
+          <a:p>
+            <a:r>
+              <a:rPr lang="ru-RU" sz="3200" b="1" dirty="0">
+                <a:solidFill>
+                  <a:schemeClr val="bg1"/>
+                </a:solidFill>
+                <a:latin typeface="Verdana" panose="020B0604030504040204" pitchFamily="34" charset="0"/>
+                <a:ea typeface="Verdana" panose="020B0604030504040204" pitchFamily="34" charset="0"/>
+                <a:cs typeface="Verdana" panose="020B0604030504040204" pitchFamily="34" charset="0"/>
+              </a:rPr>
+              <a:t>Подбор </a:t>
+            </a:r>
+            <a:r>
+              <a:rPr lang="ru-RU" sz="3200" b="1" dirty="0" err="1">
+                <a:solidFill>
+                  <a:schemeClr val="bg1"/>
+                </a:solidFill>
+                <a:latin typeface="Verdana" panose="020B0604030504040204" pitchFamily="34" charset="0"/>
+                <a:ea typeface="Verdana" panose="020B0604030504040204" pitchFamily="34" charset="0"/>
+                <a:cs typeface="Verdana" panose="020B0604030504040204" pitchFamily="34" charset="0"/>
+              </a:rPr>
+              <a:t>гиперпараметров</a:t>
+            </a:r>
+            <a:endParaRPr lang="ru-RU" sz="3200" b="1" dirty="0">
+              <a:solidFill>
+                <a:schemeClr val="bg1"/>
+              </a:solidFill>
+              <a:latin typeface="Verdana" panose="020B0604030504040204" pitchFamily="34" charset="0"/>
+              <a:ea typeface="Verdana" panose="020B0604030504040204" pitchFamily="34" charset="0"/>
+              <a:cs typeface="Verdana" panose="020B0604030504040204" pitchFamily="34" charset="0"/>
+            </a:endParaRPr>
+          </a:p>
+        </p:txBody>
+      </p:sp>
+      <p:sp>
+        <p:nvSpPr>
+          <p:cNvPr id="15" name="TextBox 14">
+            <a:extLst>
+              <a:ext uri="{FF2B5EF4-FFF2-40B4-BE49-F238E27FC236}">
+                <a16:creationId xmlns:a16="http://schemas.microsoft.com/office/drawing/2014/main" id="{4ABE7244-E379-42C4-A68B-161F48D195A3}"/>
+              </a:ext>
+            </a:extLst>
+          </p:cNvPr>
+          <p:cNvSpPr txBox="1"/>
+          <p:nvPr/>
+        </p:nvSpPr>
+        <p:spPr>
+          <a:xfrm>
+            <a:off x="695400" y="3933056"/>
+            <a:ext cx="11233248" cy="1569660"/>
+          </a:xfrm>
+          <a:prstGeom prst="rect">
+            <a:avLst/>
+          </a:prstGeom>
+          <a:noFill/>
+        </p:spPr>
+        <p:txBody>
+          <a:bodyPr wrap="square" rtlCol="0">
+            <a:spAutoFit/>
+          </a:bodyPr>
+          <a:lstStyle/>
+          <a:p>
+            <a:pPr marL="457200" indent="-457200">
+              <a:buClr>
+                <a:schemeClr val="bg1"/>
+              </a:buClr>
+              <a:buFont typeface="Arial" panose="020B0604020202020204" pitchFamily="34" charset="0"/>
+              <a:buChar char="•"/>
+            </a:pPr>
+            <a:r>
+              <a:rPr lang="ru-RU" sz="2400" dirty="0">
+                <a:solidFill>
+                  <a:schemeClr val="bg1"/>
+                </a:solidFill>
+                <a:latin typeface="Verdana" panose="020B0604030504040204" pitchFamily="34" charset="0"/>
+                <a:ea typeface="Verdana" panose="020B0604030504040204" pitchFamily="34" charset="0"/>
+                <a:cs typeface="Verdana" panose="020B0604030504040204" pitchFamily="34" charset="0"/>
+              </a:rPr>
+              <a:t>Поиск по </a:t>
+            </a:r>
+            <a:r>
+              <a:rPr lang="ru-RU" sz="2400" dirty="0" smtClean="0">
+                <a:solidFill>
+                  <a:schemeClr val="bg1"/>
+                </a:solidFill>
+                <a:latin typeface="Verdana" panose="020B0604030504040204" pitchFamily="34" charset="0"/>
+                <a:ea typeface="Verdana" panose="020B0604030504040204" pitchFamily="34" charset="0"/>
+                <a:cs typeface="Verdana" panose="020B0604030504040204" pitchFamily="34" charset="0"/>
+              </a:rPr>
+              <a:t>сетке – задаем то что хотим проверить </a:t>
+            </a:r>
+            <a:endParaRPr lang="ru-RU" sz="2400" dirty="0">
+              <a:solidFill>
+                <a:schemeClr val="bg1"/>
+              </a:solidFill>
+              <a:latin typeface="Verdana" panose="020B0604030504040204" pitchFamily="34" charset="0"/>
+              <a:ea typeface="Verdana" panose="020B0604030504040204" pitchFamily="34" charset="0"/>
+              <a:cs typeface="Verdana" panose="020B0604030504040204" pitchFamily="34" charset="0"/>
+            </a:endParaRPr>
+          </a:p>
+          <a:p>
+            <a:pPr marL="457200" indent="-457200">
+              <a:buClr>
+                <a:schemeClr val="bg1"/>
+              </a:buClr>
+              <a:buFont typeface="Arial" panose="020B0604020202020204" pitchFamily="34" charset="0"/>
+              <a:buChar char="•"/>
+            </a:pPr>
+            <a:r>
+              <a:rPr lang="ru-RU" sz="2400" dirty="0">
+                <a:solidFill>
+                  <a:schemeClr val="bg1"/>
+                </a:solidFill>
+                <a:latin typeface="Verdana" panose="020B0604030504040204" pitchFamily="34" charset="0"/>
+                <a:ea typeface="Verdana" panose="020B0604030504040204" pitchFamily="34" charset="0"/>
+                <a:cs typeface="Verdana" panose="020B0604030504040204" pitchFamily="34" charset="0"/>
+              </a:rPr>
+              <a:t>Случайный </a:t>
+            </a:r>
+            <a:r>
+              <a:rPr lang="ru-RU" sz="2400" dirty="0" smtClean="0">
+                <a:solidFill>
+                  <a:schemeClr val="bg1"/>
+                </a:solidFill>
+                <a:latin typeface="Verdana" panose="020B0604030504040204" pitchFamily="34" charset="0"/>
+                <a:ea typeface="Verdana" panose="020B0604030504040204" pitchFamily="34" charset="0"/>
+                <a:cs typeface="Verdana" panose="020B0604030504040204" pitchFamily="34" charset="0"/>
+              </a:rPr>
+              <a:t>поиск – задаем случайное распределение того что хотим проверить и верим в то что нам повезет</a:t>
+            </a:r>
+            <a:endParaRPr lang="ru-RU" sz="2400" dirty="0">
+              <a:solidFill>
+                <a:schemeClr val="bg1"/>
+              </a:solidFill>
+              <a:latin typeface="Verdana" panose="020B0604030504040204" pitchFamily="34" charset="0"/>
+              <a:ea typeface="Verdana" panose="020B0604030504040204" pitchFamily="34" charset="0"/>
+              <a:cs typeface="Verdana" panose="020B0604030504040204" pitchFamily="34" charset="0"/>
+            </a:endParaRPr>
+          </a:p>
+          <a:p>
+            <a:pPr marL="457200" indent="-457200">
+              <a:buClr>
+                <a:schemeClr val="bg1"/>
+              </a:buClr>
+              <a:buFont typeface="Arial" panose="020B0604020202020204" pitchFamily="34" charset="0"/>
+              <a:buChar char="•"/>
+            </a:pPr>
+            <a:r>
+              <a:rPr lang="ru-RU" sz="2400" dirty="0" smtClean="0">
+                <a:solidFill>
+                  <a:schemeClr val="bg1"/>
+                </a:solidFill>
+                <a:latin typeface="Verdana" panose="020B0604030504040204" pitchFamily="34" charset="0"/>
+                <a:ea typeface="Verdana" panose="020B0604030504040204" pitchFamily="34" charset="0"/>
+                <a:cs typeface="Verdana" panose="020B0604030504040204" pitchFamily="34" charset="0"/>
+              </a:rPr>
+              <a:t>Есть другие вариации этого всего (</a:t>
+            </a:r>
+            <a:r>
+              <a:rPr lang="en-US" sz="2400" dirty="0" err="1" smtClean="0">
+                <a:solidFill>
+                  <a:schemeClr val="bg1"/>
+                </a:solidFill>
+                <a:latin typeface="Verdana" panose="020B0604030504040204" pitchFamily="34" charset="0"/>
+                <a:ea typeface="Verdana" panose="020B0604030504040204" pitchFamily="34" charset="0"/>
+                <a:cs typeface="Verdana" panose="020B0604030504040204" pitchFamily="34" charset="0"/>
+              </a:rPr>
+              <a:t>optuna</a:t>
+            </a:r>
+            <a:r>
+              <a:rPr lang="en-US" sz="2400" dirty="0" smtClean="0">
+                <a:solidFill>
+                  <a:schemeClr val="bg1"/>
+                </a:solidFill>
+                <a:latin typeface="Verdana" panose="020B0604030504040204" pitchFamily="34" charset="0"/>
+                <a:ea typeface="Verdana" panose="020B0604030504040204" pitchFamily="34" charset="0"/>
+                <a:cs typeface="Verdana" panose="020B0604030504040204" pitchFamily="34" charset="0"/>
+              </a:rPr>
+              <a:t>*)</a:t>
+            </a:r>
+            <a:endParaRPr lang="en-US" sz="2400" dirty="0">
+              <a:solidFill>
+                <a:schemeClr val="bg1"/>
+              </a:solidFill>
+              <a:latin typeface="Verdana" panose="020B0604030504040204" pitchFamily="34" charset="0"/>
+              <a:ea typeface="Verdana" panose="020B0604030504040204" pitchFamily="34" charset="0"/>
+              <a:cs typeface="Verdana" panose="020B0604030504040204" pitchFamily="34" charset="0"/>
+            </a:endParaRPr>
+          </a:p>
+        </p:txBody>
+      </p:sp>
+    </p:spTree>
+    <p:extLst>
+      <p:ext uri="{BB962C8B-B14F-4D97-AF65-F5344CB8AC3E}">
+        <p14:creationId xmlns:p14="http://schemas.microsoft.com/office/powerpoint/2010/main" val="2473594320"/>
+      </p:ext>
+    </p:extLst>
+  </p:cSld>
+  <p:clrMapOvr>
+    <a:masterClrMapping/>
+  </p:clrMapOvr>
+</p:sld>
+</file>
+
+<file path=ppt/slides/slide20.xml><?xml version="1.0" encoding="utf-8"?>
 <p:sld xmlns:a="http://schemas.openxmlformats.org/drawingml/2006/main" xmlns:r="http://schemas.openxmlformats.org/officeDocument/2006/relationships" xmlns:p="http://schemas.openxmlformats.org/presentationml/2006/main">
   <p:cSld>
     <p:spTree>
@@ -15344,7 +16688,7 @@
                 <a:ea typeface="Verdana" panose="020B0604030504040204" pitchFamily="34" charset="0"/>
               </a:rPr>
               <a:pPr/>
-              <a:t>19</a:t>
+              <a:t>20</a:t>
             </a:fld>
             <a:endParaRPr lang="ru-RU" sz="2400" spc="-1" dirty="0">
               <a:solidFill>
@@ -15496,8 +16840,8 @@
           </a:p>
         </p:txBody>
       </p:sp>
-      <mc:AlternateContent xmlns:mc="http://schemas.openxmlformats.org/markup-compatibility/2006">
-        <mc:Choice xmlns:a14="http://schemas.microsoft.com/office/drawing/2010/main" Requires="a14">
+      <mc:AlternateContent xmlns:mc="http://schemas.openxmlformats.org/markup-compatibility/2006" xmlns:a14="http://schemas.microsoft.com/office/drawing/2010/main">
+        <mc:Choice Requires="a14">
           <p:sp>
             <p:nvSpPr>
               <p:cNvPr id="11" name="TextBox 10">
@@ -15669,7 +17013,7 @@
             </p:txBody>
           </p:sp>
         </mc:Choice>
-        <mc:Fallback>
+        <mc:Fallback xmlns="">
           <p:sp>
             <p:nvSpPr>
               <p:cNvPr id="11" name="TextBox 10">
@@ -15766,8 +17110,8 @@
           </a:p>
         </p:txBody>
       </p:sp>
-      <mc:AlternateContent xmlns:mc="http://schemas.openxmlformats.org/markup-compatibility/2006">
-        <mc:Choice xmlns:a14="http://schemas.microsoft.com/office/drawing/2010/main" Requires="a14">
+      <mc:AlternateContent xmlns:mc="http://schemas.openxmlformats.org/markup-compatibility/2006" xmlns:a14="http://schemas.microsoft.com/office/drawing/2010/main">
+        <mc:Choice Requires="a14">
           <p:sp>
             <p:nvSpPr>
               <p:cNvPr id="15" name="TextBox 14">
@@ -15885,7 +17229,7 @@
             </p:txBody>
           </p:sp>
         </mc:Choice>
-        <mc:Fallback>
+        <mc:Fallback xmlns="">
           <p:sp>
             <p:nvSpPr>
               <p:cNvPr id="15" name="TextBox 14">
@@ -15930,8 +17274,8 @@
           </p:sp>
         </mc:Fallback>
       </mc:AlternateContent>
-      <mc:AlternateContent xmlns:mc="http://schemas.openxmlformats.org/markup-compatibility/2006">
-        <mc:Choice xmlns:a14="http://schemas.microsoft.com/office/drawing/2010/main" Requires="a14">
+      <mc:AlternateContent xmlns:mc="http://schemas.openxmlformats.org/markup-compatibility/2006" xmlns:a14="http://schemas.microsoft.com/office/drawing/2010/main">
+        <mc:Choice Requires="a14">
           <p:sp>
             <p:nvSpPr>
               <p:cNvPr id="16" name="TextBox 15">
@@ -16049,7 +17393,7 @@
             </p:txBody>
           </p:sp>
         </mc:Choice>
-        <mc:Fallback>
+        <mc:Fallback xmlns="">
           <p:sp>
             <p:nvSpPr>
               <p:cNvPr id="16" name="TextBox 15">
@@ -16303,8 +17647,8 @@
           </a:prstGeom>
         </p:spPr>
       </p:pic>
-      <mc:AlternateContent xmlns:mc="http://schemas.openxmlformats.org/markup-compatibility/2006">
-        <mc:Choice xmlns:a14="http://schemas.microsoft.com/office/drawing/2010/main" Requires="a14">
+      <mc:AlternateContent xmlns:mc="http://schemas.openxmlformats.org/markup-compatibility/2006" xmlns:a14="http://schemas.microsoft.com/office/drawing/2010/main">
+        <mc:Choice Requires="a14">
           <p:sp>
             <p:nvSpPr>
               <p:cNvPr id="19" name="TextBox 18">
@@ -16474,7 +17818,7 @@
             </p:txBody>
           </p:sp>
         </mc:Choice>
-        <mc:Fallback>
+        <mc:Fallback xmlns="">
           <p:sp>
             <p:nvSpPr>
               <p:cNvPr id="19" name="TextBox 18">
@@ -16519,8 +17863,8 @@
           </p:sp>
         </mc:Fallback>
       </mc:AlternateContent>
-      <mc:AlternateContent xmlns:mc="http://schemas.openxmlformats.org/markup-compatibility/2006">
-        <mc:Choice xmlns:a14="http://schemas.microsoft.com/office/drawing/2010/main" Requires="a14">
+      <mc:AlternateContent xmlns:mc="http://schemas.openxmlformats.org/markup-compatibility/2006" xmlns:a14="http://schemas.microsoft.com/office/drawing/2010/main">
+        <mc:Choice Requires="a14">
           <p:sp>
             <p:nvSpPr>
               <p:cNvPr id="20" name="TextBox 19">
@@ -16785,7 +18129,7 @@
             </p:txBody>
           </p:sp>
         </mc:Choice>
-        <mc:Fallback>
+        <mc:Fallback xmlns="">
           <p:sp>
             <p:nvSpPr>
               <p:cNvPr id="20" name="TextBox 19">
@@ -17091,13 +18435,6 @@
               </a:rPr>
               <a:t>Матрица Ошибок </a:t>
             </a:r>
-            <a:endParaRPr lang="ru-RU" sz="3200" b="1" dirty="0">
-              <a:solidFill>
-                <a:schemeClr val="bg1"/>
-              </a:solidFill>
-              <a:latin typeface="Verdana" panose="020B0604030504040204" pitchFamily="34" charset="0"/>
-              <a:ea typeface="Verdana" panose="020B0604030504040204" pitchFamily="34" charset="0"/>
-            </a:endParaRPr>
           </a:p>
         </p:txBody>
       </p:sp>
@@ -17580,547 +18917,7 @@
 </p:sld>
 </file>
 
-<file path=ppt/slides/slide2.xml><?xml version="1.0" encoding="utf-8"?>
-<p:sld xmlns:a="http://schemas.openxmlformats.org/drawingml/2006/main" xmlns:r="http://schemas.openxmlformats.org/officeDocument/2006/relationships" xmlns:p="http://schemas.openxmlformats.org/presentationml/2006/main">
-  <p:cSld>
-    <p:spTree>
-      <p:nvGrpSpPr>
-        <p:cNvPr id="1" name=""/>
-        <p:cNvGrpSpPr/>
-        <p:nvPr/>
-      </p:nvGrpSpPr>
-      <p:grpSpPr>
-        <a:xfrm>
-          <a:off x="0" y="0"/>
-          <a:ext cx="0" cy="0"/>
-          <a:chOff x="0" y="0"/>
-          <a:chExt cx="0" cy="0"/>
-        </a:xfrm>
-      </p:grpSpPr>
-      <p:sp>
-        <p:nvSpPr>
-          <p:cNvPr id="8" name="Номер слайда 7"/>
-          <p:cNvSpPr>
-            <a:spLocks noGrp="1"/>
-          </p:cNvSpPr>
-          <p:nvPr>
-            <p:ph type="sldNum" idx="4294967295"/>
-          </p:nvPr>
-        </p:nvSpPr>
-        <p:spPr>
-          <a:xfrm>
-            <a:off x="11235591" y="6442266"/>
-            <a:ext cx="956409" cy="382875"/>
-          </a:xfrm>
-          <a:prstGeom prst="rect">
-            <a:avLst/>
-          </a:prstGeom>
-        </p:spPr>
-        <p:txBody>
-          <a:bodyPr/>
-          <a:lstStyle/>
-          <a:p>
-            <a:fld id="{3CD50FA3-7693-4AD1-9E83-82DEDF06D4CE}" type="slidenum">
-              <a:rPr lang="ru-RU" sz="2400" spc="-1">
-                <a:solidFill>
-                  <a:schemeClr val="bg1"/>
-                </a:solidFill>
-                <a:latin typeface="Verdana" panose="020B0604030504040204" pitchFamily="34" charset="0"/>
-                <a:ea typeface="Verdana" panose="020B0604030504040204" pitchFamily="34" charset="0"/>
-              </a:rPr>
-              <a:pPr/>
-              <a:t>2</a:t>
-            </a:fld>
-            <a:endParaRPr lang="ru-RU" sz="2400" spc="-1" dirty="0">
-              <a:solidFill>
-                <a:schemeClr val="bg1"/>
-              </a:solidFill>
-              <a:latin typeface="Verdana" panose="020B0604030504040204" pitchFamily="34" charset="0"/>
-              <a:ea typeface="Verdana" panose="020B0604030504040204" pitchFamily="34" charset="0"/>
-            </a:endParaRPr>
-          </a:p>
-        </p:txBody>
-      </p:sp>
-      <p:sp>
-        <p:nvSpPr>
-          <p:cNvPr id="10" name="Нижний колонтитул 6"/>
-          <p:cNvSpPr>
-            <a:spLocks noGrp="1"/>
-          </p:cNvSpPr>
-          <p:nvPr>
-            <p:ph type="ftr" idx="4294967295"/>
-          </p:nvPr>
-        </p:nvSpPr>
-        <p:spPr>
-          <a:xfrm>
-            <a:off x="3143672" y="176904"/>
-            <a:ext cx="7180730" cy="484915"/>
-          </a:xfrm>
-          <a:prstGeom prst="rect">
-            <a:avLst/>
-          </a:prstGeom>
-        </p:spPr>
-        <p:txBody>
-          <a:bodyPr/>
-          <a:lstStyle/>
-          <a:p>
-            <a:r>
-              <a:rPr lang="ru-RU" sz="3200" b="1" spc="-1" dirty="0">
-                <a:solidFill>
-                  <a:schemeClr val="bg1"/>
-                </a:solidFill>
-                <a:latin typeface="Verdana" panose="020B0604030504040204" pitchFamily="34" charset="0"/>
-                <a:ea typeface="Verdana" panose="020B0604030504040204" pitchFamily="34" charset="0"/>
-              </a:rPr>
-              <a:t>В предыдущей серии</a:t>
-            </a:r>
-          </a:p>
-        </p:txBody>
-      </p:sp>
-      <p:pic>
-        <p:nvPicPr>
-          <p:cNvPr id="12" name="Picture 2"/>
-          <p:cNvPicPr>
-            <a:picLocks noChangeAspect="1" noChangeArrowheads="1"/>
-          </p:cNvPicPr>
-          <p:nvPr/>
-        </p:nvPicPr>
-        <p:blipFill>
-          <a:blip r:embed="rId3" cstate="print">
-            <a:extLst>
-              <a:ext uri="{28A0092B-C50C-407E-A947-70E740481C1C}">
-                <a14:useLocalDpi xmlns:a14="http://schemas.microsoft.com/office/drawing/2010/main" val="0"/>
-              </a:ext>
-            </a:extLst>
-          </a:blip>
-          <a:srcRect/>
-          <a:stretch>
-            <a:fillRect/>
-          </a:stretch>
-        </p:blipFill>
-        <p:spPr bwMode="auto">
-          <a:xfrm>
-            <a:off x="0" y="0"/>
-            <a:ext cx="1769838" cy="1121419"/>
-          </a:xfrm>
-          <a:prstGeom prst="rect">
-            <a:avLst/>
-          </a:prstGeom>
-          <a:noFill/>
-          <a:ln>
-            <a:noFill/>
-          </a:ln>
-          <a:extLst>
-            <a:ext uri="{909E8E84-426E-40DD-AFC4-6F175D3DCCD1}">
-              <a14:hiddenFill xmlns:a14="http://schemas.microsoft.com/office/drawing/2010/main">
-                <a:solidFill>
-                  <a:schemeClr val="accent1"/>
-                </a:solidFill>
-              </a14:hiddenFill>
-            </a:ext>
-            <a:ext uri="{91240B29-F687-4F45-9708-019B960494DF}">
-              <a14:hiddenLine xmlns:a14="http://schemas.microsoft.com/office/drawing/2010/main" w="9525">
-                <a:solidFill>
-                  <a:schemeClr val="tx1"/>
-                </a:solidFill>
-                <a:miter lim="800000"/>
-                <a:headEnd/>
-                <a:tailEnd/>
-              </a14:hiddenLine>
-            </a:ext>
-          </a:extLst>
-        </p:spPr>
-      </p:pic>
-      <p:cxnSp>
-        <p:nvCxnSpPr>
-          <p:cNvPr id="14" name="Прямая соединительная линия 13"/>
-          <p:cNvCxnSpPr>
-            <a:cxnSpLocks/>
-          </p:cNvCxnSpPr>
-          <p:nvPr/>
-        </p:nvCxnSpPr>
-        <p:spPr>
-          <a:xfrm>
-            <a:off x="0" y="884681"/>
-            <a:ext cx="12192000" cy="21704"/>
-          </a:xfrm>
-          <a:prstGeom prst="line">
-            <a:avLst/>
-          </a:prstGeom>
-          <a:ln w="28575">
-            <a:solidFill>
-              <a:schemeClr val="bg1">
-                <a:lumMod val="95000"/>
-              </a:schemeClr>
-            </a:solidFill>
-          </a:ln>
-        </p:spPr>
-        <p:style>
-          <a:lnRef idx="1">
-            <a:schemeClr val="accent3"/>
-          </a:lnRef>
-          <a:fillRef idx="0">
-            <a:schemeClr val="accent3"/>
-          </a:fillRef>
-          <a:effectRef idx="0">
-            <a:schemeClr val="accent3"/>
-          </a:effectRef>
-          <a:fontRef idx="minor">
-            <a:schemeClr val="tx1"/>
-          </a:fontRef>
-        </p:style>
-      </p:cxnSp>
-      <p:sp>
-        <p:nvSpPr>
-          <p:cNvPr id="9" name="Прямоугольник 8">
-            <a:extLst>
-              <a:ext uri="{FF2B5EF4-FFF2-40B4-BE49-F238E27FC236}">
-                <a16:creationId xmlns:a16="http://schemas.microsoft.com/office/drawing/2014/main" id="{A764042A-EC52-463E-A7A7-164C646B1A2A}"/>
-              </a:ext>
-            </a:extLst>
-          </p:cNvPr>
-          <p:cNvSpPr/>
-          <p:nvPr/>
-        </p:nvSpPr>
-        <p:spPr>
-          <a:xfrm>
-            <a:off x="47328" y="1124744"/>
-            <a:ext cx="7632848" cy="584775"/>
-          </a:xfrm>
-          <a:prstGeom prst="rect">
-            <a:avLst/>
-          </a:prstGeom>
-        </p:spPr>
-        <p:txBody>
-          <a:bodyPr wrap="square">
-            <a:spAutoFit/>
-          </a:bodyPr>
-          <a:lstStyle/>
-          <a:p>
-            <a:r>
-              <a:rPr lang="ru-RU" sz="3200" b="1" dirty="0">
-                <a:solidFill>
-                  <a:schemeClr val="bg1"/>
-                </a:solidFill>
-                <a:latin typeface="Verdana" panose="020B0604030504040204" pitchFamily="34" charset="0"/>
-                <a:ea typeface="Verdana" panose="020B0604030504040204" pitchFamily="34" charset="0"/>
-                <a:cs typeface="Verdana" panose="020B0604030504040204" pitchFamily="34" charset="0"/>
-              </a:rPr>
-              <a:t>Регуляризация</a:t>
-            </a:r>
-            <a:endParaRPr lang="en-US" sz="3200" b="1" dirty="0">
-              <a:solidFill>
-                <a:schemeClr val="bg1"/>
-              </a:solidFill>
-              <a:latin typeface="Verdana" panose="020B0604030504040204" pitchFamily="34" charset="0"/>
-              <a:ea typeface="Verdana" panose="020B0604030504040204" pitchFamily="34" charset="0"/>
-              <a:cs typeface="Verdana" panose="020B0604030504040204" pitchFamily="34" charset="0"/>
-            </a:endParaRPr>
-          </a:p>
-        </p:txBody>
-      </p:sp>
-      <p:sp>
-        <p:nvSpPr>
-          <p:cNvPr id="11" name="TextBox 10">
-            <a:extLst>
-              <a:ext uri="{FF2B5EF4-FFF2-40B4-BE49-F238E27FC236}">
-                <a16:creationId xmlns:a16="http://schemas.microsoft.com/office/drawing/2014/main" id="{4ABE7244-E379-42C4-A68B-161F48D195A3}"/>
-              </a:ext>
-            </a:extLst>
-          </p:cNvPr>
-          <p:cNvSpPr txBox="1"/>
-          <p:nvPr/>
-        </p:nvSpPr>
-        <p:spPr>
-          <a:xfrm>
-            <a:off x="479376" y="1844824"/>
-            <a:ext cx="11233248" cy="1200329"/>
-          </a:xfrm>
-          <a:prstGeom prst="rect">
-            <a:avLst/>
-          </a:prstGeom>
-          <a:noFill/>
-        </p:spPr>
-        <p:txBody>
-          <a:bodyPr wrap="square" rtlCol="0">
-            <a:spAutoFit/>
-          </a:bodyPr>
-          <a:lstStyle/>
-          <a:p>
-            <a:pPr marL="342900" indent="-342900">
-              <a:buFont typeface="Arial" panose="020B0604020202020204" pitchFamily="34" charset="0"/>
-              <a:buChar char="•"/>
-            </a:pPr>
-            <a:r>
-              <a:rPr lang="ru-RU" sz="2400" dirty="0">
-                <a:solidFill>
-                  <a:schemeClr val="bg1"/>
-                </a:solidFill>
-                <a:latin typeface="IBM Plex Mono"/>
-                <a:ea typeface="Verdana" panose="020B0604030504040204" pitchFamily="34" charset="0"/>
-                <a:cs typeface="Times New Roman" panose="02020603050405020304" pitchFamily="18" charset="0"/>
-              </a:rPr>
-              <a:t>Уменьшаем переобучение накладывая дополнительные ограничения на функцию потерь</a:t>
-            </a:r>
-          </a:p>
-          <a:p>
-            <a:pPr marL="342900" indent="-342900">
-              <a:buFont typeface="Arial" panose="020B0604020202020204" pitchFamily="34" charset="0"/>
-              <a:buChar char="•"/>
-            </a:pPr>
-            <a:r>
-              <a:rPr lang="ru-RU" sz="2400" dirty="0" smtClean="0">
-                <a:solidFill>
-                  <a:schemeClr val="bg1"/>
-                </a:solidFill>
-                <a:latin typeface="IBM Plex Mono"/>
-                <a:ea typeface="Verdana" panose="020B0604030504040204" pitchFamily="34" charset="0"/>
-                <a:cs typeface="Times New Roman" panose="02020603050405020304" pitchFamily="18" charset="0"/>
-              </a:rPr>
-              <a:t>Можем отбирать «полезные» признаки</a:t>
-            </a:r>
-            <a:endParaRPr lang="ru-RU" sz="2400" dirty="0">
-              <a:solidFill>
-                <a:schemeClr val="bg1"/>
-              </a:solidFill>
-              <a:latin typeface="IBM Plex Mono"/>
-              <a:ea typeface="Verdana" panose="020B0604030504040204" pitchFamily="34" charset="0"/>
-              <a:cs typeface="Times New Roman" panose="02020603050405020304" pitchFamily="18" charset="0"/>
-            </a:endParaRPr>
-          </a:p>
-        </p:txBody>
-      </p:sp>
-      <p:sp>
-        <p:nvSpPr>
-          <p:cNvPr id="13" name="Прямоугольник 12">
-            <a:extLst>
-              <a:ext uri="{FF2B5EF4-FFF2-40B4-BE49-F238E27FC236}">
-                <a16:creationId xmlns:a16="http://schemas.microsoft.com/office/drawing/2014/main" id="{A764042A-EC52-463E-A7A7-164C646B1A2A}"/>
-              </a:ext>
-            </a:extLst>
-          </p:cNvPr>
-          <p:cNvSpPr/>
-          <p:nvPr/>
-        </p:nvSpPr>
-        <p:spPr>
-          <a:xfrm>
-            <a:off x="22134" y="3140968"/>
-            <a:ext cx="7632848" cy="584775"/>
-          </a:xfrm>
-          <a:prstGeom prst="rect">
-            <a:avLst/>
-          </a:prstGeom>
-        </p:spPr>
-        <p:txBody>
-          <a:bodyPr wrap="square">
-            <a:spAutoFit/>
-          </a:bodyPr>
-          <a:lstStyle/>
-          <a:p>
-            <a:r>
-              <a:rPr lang="ru-RU" sz="3200" b="1" dirty="0">
-                <a:solidFill>
-                  <a:schemeClr val="bg1"/>
-                </a:solidFill>
-                <a:latin typeface="Verdana" panose="020B0604030504040204" pitchFamily="34" charset="0"/>
-                <a:ea typeface="Verdana" panose="020B0604030504040204" pitchFamily="34" charset="0"/>
-                <a:cs typeface="Verdana" panose="020B0604030504040204" pitchFamily="34" charset="0"/>
-              </a:rPr>
-              <a:t>Подбор </a:t>
-            </a:r>
-            <a:r>
-              <a:rPr lang="ru-RU" sz="3200" b="1" dirty="0" err="1">
-                <a:solidFill>
-                  <a:schemeClr val="bg1"/>
-                </a:solidFill>
-                <a:latin typeface="Verdana" panose="020B0604030504040204" pitchFamily="34" charset="0"/>
-                <a:ea typeface="Verdana" panose="020B0604030504040204" pitchFamily="34" charset="0"/>
-                <a:cs typeface="Verdana" panose="020B0604030504040204" pitchFamily="34" charset="0"/>
-              </a:rPr>
-              <a:t>гиперпараметров</a:t>
-            </a:r>
-            <a:endParaRPr lang="ru-RU" sz="3200" b="1" dirty="0">
-              <a:solidFill>
-                <a:schemeClr val="bg1"/>
-              </a:solidFill>
-              <a:latin typeface="Verdana" panose="020B0604030504040204" pitchFamily="34" charset="0"/>
-              <a:ea typeface="Verdana" panose="020B0604030504040204" pitchFamily="34" charset="0"/>
-              <a:cs typeface="Verdana" panose="020B0604030504040204" pitchFamily="34" charset="0"/>
-            </a:endParaRPr>
-          </a:p>
-        </p:txBody>
-      </p:sp>
-      <p:sp>
-        <p:nvSpPr>
-          <p:cNvPr id="15" name="TextBox 14">
-            <a:extLst>
-              <a:ext uri="{FF2B5EF4-FFF2-40B4-BE49-F238E27FC236}">
-                <a16:creationId xmlns:a16="http://schemas.microsoft.com/office/drawing/2014/main" id="{4ABE7244-E379-42C4-A68B-161F48D195A3}"/>
-              </a:ext>
-            </a:extLst>
-          </p:cNvPr>
-          <p:cNvSpPr txBox="1"/>
-          <p:nvPr/>
-        </p:nvSpPr>
-        <p:spPr>
-          <a:xfrm>
-            <a:off x="695400" y="3933056"/>
-            <a:ext cx="11233248" cy="1569660"/>
-          </a:xfrm>
-          <a:prstGeom prst="rect">
-            <a:avLst/>
-          </a:prstGeom>
-          <a:noFill/>
-        </p:spPr>
-        <p:txBody>
-          <a:bodyPr wrap="square" rtlCol="0">
-            <a:spAutoFit/>
-          </a:bodyPr>
-          <a:lstStyle/>
-          <a:p>
-            <a:pPr marL="457200" indent="-457200">
-              <a:buClr>
-                <a:schemeClr val="bg1"/>
-              </a:buClr>
-              <a:buFont typeface="Arial" panose="020B0604020202020204" pitchFamily="34" charset="0"/>
-              <a:buChar char="•"/>
-            </a:pPr>
-            <a:r>
-              <a:rPr lang="ru-RU" sz="2400" dirty="0">
-                <a:solidFill>
-                  <a:schemeClr val="bg1"/>
-                </a:solidFill>
-                <a:latin typeface="Verdana" panose="020B0604030504040204" pitchFamily="34" charset="0"/>
-                <a:ea typeface="Verdana" panose="020B0604030504040204" pitchFamily="34" charset="0"/>
-                <a:cs typeface="Verdana" panose="020B0604030504040204" pitchFamily="34" charset="0"/>
-              </a:rPr>
-              <a:t>Поиск по </a:t>
-            </a:r>
-            <a:r>
-              <a:rPr lang="ru-RU" sz="2400" dirty="0" smtClean="0">
-                <a:solidFill>
-                  <a:schemeClr val="bg1"/>
-                </a:solidFill>
-                <a:latin typeface="Verdana" panose="020B0604030504040204" pitchFamily="34" charset="0"/>
-                <a:ea typeface="Verdana" panose="020B0604030504040204" pitchFamily="34" charset="0"/>
-                <a:cs typeface="Verdana" panose="020B0604030504040204" pitchFamily="34" charset="0"/>
-              </a:rPr>
-              <a:t>сетке – задаем то что хотим проверить </a:t>
-            </a:r>
-            <a:endParaRPr lang="ru-RU" sz="2400" dirty="0">
-              <a:solidFill>
-                <a:schemeClr val="bg1"/>
-              </a:solidFill>
-              <a:latin typeface="Verdana" panose="020B0604030504040204" pitchFamily="34" charset="0"/>
-              <a:ea typeface="Verdana" panose="020B0604030504040204" pitchFamily="34" charset="0"/>
-              <a:cs typeface="Verdana" panose="020B0604030504040204" pitchFamily="34" charset="0"/>
-            </a:endParaRPr>
-          </a:p>
-          <a:p>
-            <a:pPr marL="457200" indent="-457200">
-              <a:buClr>
-                <a:schemeClr val="bg1"/>
-              </a:buClr>
-              <a:buFont typeface="Arial" panose="020B0604020202020204" pitchFamily="34" charset="0"/>
-              <a:buChar char="•"/>
-            </a:pPr>
-            <a:r>
-              <a:rPr lang="ru-RU" sz="2400" dirty="0">
-                <a:solidFill>
-                  <a:schemeClr val="bg1"/>
-                </a:solidFill>
-                <a:latin typeface="Verdana" panose="020B0604030504040204" pitchFamily="34" charset="0"/>
-                <a:ea typeface="Verdana" panose="020B0604030504040204" pitchFamily="34" charset="0"/>
-                <a:cs typeface="Verdana" panose="020B0604030504040204" pitchFamily="34" charset="0"/>
-              </a:rPr>
-              <a:t>Случайный </a:t>
-            </a:r>
-            <a:r>
-              <a:rPr lang="ru-RU" sz="2400" dirty="0" smtClean="0">
-                <a:solidFill>
-                  <a:schemeClr val="bg1"/>
-                </a:solidFill>
-                <a:latin typeface="Verdana" panose="020B0604030504040204" pitchFamily="34" charset="0"/>
-                <a:ea typeface="Verdana" panose="020B0604030504040204" pitchFamily="34" charset="0"/>
-                <a:cs typeface="Verdana" panose="020B0604030504040204" pitchFamily="34" charset="0"/>
-              </a:rPr>
-              <a:t>поиск – задаем случайное распределение того что хотим проверить и верим в то что нам повезет</a:t>
-            </a:r>
-            <a:endParaRPr lang="ru-RU" sz="2400" dirty="0">
-              <a:solidFill>
-                <a:schemeClr val="bg1"/>
-              </a:solidFill>
-              <a:latin typeface="Verdana" panose="020B0604030504040204" pitchFamily="34" charset="0"/>
-              <a:ea typeface="Verdana" panose="020B0604030504040204" pitchFamily="34" charset="0"/>
-              <a:cs typeface="Verdana" panose="020B0604030504040204" pitchFamily="34" charset="0"/>
-            </a:endParaRPr>
-          </a:p>
-          <a:p>
-            <a:pPr marL="457200" indent="-457200">
-              <a:buClr>
-                <a:schemeClr val="bg1"/>
-              </a:buClr>
-              <a:buFont typeface="Arial" panose="020B0604020202020204" pitchFamily="34" charset="0"/>
-              <a:buChar char="•"/>
-            </a:pPr>
-            <a:r>
-              <a:rPr lang="ru-RU" sz="2400" dirty="0" smtClean="0">
-                <a:solidFill>
-                  <a:schemeClr val="bg1"/>
-                </a:solidFill>
-                <a:latin typeface="Verdana" panose="020B0604030504040204" pitchFamily="34" charset="0"/>
-                <a:ea typeface="Verdana" panose="020B0604030504040204" pitchFamily="34" charset="0"/>
-                <a:cs typeface="Verdana" panose="020B0604030504040204" pitchFamily="34" charset="0"/>
-              </a:rPr>
-              <a:t>Есть другие вариации этого всего (</a:t>
-            </a:r>
-            <a:r>
-              <a:rPr lang="en-US" sz="2400" dirty="0" err="1" smtClean="0">
-                <a:solidFill>
-                  <a:schemeClr val="bg1"/>
-                </a:solidFill>
-                <a:latin typeface="Verdana" panose="020B0604030504040204" pitchFamily="34" charset="0"/>
-                <a:ea typeface="Verdana" panose="020B0604030504040204" pitchFamily="34" charset="0"/>
-                <a:cs typeface="Verdana" panose="020B0604030504040204" pitchFamily="34" charset="0"/>
-              </a:rPr>
-              <a:t>optuna</a:t>
-            </a:r>
-            <a:r>
-              <a:rPr lang="en-US" sz="2400" dirty="0" smtClean="0">
-                <a:solidFill>
-                  <a:schemeClr val="bg1"/>
-                </a:solidFill>
-                <a:latin typeface="Verdana" panose="020B0604030504040204" pitchFamily="34" charset="0"/>
-                <a:ea typeface="Verdana" panose="020B0604030504040204" pitchFamily="34" charset="0"/>
-                <a:cs typeface="Verdana" panose="020B0604030504040204" pitchFamily="34" charset="0"/>
-              </a:rPr>
-              <a:t>*)</a:t>
-            </a:r>
-            <a:endParaRPr lang="en-US" sz="2400" dirty="0">
-              <a:solidFill>
-                <a:schemeClr val="bg1"/>
-              </a:solidFill>
-              <a:latin typeface="Verdana" panose="020B0604030504040204" pitchFamily="34" charset="0"/>
-              <a:ea typeface="Verdana" panose="020B0604030504040204" pitchFamily="34" charset="0"/>
-              <a:cs typeface="Verdana" panose="020B0604030504040204" pitchFamily="34" charset="0"/>
-            </a:endParaRPr>
-          </a:p>
-        </p:txBody>
-      </p:sp>
-    </p:spTree>
-    <p:extLst>
-      <p:ext uri="{BB962C8B-B14F-4D97-AF65-F5344CB8AC3E}">
-        <p14:creationId xmlns:p14="http://schemas.microsoft.com/office/powerpoint/2010/main" val="2473594320"/>
-      </p:ext>
-    </p:extLst>
-  </p:cSld>
-  <p:clrMapOvr>
-    <a:masterClrMapping/>
-  </p:clrMapOvr>
-</p:sld>
-</file>
-
-<file path=ppt/slides/slide20.xml><?xml version="1.0" encoding="utf-8"?>
+<file path=ppt/slides/slide21.xml><?xml version="1.0" encoding="utf-8"?>
 <p:sld xmlns:a="http://schemas.openxmlformats.org/drawingml/2006/main" xmlns:r="http://schemas.openxmlformats.org/officeDocument/2006/relationships" xmlns:p="http://schemas.openxmlformats.org/presentationml/2006/main">
   <p:cSld>
     <p:spTree>
@@ -18169,7 +18966,7 @@
                 <a:ea typeface="Verdana" panose="020B0604030504040204" pitchFamily="34" charset="0"/>
               </a:rPr>
               <a:pPr/>
-              <a:t>20</a:t>
+              <a:t>21</a:t>
             </a:fld>
             <a:endParaRPr lang="ru-RU" sz="2400" spc="-1" dirty="0">
               <a:solidFill>
@@ -18542,18 +19339,11 @@
               </a:rPr>
               <a:t>Случай многих классов</a:t>
             </a:r>
-            <a:endParaRPr lang="ru-RU" sz="3200" b="1" dirty="0">
-              <a:solidFill>
-                <a:schemeClr val="bg1"/>
-              </a:solidFill>
-              <a:latin typeface="Verdana" panose="020B0604030504040204" pitchFamily="34" charset="0"/>
-              <a:ea typeface="Verdana" panose="020B0604030504040204" pitchFamily="34" charset="0"/>
-            </a:endParaRPr>
           </a:p>
         </p:txBody>
       </p:sp>
-      <mc:AlternateContent xmlns:mc="http://schemas.openxmlformats.org/markup-compatibility/2006">
-        <mc:Choice xmlns:a14="http://schemas.microsoft.com/office/drawing/2010/main" Requires="a14">
+      <mc:AlternateContent xmlns:mc="http://schemas.openxmlformats.org/markup-compatibility/2006" xmlns:a14="http://schemas.microsoft.com/office/drawing/2010/main">
+        <mc:Choice Requires="a14">
           <p:sp>
             <p:nvSpPr>
               <p:cNvPr id="22" name="TextBox 21">
@@ -18974,16 +19764,7 @@
                               </a:solidFill>
                               <a:latin typeface="Cambria Math" panose="02040503050406030204" pitchFamily="18" charset="0"/>
                             </a:rPr>
-                            <m:t>+</m:t>
-                          </m:r>
-                          <m:r>
-                            <a:rPr lang="en-US" b="0" i="1" smtClean="0">
-                              <a:solidFill>
-                                <a:schemeClr val="bg1"/>
-                              </a:solidFill>
-                              <a:latin typeface="Cambria Math" panose="02040503050406030204" pitchFamily="18" charset="0"/>
-                            </a:rPr>
-                            <m:t>(</m:t>
+                            <m:t>+(</m:t>
                           </m:r>
                           <m:r>
                             <a:rPr lang="en-US" b="0" i="1" smtClean="0">
@@ -19383,7 +20164,7 @@
             </p:txBody>
           </p:sp>
         </mc:Choice>
-        <mc:Fallback>
+        <mc:Fallback xmlns="">
           <p:sp>
             <p:nvSpPr>
               <p:cNvPr id="22" name="TextBox 21">
@@ -19428,8 +20209,8 @@
           </p:sp>
         </mc:Fallback>
       </mc:AlternateContent>
-      <mc:AlternateContent xmlns:mc="http://schemas.openxmlformats.org/markup-compatibility/2006">
-        <mc:Choice xmlns:a14="http://schemas.microsoft.com/office/drawing/2010/main" Requires="a14">
+      <mc:AlternateContent xmlns:mc="http://schemas.openxmlformats.org/markup-compatibility/2006" xmlns:a14="http://schemas.microsoft.com/office/drawing/2010/main">
+        <mc:Choice Requires="a14">
           <p:sp>
             <p:nvSpPr>
               <p:cNvPr id="23" name="TextBox 22">
@@ -19701,7 +20482,7 @@
             </p:txBody>
           </p:sp>
         </mc:Choice>
-        <mc:Fallback>
+        <mc:Fallback xmlns="">
           <p:sp>
             <p:nvSpPr>
               <p:cNvPr id="23" name="TextBox 22">
@@ -19746,8 +20527,8 @@
           </p:sp>
         </mc:Fallback>
       </mc:AlternateContent>
-      <mc:AlternateContent xmlns:mc="http://schemas.openxmlformats.org/markup-compatibility/2006">
-        <mc:Choice xmlns:a14="http://schemas.microsoft.com/office/drawing/2010/main" Requires="a14">
+      <mc:AlternateContent xmlns:mc="http://schemas.openxmlformats.org/markup-compatibility/2006" xmlns:a14="http://schemas.microsoft.com/office/drawing/2010/main">
+        <mc:Choice Requires="a14">
           <p:sp>
             <p:nvSpPr>
               <p:cNvPr id="25" name="TextBox 24">
@@ -20053,7 +20834,7 @@
             </p:txBody>
           </p:sp>
         </mc:Choice>
-        <mc:Fallback>
+        <mc:Fallback xmlns="">
           <p:sp>
             <p:nvSpPr>
               <p:cNvPr id="25" name="TextBox 24">
@@ -20098,8 +20879,8 @@
           </p:sp>
         </mc:Fallback>
       </mc:AlternateContent>
-      <mc:AlternateContent xmlns:mc="http://schemas.openxmlformats.org/markup-compatibility/2006">
-        <mc:Choice xmlns:a14="http://schemas.microsoft.com/office/drawing/2010/main" Requires="a14">
+      <mc:AlternateContent xmlns:mc="http://schemas.openxmlformats.org/markup-compatibility/2006" xmlns:a14="http://schemas.microsoft.com/office/drawing/2010/main">
+        <mc:Choice Requires="a14">
           <p:sp>
             <p:nvSpPr>
               <p:cNvPr id="26" name="TextBox 25">
@@ -20405,7 +21186,7 @@
             </p:txBody>
           </p:sp>
         </mc:Choice>
-        <mc:Fallback>
+        <mc:Fallback xmlns="">
           <p:sp>
             <p:nvSpPr>
               <p:cNvPr id="26" name="TextBox 25">
@@ -20450,8 +21231,8 @@
           </p:sp>
         </mc:Fallback>
       </mc:AlternateContent>
-      <mc:AlternateContent xmlns:mc="http://schemas.openxmlformats.org/markup-compatibility/2006">
-        <mc:Choice xmlns:a14="http://schemas.microsoft.com/office/drawing/2010/main" Requires="a14">
+      <mc:AlternateContent xmlns:mc="http://schemas.openxmlformats.org/markup-compatibility/2006" xmlns:a14="http://schemas.microsoft.com/office/drawing/2010/main">
+        <mc:Choice Requires="a14">
           <p:sp>
             <p:nvSpPr>
               <p:cNvPr id="27" name="TextBox 26">
@@ -20757,7 +21538,7 @@
             </p:txBody>
           </p:sp>
         </mc:Choice>
-        <mc:Fallback>
+        <mc:Fallback xmlns="">
           <p:sp>
             <p:nvSpPr>
               <p:cNvPr id="27" name="TextBox 26">
@@ -21253,7 +22034,7 @@
 </p:sld>
 </file>
 
-<file path=ppt/slides/slide21.xml><?xml version="1.0" encoding="utf-8"?>
+<file path=ppt/slides/slide22.xml><?xml version="1.0" encoding="utf-8"?>
 <p:sld xmlns:a="http://schemas.openxmlformats.org/drawingml/2006/main" xmlns:r="http://schemas.openxmlformats.org/officeDocument/2006/relationships" xmlns:p="http://schemas.openxmlformats.org/presentationml/2006/main">
   <p:cSld>
     <p:spTree>
@@ -21302,7 +22083,7 @@
                 <a:ea typeface="Verdana" panose="020B0604030504040204" pitchFamily="34" charset="0"/>
               </a:rPr>
               <a:pPr/>
-              <a:t>21</a:t>
+              <a:t>22</a:t>
             </a:fld>
             <a:endParaRPr lang="ru-RU" sz="2400" spc="-1" dirty="0">
               <a:solidFill>
@@ -21454,77 +22235,32 @@
           </a:p>
         </p:txBody>
       </p:sp>
-      <p:sp>
-        <p:nvSpPr>
-          <p:cNvPr id="32" name="Заголовок 1">
-            <a:extLst>
-              <a:ext uri="{FF2B5EF4-FFF2-40B4-BE49-F238E27FC236}">
-                <a16:creationId xmlns:a16="http://schemas.microsoft.com/office/drawing/2014/main" id="{D2624FEE-71F0-4AFC-B01B-68C4ACE3B66E}"/>
-              </a:ext>
-            </a:extLst>
-          </p:cNvPr>
-          <p:cNvSpPr txBox="1">
-            <a:spLocks/>
-          </p:cNvSpPr>
+      <p:pic>
+        <p:nvPicPr>
+          <p:cNvPr id="33" name="Рисунок 32"/>
+          <p:cNvPicPr>
+            <a:picLocks noChangeAspect="1"/>
+          </p:cNvPicPr>
           <p:nvPr/>
-        </p:nvSpPr>
+        </p:nvPicPr>
+        <p:blipFill>
+          <a:blip r:embed="rId4"/>
+          <a:stretch>
+            <a:fillRect/>
+          </a:stretch>
+        </p:blipFill>
         <p:spPr>
           <a:xfrm>
-            <a:off x="2351584" y="32668"/>
-            <a:ext cx="6596130" cy="827739"/>
+            <a:off x="551384" y="4653136"/>
+            <a:ext cx="4224002" cy="2088232"/>
           </a:xfrm>
           <a:prstGeom prst="rect">
             <a:avLst/>
           </a:prstGeom>
         </p:spPr>
-        <p:txBody>
-          <a:bodyPr vert="horz" lIns="91440" tIns="45720" rIns="91440" bIns="45720" rtlCol="0" anchor="ctr">
-            <a:normAutofit fontScale="92500" lnSpcReduction="20000"/>
-          </a:bodyPr>
-          <a:lstStyle>
-            <a:lvl1pPr algn="ctr" defTabSz="914400" rtl="0" eaLnBrk="1" latinLnBrk="0" hangingPunct="1">
-              <a:spcBef>
-                <a:spcPct val="0"/>
-              </a:spcBef>
-              <a:buNone/>
-              <a:defRPr sz="4400" kern="1200">
-                <a:solidFill>
-                  <a:schemeClr val="tx1"/>
-                </a:solidFill>
-                <a:latin typeface="+mj-lt"/>
-                <a:ea typeface="+mj-ea"/>
-                <a:cs typeface="+mj-cs"/>
-              </a:defRPr>
-            </a:lvl1pPr>
-          </a:lstStyle>
-          <a:p>
-            <a:r>
-              <a:rPr lang="en-US" sz="3200" b="1" dirty="0">
-                <a:solidFill>
-                  <a:schemeClr val="bg1"/>
-                </a:solidFill>
-                <a:latin typeface="Verdana" panose="020B0604030504040204" pitchFamily="34" charset="0"/>
-                <a:ea typeface="Verdana" panose="020B0604030504040204" pitchFamily="34" charset="0"/>
-              </a:rPr>
-              <a:t>Receiver Operating Curve</a:t>
-            </a:r>
-          </a:p>
-          <a:p>
-            <a:r>
-              <a:rPr lang="en-US" sz="3200" b="1" dirty="0">
-                <a:solidFill>
-                  <a:schemeClr val="bg1"/>
-                </a:solidFill>
-                <a:latin typeface="Verdana" panose="020B0604030504040204" pitchFamily="34" charset="0"/>
-                <a:ea typeface="Verdana" panose="020B0604030504040204" pitchFamily="34" charset="0"/>
-              </a:rPr>
-              <a:t>Area Under Curve</a:t>
-            </a:r>
-          </a:p>
-        </p:txBody>
-      </p:sp>
-      <mc:AlternateContent xmlns:mc="http://schemas.openxmlformats.org/markup-compatibility/2006">
-        <mc:Choice xmlns:a14="http://schemas.microsoft.com/office/drawing/2010/main" Requires="a14">
+      </p:pic>
+      <mc:AlternateContent xmlns:mc="http://schemas.openxmlformats.org/markup-compatibility/2006" xmlns:a14="http://schemas.microsoft.com/office/drawing/2010/main">
+        <mc:Choice Requires="a14">
           <p:sp>
             <p:nvSpPr>
               <p:cNvPr id="34" name="TextBox 33">
@@ -21539,8 +22275,8 @@
             </p:nvSpPr>
             <p:spPr>
               <a:xfrm>
-                <a:off x="623392" y="1556792"/>
-                <a:ext cx="4515274" cy="753796"/>
+                <a:off x="119336" y="2924944"/>
+                <a:ext cx="4931991" cy="813813"/>
               </a:xfrm>
               <a:prstGeom prst="rect">
                 <a:avLst/>
@@ -21561,7 +22297,7 @@
                     </m:oMathParaPr>
                     <m:oMath xmlns:m="http://schemas.openxmlformats.org/officeDocument/2006/math">
                       <m:r>
-                        <a:rPr lang="en-US" sz="2400" b="0" i="1" smtClean="0">
+                        <a:rPr lang="en-US" sz="2800" b="0" i="1" smtClean="0">
                           <a:solidFill>
                             <a:schemeClr val="bg1"/>
                           </a:solidFill>
@@ -21570,7 +22306,7 @@
                         <m:t>𝑇𝑟𝑢𝑒</m:t>
                       </m:r>
                       <m:r>
-                        <a:rPr lang="en-US" sz="2400" b="0" i="1" smtClean="0">
+                        <a:rPr lang="en-US" sz="2800" b="0" i="1" smtClean="0">
                           <a:solidFill>
                             <a:schemeClr val="bg1"/>
                           </a:solidFill>
@@ -21579,7 +22315,7 @@
                         <m:t> </m:t>
                       </m:r>
                       <m:r>
-                        <a:rPr lang="en-US" sz="2400" b="0" i="1" smtClean="0">
+                        <a:rPr lang="en-US" sz="2800" b="0" i="1" smtClean="0">
                           <a:solidFill>
                             <a:schemeClr val="bg1"/>
                           </a:solidFill>
@@ -21588,7 +22324,7 @@
                         <m:t>𝑃𝑜𝑠𝑖𝑡𝑖𝑣𝑒</m:t>
                       </m:r>
                       <m:r>
-                        <a:rPr lang="en-US" sz="2400" b="0" i="1" smtClean="0">
+                        <a:rPr lang="en-US" sz="2800" b="0" i="1" smtClean="0">
                           <a:solidFill>
                             <a:schemeClr val="bg1"/>
                           </a:solidFill>
@@ -21597,50 +22333,16 @@
                         <m:t> </m:t>
                       </m:r>
                       <m:r>
-                        <a:rPr lang="en-US" sz="2400" b="0" i="1" smtClean="0">
+                        <a:rPr lang="en-US" sz="2800" b="0" i="1" smtClean="0">
                           <a:solidFill>
                             <a:schemeClr val="bg1"/>
                           </a:solidFill>
                           <a:latin typeface="Cambria Math" panose="02040503050406030204" pitchFamily="18" charset="0"/>
                         </a:rPr>
-                        <m:t>𝑅𝑎𝑡</m:t>
+                        <m:t>𝑅𝑎𝑡𝑒</m:t>
                       </m:r>
-                      <m:sSub>
-                        <m:sSubPr>
-                          <m:ctrlPr>
-                            <a:rPr lang="ru-RU" sz="2400" b="0" i="1" smtClean="0">
-                              <a:solidFill>
-                                <a:schemeClr val="bg1"/>
-                              </a:solidFill>
-                              <a:latin typeface="Cambria Math" panose="02040503050406030204" pitchFamily="18" charset="0"/>
-                            </a:rPr>
-                          </m:ctrlPr>
-                        </m:sSubPr>
-                        <m:e>
-                          <m:r>
-                            <a:rPr lang="en-US" sz="2400" b="0" i="1" smtClean="0">
-                              <a:solidFill>
-                                <a:schemeClr val="bg1"/>
-                              </a:solidFill>
-                              <a:latin typeface="Cambria Math" panose="02040503050406030204" pitchFamily="18" charset="0"/>
-                            </a:rPr>
-                            <m:t>𝑒</m:t>
-                          </m:r>
-                        </m:e>
-                        <m:sub>
-                          <m:r>
-                            <a:rPr lang="en-US" sz="2400" b="0" i="1" smtClean="0">
-                              <a:solidFill>
-                                <a:schemeClr val="bg1"/>
-                              </a:solidFill>
-                              <a:latin typeface="Cambria Math" panose="02040503050406030204" pitchFamily="18" charset="0"/>
-                            </a:rPr>
-                            <m:t>𝑡</m:t>
-                          </m:r>
-                        </m:sub>
-                      </m:sSub>
                       <m:r>
-                        <a:rPr lang="en-US" sz="2400" b="0" i="1" smtClean="0">
+                        <a:rPr lang="en-US" sz="2800" b="0" i="1" smtClean="0">
                           <a:solidFill>
                             <a:schemeClr val="bg1"/>
                           </a:solidFill>
@@ -21651,7 +22353,7 @@
                       <m:f>
                         <m:fPr>
                           <m:ctrlPr>
-                            <a:rPr lang="en-US" sz="2400" b="0" i="1" smtClean="0">
+                            <a:rPr lang="en-US" sz="2800" b="0" i="1" smtClean="0">
                               <a:solidFill>
                                 <a:schemeClr val="bg1"/>
                               </a:solidFill>
@@ -21661,95 +22363,27 @@
                         </m:fPr>
                         <m:num>
                           <m:r>
-                            <a:rPr lang="en-US" sz="2400" i="1">
+                            <a:rPr lang="en-US" sz="2800" i="1">
                               <a:solidFill>
                                 <a:schemeClr val="bg1"/>
                               </a:solidFill>
                               <a:latin typeface="Cambria Math" panose="02040503050406030204" pitchFamily="18" charset="0"/>
                             </a:rPr>
-                            <m:t>𝑇</m:t>
+                            <m:t>𝑇𝑃</m:t>
                           </m:r>
-                          <m:sSub>
-                            <m:sSubPr>
-                              <m:ctrlPr>
-                                <a:rPr lang="en-US" sz="2400" b="0" i="1" smtClean="0">
-                                  <a:solidFill>
-                                    <a:schemeClr val="bg1"/>
-                                  </a:solidFill>
-                                  <a:latin typeface="Cambria Math" panose="02040503050406030204" pitchFamily="18" charset="0"/>
-                                </a:rPr>
-                              </m:ctrlPr>
-                            </m:sSubPr>
-                            <m:e>
-                              <m:r>
-                                <a:rPr lang="en-US" sz="2400" i="1">
-                                  <a:solidFill>
-                                    <a:schemeClr val="bg1"/>
-                                  </a:solidFill>
-                                  <a:latin typeface="Cambria Math" panose="02040503050406030204" pitchFamily="18" charset="0"/>
-                                </a:rPr>
-                                <m:t>𝑃</m:t>
-                              </m:r>
-                            </m:e>
-                            <m:sub>
-                              <m:r>
-                                <a:rPr lang="en-US" sz="2400" b="0" i="1" smtClean="0">
-                                  <a:solidFill>
-                                    <a:schemeClr val="bg1"/>
-                                  </a:solidFill>
-                                  <a:latin typeface="Cambria Math" panose="02040503050406030204" pitchFamily="18" charset="0"/>
-                                </a:rPr>
-                                <m:t>𝑡</m:t>
-                              </m:r>
-                            </m:sub>
-                          </m:sSub>
                         </m:num>
                         <m:den>
                           <m:r>
-                            <a:rPr lang="en-US" sz="2400" i="1">
+                            <a:rPr lang="en-US" sz="2800" i="1">
                               <a:solidFill>
                                 <a:schemeClr val="bg1"/>
                               </a:solidFill>
                               <a:latin typeface="Cambria Math" panose="02040503050406030204" pitchFamily="18" charset="0"/>
                             </a:rPr>
-                            <m:t>𝑇</m:t>
+                            <m:t>𝑇𝑃</m:t>
                           </m:r>
-                          <m:sSub>
-                            <m:sSubPr>
-                              <m:ctrlPr>
-                                <a:rPr lang="en-US" sz="2400" b="0" i="1" smtClean="0">
-                                  <a:solidFill>
-                                    <a:schemeClr val="bg1"/>
-                                  </a:solidFill>
-                                  <a:latin typeface="Cambria Math" panose="02040503050406030204" pitchFamily="18" charset="0"/>
-                                </a:rPr>
-                              </m:ctrlPr>
-                            </m:sSubPr>
-                            <m:e>
-                              <m:r>
-                                <a:rPr lang="en-US" sz="2400" i="1">
-                                  <a:solidFill>
-                                    <a:schemeClr val="bg1"/>
-                                  </a:solidFill>
-                                  <a:latin typeface="Cambria Math" panose="02040503050406030204" pitchFamily="18" charset="0"/>
-                                </a:rPr>
-                                <m:t>𝑃</m:t>
-                              </m:r>
-                            </m:e>
-                            <m:sub>
-                              <m:r>
-                                <a:rPr lang="en-US" sz="2400" b="0" i="1" smtClean="0">
-                                  <a:solidFill>
-                                    <a:schemeClr val="bg1"/>
-                                  </a:solidFill>
-                                  <a:latin typeface="Cambria Math" panose="02040503050406030204" pitchFamily="18" charset="0"/>
-                                </a:rPr>
-                                <m:t>𝑡</m:t>
-                              </m:r>
-                            </m:sub>
-                          </m:sSub>
                           <m:r>
-                            <a:rPr lang="en-US" sz="2400" b="0" i="1" smtClean="0">
+                            <a:rPr lang="en-US" sz="2800" b="0" i="1" smtClean="0">
                               <a:solidFill>
                                 <a:schemeClr val="bg1"/>
                               </a:solidFill>
@@ -21758,54 +22392,20 @@
                             <m:t>+</m:t>
                           </m:r>
                           <m:r>
-                            <a:rPr lang="en-US" sz="2400" b="0" i="1" smtClean="0">
+                            <a:rPr lang="en-US" sz="2800" b="0" i="1" smtClean="0">
                               <a:solidFill>
                                 <a:schemeClr val="bg1"/>
                               </a:solidFill>
                               <a:latin typeface="Cambria Math" panose="02040503050406030204" pitchFamily="18" charset="0"/>
                             </a:rPr>
-                            <m:t>𝐹</m:t>
+                            <m:t>𝐹𝑁</m:t>
                           </m:r>
-                          <m:sSub>
-                            <m:sSubPr>
-                              <m:ctrlPr>
-                                <a:rPr lang="en-US" sz="2400" b="0" i="1" smtClean="0">
-                                  <a:solidFill>
-                                    <a:schemeClr val="bg1"/>
-                                  </a:solidFill>
-                                  <a:latin typeface="Cambria Math" panose="02040503050406030204" pitchFamily="18" charset="0"/>
-                                </a:rPr>
-                              </m:ctrlPr>
-                            </m:sSubPr>
-                            <m:e>
-                              <m:r>
-                                <a:rPr lang="en-US" sz="2400" b="0" i="1" smtClean="0">
-                                  <a:solidFill>
-                                    <a:schemeClr val="bg1"/>
-                                  </a:solidFill>
-                                  <a:latin typeface="Cambria Math" panose="02040503050406030204" pitchFamily="18" charset="0"/>
-                                </a:rPr>
-                                <m:t>𝑁</m:t>
-                              </m:r>
-                            </m:e>
-                            <m:sub>
-                              <m:r>
-                                <a:rPr lang="en-US" sz="2400" b="0" i="1" smtClean="0">
-                                  <a:solidFill>
-                                    <a:schemeClr val="bg1"/>
-                                  </a:solidFill>
-                                  <a:latin typeface="Cambria Math" panose="02040503050406030204" pitchFamily="18" charset="0"/>
-                                </a:rPr>
-                                <m:t>𝑡</m:t>
-                              </m:r>
-                            </m:sub>
-                          </m:sSub>
                         </m:den>
                       </m:f>
                     </m:oMath>
                   </m:oMathPara>
                 </a14:m>
-                <a:endParaRPr lang="ru-RU" sz="2400" dirty="0">
+                <a:endParaRPr lang="ru-RU" sz="2800" dirty="0">
                   <a:solidFill>
                     <a:schemeClr val="bg1"/>
                   </a:solidFill>
@@ -21814,7 +22414,7 @@
             </p:txBody>
           </p:sp>
         </mc:Choice>
-        <mc:Fallback>
+        <mc:Fallback xmlns="">
           <p:sp>
             <p:nvSpPr>
               <p:cNvPr id="34" name="TextBox 33">
@@ -21831,14 +22431,14 @@
             </p:nvSpPr>
             <p:spPr>
               <a:xfrm>
-                <a:off x="623392" y="1556792"/>
-                <a:ext cx="4515274" cy="753796"/>
+                <a:off x="119336" y="2924944"/>
+                <a:ext cx="4931991" cy="813813"/>
               </a:xfrm>
               <a:prstGeom prst="rect">
                 <a:avLst/>
               </a:prstGeom>
               <a:blipFill>
-                <a:blip r:embed="rId4"/>
+                <a:blip r:embed="rId5"/>
                 <a:stretch>
                   <a:fillRect/>
                 </a:stretch>
@@ -21859,8 +22459,8 @@
           </p:sp>
         </mc:Fallback>
       </mc:AlternateContent>
-      <mc:AlternateContent xmlns:mc="http://schemas.openxmlformats.org/markup-compatibility/2006">
-        <mc:Choice xmlns:a14="http://schemas.microsoft.com/office/drawing/2010/main" Requires="a14">
+      <mc:AlternateContent xmlns:mc="http://schemas.openxmlformats.org/markup-compatibility/2006" xmlns:a14="http://schemas.microsoft.com/office/drawing/2010/main">
+        <mc:Choice Requires="a14">
           <p:sp>
             <p:nvSpPr>
               <p:cNvPr id="35" name="TextBox 34">
@@ -21875,8 +22475,8 @@
             </p:nvSpPr>
             <p:spPr>
               <a:xfrm>
-                <a:off x="551384" y="2348880"/>
-                <a:ext cx="4609852" cy="753796"/>
+                <a:off x="119336" y="3861048"/>
+                <a:ext cx="5039392" cy="813813"/>
               </a:xfrm>
               <a:prstGeom prst="rect">
                 <a:avLst/>
@@ -21897,7 +22497,7 @@
                     </m:oMathParaPr>
                     <m:oMath xmlns:m="http://schemas.openxmlformats.org/officeDocument/2006/math">
                       <m:r>
-                        <a:rPr lang="en-US" sz="2400" b="0" i="1" smtClean="0">
+                        <a:rPr lang="en-US" sz="2800" b="0" i="1" smtClean="0">
                           <a:solidFill>
                             <a:schemeClr val="bg1"/>
                           </a:solidFill>
@@ -21906,7 +22506,7 @@
                         <m:t>𝐹𝑎𝑙𝑠𝑒</m:t>
                       </m:r>
                       <m:r>
-                        <a:rPr lang="en-US" sz="2400" i="1">
+                        <a:rPr lang="en-US" sz="2800" i="1">
                           <a:solidFill>
                             <a:schemeClr val="bg1"/>
                           </a:solidFill>
@@ -21915,7 +22515,7 @@
                         <m:t> </m:t>
                       </m:r>
                       <m:r>
-                        <a:rPr lang="en-US" sz="2400" i="1">
+                        <a:rPr lang="en-US" sz="2800" i="1">
                           <a:solidFill>
                             <a:schemeClr val="bg1"/>
                           </a:solidFill>
@@ -21924,7 +22524,7 @@
                         <m:t>𝑃𝑜𝑠𝑖𝑡𝑖𝑣𝑒</m:t>
                       </m:r>
                       <m:r>
-                        <a:rPr lang="en-US" sz="2400" i="1">
+                        <a:rPr lang="en-US" sz="2800" i="1">
                           <a:solidFill>
                             <a:schemeClr val="bg1"/>
                           </a:solidFill>
@@ -21933,50 +22533,16 @@
                         <m:t> </m:t>
                       </m:r>
                       <m:r>
-                        <a:rPr lang="en-US" sz="2400" i="1">
+                        <a:rPr lang="en-US" sz="2800" i="1">
                           <a:solidFill>
                             <a:schemeClr val="bg1"/>
                           </a:solidFill>
                           <a:latin typeface="Cambria Math" panose="02040503050406030204" pitchFamily="18" charset="0"/>
                         </a:rPr>
-                        <m:t>𝑅𝑎𝑡</m:t>
+                        <m:t>𝑅𝑎𝑡𝑒</m:t>
                       </m:r>
-                      <m:sSub>
-                        <m:sSubPr>
-                          <m:ctrlPr>
-                            <a:rPr lang="en-US" sz="2400" b="0" i="1" smtClean="0">
-                              <a:solidFill>
-                                <a:schemeClr val="bg1"/>
-                              </a:solidFill>
-                              <a:latin typeface="Cambria Math" panose="02040503050406030204" pitchFamily="18" charset="0"/>
-                            </a:rPr>
-                          </m:ctrlPr>
-                        </m:sSubPr>
-                        <m:e>
-                          <m:r>
-                            <a:rPr lang="en-US" sz="2400" i="1">
-                              <a:solidFill>
-                                <a:schemeClr val="bg1"/>
-                              </a:solidFill>
-                              <a:latin typeface="Cambria Math" panose="02040503050406030204" pitchFamily="18" charset="0"/>
-                            </a:rPr>
-                            <m:t>𝑒</m:t>
-                          </m:r>
-                        </m:e>
-                        <m:sub>
-                          <m:r>
-                            <a:rPr lang="en-US" sz="2400" b="0" i="1" smtClean="0">
-                              <a:solidFill>
-                                <a:schemeClr val="bg1"/>
-                              </a:solidFill>
-                              <a:latin typeface="Cambria Math" panose="02040503050406030204" pitchFamily="18" charset="0"/>
-                            </a:rPr>
-                            <m:t>𝑡</m:t>
-                          </m:r>
-                        </m:sub>
-                      </m:sSub>
                       <m:r>
-                        <a:rPr lang="en-US" sz="2400" i="1">
+                        <a:rPr lang="en-US" sz="2800" i="1">
                           <a:solidFill>
                             <a:schemeClr val="bg1"/>
                           </a:solidFill>
@@ -21987,7 +22553,7 @@
                       <m:f>
                         <m:fPr>
                           <m:ctrlPr>
-                            <a:rPr lang="en-US" sz="2400" b="0" i="1" smtClean="0">
+                            <a:rPr lang="en-US" sz="2800" b="0" i="1" smtClean="0">
                               <a:solidFill>
                                 <a:schemeClr val="bg1"/>
                               </a:solidFill>
@@ -21997,7 +22563,7 @@
                         </m:fPr>
                         <m:num>
                           <m:r>
-                            <a:rPr lang="en-US" sz="2400" b="0" i="1" smtClean="0">
+                            <a:rPr lang="en-US" sz="2800" b="0" i="1" smtClean="0">
                               <a:solidFill>
                                 <a:schemeClr val="bg1"/>
                               </a:solidFill>
@@ -22005,44 +22571,19 @@
                             </a:rPr>
                             <m:t>𝐹</m:t>
                           </m:r>
-                          <m:sSub>
-                            <m:sSubPr>
-                              <m:ctrlPr>
-                                <a:rPr lang="en-US" sz="2400" b="0" i="1" smtClean="0">
-                                  <a:solidFill>
-                                    <a:schemeClr val="bg1"/>
-                                  </a:solidFill>
-                                  <a:latin typeface="Cambria Math" panose="02040503050406030204" pitchFamily="18" charset="0"/>
-                                </a:rPr>
-                              </m:ctrlPr>
-                            </m:sSubPr>
-                            <m:e>
-                              <m:r>
-                                <a:rPr lang="en-US" sz="2400" i="1">
-                                  <a:solidFill>
-                                    <a:schemeClr val="bg1"/>
-                                  </a:solidFill>
-                                  <a:latin typeface="Cambria Math" panose="02040503050406030204" pitchFamily="18" charset="0"/>
-                                </a:rPr>
-                                <m:t>𝑃</m:t>
-                              </m:r>
-                            </m:e>
-                            <m:sub>
-                              <m:r>
-                                <a:rPr lang="en-US" sz="2400" b="0" i="1" smtClean="0">
-                                  <a:solidFill>
-                                    <a:schemeClr val="bg1"/>
-                                  </a:solidFill>
-                                  <a:latin typeface="Cambria Math" panose="02040503050406030204" pitchFamily="18" charset="0"/>
-                                </a:rPr>
-                                <m:t>𝑡</m:t>
-                              </m:r>
-                            </m:sub>
-                          </m:sSub>
+                          <m:r>
+                            <a:rPr lang="en-US" sz="2800" i="1">
+                              <a:solidFill>
+                                <a:schemeClr val="bg1"/>
+                              </a:solidFill>
+                              <a:latin typeface="Cambria Math" panose="02040503050406030204" pitchFamily="18" charset="0"/>
+                            </a:rPr>
+                            <m:t>𝑃</m:t>
+                          </m:r>
                         </m:num>
                         <m:den>
                           <m:r>
-                            <a:rPr lang="en-US" sz="2400" b="0" i="1" smtClean="0">
+                            <a:rPr lang="en-US" sz="2800" b="0" i="1" smtClean="0">
                               <a:solidFill>
                                 <a:schemeClr val="bg1"/>
                               </a:solidFill>
@@ -22050,42 +22591,17 @@
                             </a:rPr>
                             <m:t>𝐹</m:t>
                           </m:r>
-                          <m:sSub>
-                            <m:sSubPr>
-                              <m:ctrlPr>
-                                <a:rPr lang="en-US" sz="2400" b="0" i="1" smtClean="0">
-                                  <a:solidFill>
-                                    <a:schemeClr val="bg1"/>
-                                  </a:solidFill>
-                                  <a:latin typeface="Cambria Math" panose="02040503050406030204" pitchFamily="18" charset="0"/>
-                                </a:rPr>
-                              </m:ctrlPr>
-                            </m:sSubPr>
-                            <m:e>
-                              <m:r>
-                                <a:rPr lang="en-US" sz="2400" i="1">
-                                  <a:solidFill>
-                                    <a:schemeClr val="bg1"/>
-                                  </a:solidFill>
-                                  <a:latin typeface="Cambria Math" panose="02040503050406030204" pitchFamily="18" charset="0"/>
-                                </a:rPr>
-                                <m:t>𝑃</m:t>
-                              </m:r>
-                            </m:e>
-                            <m:sub>
-                              <m:r>
-                                <a:rPr lang="en-US" sz="2400" b="0" i="1" smtClean="0">
-                                  <a:solidFill>
-                                    <a:schemeClr val="bg1"/>
-                                  </a:solidFill>
-                                  <a:latin typeface="Cambria Math" panose="02040503050406030204" pitchFamily="18" charset="0"/>
-                                </a:rPr>
-                                <m:t>𝑡</m:t>
-                              </m:r>
-                            </m:sub>
-                          </m:sSub>
                           <m:r>
-                            <a:rPr lang="en-US" sz="2400" i="1">
+                            <a:rPr lang="en-US" sz="2800" i="1">
+                              <a:solidFill>
+                                <a:schemeClr val="bg1"/>
+                              </a:solidFill>
+                              <a:latin typeface="Cambria Math" panose="02040503050406030204" pitchFamily="18" charset="0"/>
+                            </a:rPr>
+                            <m:t>𝑃</m:t>
+                          </m:r>
+                          <m:r>
+                            <a:rPr lang="en-US" sz="2800" i="1">
                               <a:solidFill>
                                 <a:schemeClr val="bg1"/>
                               </a:solidFill>
@@ -22094,54 +22610,20 @@
                             <m:t>+</m:t>
                           </m:r>
                           <m:r>
-                            <a:rPr lang="en-US" sz="2400" b="0" i="1" smtClean="0">
+                            <a:rPr lang="en-US" sz="2800" b="0" i="1" smtClean="0">
                               <a:solidFill>
                                 <a:schemeClr val="bg1"/>
                               </a:solidFill>
                               <a:latin typeface="Cambria Math" panose="02040503050406030204" pitchFamily="18" charset="0"/>
                             </a:rPr>
-                            <m:t>𝑇</m:t>
+                            <m:t>𝑇𝑁</m:t>
                           </m:r>
-                          <m:sSub>
-                            <m:sSubPr>
-                              <m:ctrlPr>
-                                <a:rPr lang="en-US" sz="2400" b="0" i="1" smtClean="0">
-                                  <a:solidFill>
-                                    <a:schemeClr val="bg1"/>
-                                  </a:solidFill>
-                                  <a:latin typeface="Cambria Math" panose="02040503050406030204" pitchFamily="18" charset="0"/>
-                                </a:rPr>
-                              </m:ctrlPr>
-                            </m:sSubPr>
-                            <m:e>
-                              <m:r>
-                                <a:rPr lang="en-US" sz="2400" b="0" i="1" smtClean="0">
-                                  <a:solidFill>
-                                    <a:schemeClr val="bg1"/>
-                                  </a:solidFill>
-                                  <a:latin typeface="Cambria Math" panose="02040503050406030204" pitchFamily="18" charset="0"/>
-                                </a:rPr>
-                                <m:t>𝑁</m:t>
-                              </m:r>
-                            </m:e>
-                            <m:sub>
-                              <m:r>
-                                <a:rPr lang="en-US" sz="2400" b="0" i="1" smtClean="0">
-                                  <a:solidFill>
-                                    <a:schemeClr val="bg1"/>
-                                  </a:solidFill>
-                                  <a:latin typeface="Cambria Math" panose="02040503050406030204" pitchFamily="18" charset="0"/>
-                                </a:rPr>
-                                <m:t>𝑡</m:t>
-                              </m:r>
-                            </m:sub>
-                          </m:sSub>
                         </m:den>
                       </m:f>
                     </m:oMath>
                   </m:oMathPara>
                 </a14:m>
-                <a:endParaRPr lang="ru-RU" sz="2400" dirty="0">
+                <a:endParaRPr lang="ru-RU" sz="2800" dirty="0">
                   <a:solidFill>
                     <a:schemeClr val="bg1"/>
                   </a:solidFill>
@@ -22150,7 +22632,7 @@
             </p:txBody>
           </p:sp>
         </mc:Choice>
-        <mc:Fallback>
+        <mc:Fallback xmlns="">
           <p:sp>
             <p:nvSpPr>
               <p:cNvPr id="35" name="TextBox 34">
@@ -22167,14 +22649,14 @@
             </p:nvSpPr>
             <p:spPr>
               <a:xfrm>
-                <a:off x="551384" y="2348880"/>
-                <a:ext cx="4609852" cy="753796"/>
+                <a:off x="119336" y="3861048"/>
+                <a:ext cx="5039392" cy="813813"/>
               </a:xfrm>
               <a:prstGeom prst="rect">
                 <a:avLst/>
               </a:prstGeom>
               <a:blipFill>
-                <a:blip r:embed="rId5"/>
+                <a:blip r:embed="rId6"/>
                 <a:stretch>
                   <a:fillRect/>
                 </a:stretch>
@@ -22211,8 +22693,8 @@
             </p:nvSpPr>
             <p:spPr>
               <a:xfrm>
-                <a:off x="335360" y="908720"/>
-                <a:ext cx="4032448" cy="646331"/>
+                <a:off x="119336" y="1159743"/>
+                <a:ext cx="5320687" cy="646331"/>
               </a:xfrm>
               <a:prstGeom prst="rect">
                 <a:avLst/>
@@ -22368,7 +22850,7 @@
                             <a:noFill/>
                           </a:ln>
                           <a:solidFill>
-                            <a:schemeClr val="bg1"/>
+                            <a:srgbClr val="FF0000"/>
                           </a:solidFill>
                           <a:effectLst/>
                           <a:uLnTx/>
@@ -22425,14 +22907,14 @@
             </p:nvSpPr>
             <p:spPr>
               <a:xfrm>
-                <a:off x="335360" y="908720"/>
-                <a:ext cx="4032448" cy="646331"/>
+                <a:off x="119336" y="1159743"/>
+                <a:ext cx="5320687" cy="646331"/>
               </a:xfrm>
               <a:prstGeom prst="rect">
                 <a:avLst/>
               </a:prstGeom>
               <a:blipFill>
-                <a:blip r:embed="rId6"/>
+                <a:blip r:embed="rId7"/>
                 <a:stretch>
                   <a:fillRect/>
                 </a:stretch>
@@ -22462,14 +22944,14 @@
           <p:nvPr/>
         </p:nvPicPr>
         <p:blipFill rotWithShape="1">
-          <a:blip r:embed="rId7"/>
+          <a:blip r:embed="rId8"/>
           <a:srcRect l="432"/>
           <a:stretch/>
         </p:blipFill>
         <p:spPr>
           <a:xfrm>
-            <a:off x="479376" y="3260834"/>
-            <a:ext cx="4800449" cy="3597166"/>
+            <a:off x="4983117" y="1338881"/>
+            <a:ext cx="3804113" cy="2850573"/>
           </a:xfrm>
           <a:prstGeom prst="rect">
             <a:avLst/>
@@ -22492,7 +22974,7 @@
           <p:nvPr/>
         </p:nvPicPr>
         <p:blipFill>
-          <a:blip r:embed="rId8">
+          <a:blip r:embed="rId9">
             <a:extLst>
               <a:ext uri="{28A0092B-C50C-407E-A947-70E740481C1C}">
                 <a14:useLocalDpi xmlns:a14="http://schemas.microsoft.com/office/drawing/2010/main" val="0"/>
@@ -22506,8 +22988,8 @@
         </p:blipFill>
         <p:spPr bwMode="auto">
           <a:xfrm>
-            <a:off x="6240016" y="1052735"/>
-            <a:ext cx="5112568" cy="5629795"/>
+            <a:off x="8818414" y="1926559"/>
+            <a:ext cx="3204228" cy="3528392"/>
           </a:xfrm>
           <a:prstGeom prst="rect">
             <a:avLst/>
@@ -22524,10 +23006,65 @@
           </a:extLst>
         </p:spPr>
       </p:pic>
+      <p:sp>
+        <p:nvSpPr>
+          <p:cNvPr id="15" name="Нижний колонтитул 6"/>
+          <p:cNvSpPr>
+            <a:spLocks noGrp="1"/>
+          </p:cNvSpPr>
+          <p:nvPr>
+            <p:ph type="ftr" idx="4294967295"/>
+          </p:nvPr>
+        </p:nvSpPr>
+        <p:spPr>
+          <a:xfrm>
+            <a:off x="3143672" y="176904"/>
+            <a:ext cx="7180730" cy="484915"/>
+          </a:xfrm>
+          <a:prstGeom prst="rect">
+            <a:avLst/>
+          </a:prstGeom>
+        </p:spPr>
+        <p:txBody>
+          <a:bodyPr/>
+          <a:lstStyle/>
+          <a:p>
+            <a:r>
+              <a:rPr lang="en-US" sz="3200" b="1" dirty="0">
+                <a:solidFill>
+                  <a:schemeClr val="bg1"/>
+                </a:solidFill>
+                <a:latin typeface="Verdana" panose="020B0604030504040204" pitchFamily="34" charset="0"/>
+                <a:ea typeface="Verdana" panose="020B0604030504040204" pitchFamily="34" charset="0"/>
+              </a:rPr>
+              <a:t>Receiver Operating Curve</a:t>
+            </a:r>
+          </a:p>
+          <a:p>
+            <a:r>
+              <a:rPr lang="en-US" sz="3200" b="1" dirty="0">
+                <a:solidFill>
+                  <a:schemeClr val="bg1"/>
+                </a:solidFill>
+                <a:latin typeface="Verdana" panose="020B0604030504040204" pitchFamily="34" charset="0"/>
+                <a:ea typeface="Verdana" panose="020B0604030504040204" pitchFamily="34" charset="0"/>
+              </a:rPr>
+              <a:t>Area Under Curve</a:t>
+            </a:r>
+            <a:endParaRPr lang="en-US" sz="3200" b="1" dirty="0">
+              <a:solidFill>
+                <a:schemeClr val="bg1"/>
+              </a:solidFill>
+              <a:latin typeface="Verdana" panose="020B0604030504040204" pitchFamily="34" charset="0"/>
+              <a:ea typeface="Verdana" panose="020B0604030504040204" pitchFamily="34" charset="0"/>
+            </a:endParaRPr>
+          </a:p>
+        </p:txBody>
+      </p:sp>
     </p:spTree>
     <p:extLst>
       <p:ext uri="{BB962C8B-B14F-4D97-AF65-F5344CB8AC3E}">
-        <p14:creationId xmlns:p14="http://schemas.microsoft.com/office/powerpoint/2010/main" val="1331527151"/>
+        <p14:creationId xmlns:p14="http://schemas.microsoft.com/office/powerpoint/2010/main" val="457923037"/>
       </p:ext>
     </p:extLst>
   </p:cSld>
@@ -22843,7 +23380,7 @@
 </p:sld>
 </file>
 
-<file path=ppt/slides/slide22.xml><?xml version="1.0" encoding="utf-8"?>
+<file path=ppt/slides/slide23.xml><?xml version="1.0" encoding="utf-8"?>
 <p:sld xmlns:a="http://schemas.openxmlformats.org/drawingml/2006/main" xmlns:r="http://schemas.openxmlformats.org/officeDocument/2006/relationships" xmlns:p="http://schemas.openxmlformats.org/presentationml/2006/main">
   <p:cSld>
     <p:spTree>
@@ -22892,7 +23429,7 @@
                 <a:ea typeface="Verdana" panose="020B0604030504040204" pitchFamily="34" charset="0"/>
               </a:rPr>
               <a:pPr/>
-              <a:t>22</a:t>
+              <a:t>23</a:t>
             </a:fld>
             <a:endParaRPr lang="ru-RU" sz="2400" spc="-1" dirty="0">
               <a:solidFill>
@@ -23644,7 +24181,7 @@
 </p:sld>
 </file>
 
-<file path=ppt/slides/slide23.xml><?xml version="1.0" encoding="utf-8"?>
+<file path=ppt/slides/slide24.xml><?xml version="1.0" encoding="utf-8"?>
 <p:sld xmlns:a="http://schemas.openxmlformats.org/drawingml/2006/main" xmlns:r="http://schemas.openxmlformats.org/officeDocument/2006/relationships" xmlns:p="http://schemas.openxmlformats.org/presentationml/2006/main">
   <p:cSld>
     <p:spTree>
@@ -23693,7 +24230,7 @@
                 <a:ea typeface="Verdana" panose="020B0604030504040204" pitchFamily="34" charset="0"/>
               </a:rPr>
               <a:pPr/>
-              <a:t>23</a:t>
+              <a:t>24</a:t>
             </a:fld>
             <a:endParaRPr lang="ru-RU" sz="2400" spc="-1" dirty="0">
               <a:solidFill>
@@ -24245,7 +24782,7 @@
 </p:sld>
 </file>
 
-<file path=ppt/slides/slide24.xml><?xml version="1.0" encoding="utf-8"?>
+<file path=ppt/slides/slide25.xml><?xml version="1.0" encoding="utf-8"?>
 <p:sld xmlns:a="http://schemas.openxmlformats.org/drawingml/2006/main" xmlns:r="http://schemas.openxmlformats.org/officeDocument/2006/relationships" xmlns:p="http://schemas.openxmlformats.org/presentationml/2006/main">
   <p:cSld>
     <p:spTree>
@@ -24294,7 +24831,7 @@
                 <a:ea typeface="Verdana" panose="020B0604030504040204" pitchFamily="34" charset="0"/>
               </a:rPr>
               <a:pPr/>
-              <a:t>24</a:t>
+              <a:t>25</a:t>
             </a:fld>
             <a:endParaRPr lang="ru-RU" sz="2400" spc="-1" dirty="0">
               <a:solidFill>
@@ -25930,7 +26467,7 @@
 </p:sld>
 </file>
 
-<file path=ppt/slides/slide25.xml><?xml version="1.0" encoding="utf-8"?>
+<file path=ppt/slides/slide26.xml><?xml version="1.0" encoding="utf-8"?>
 <p:sld xmlns:a="http://schemas.openxmlformats.org/drawingml/2006/main" xmlns:r="http://schemas.openxmlformats.org/officeDocument/2006/relationships" xmlns:p="http://schemas.openxmlformats.org/presentationml/2006/main">
   <p:cSld>
     <p:spTree>
@@ -25979,7 +26516,7 @@
                 <a:ea typeface="Verdana" panose="020B0604030504040204" pitchFamily="34" charset="0"/>
               </a:rPr>
               <a:pPr/>
-              <a:t>25</a:t>
+              <a:t>26</a:t>
             </a:fld>
             <a:endParaRPr lang="ru-RU" sz="2400" spc="-1" dirty="0">
               <a:solidFill>
@@ -26347,7 +26884,7 @@
 </p:sld>
 </file>
 
-<file path=ppt/slides/slide26.xml><?xml version="1.0" encoding="utf-8"?>
+<file path=ppt/slides/slide27.xml><?xml version="1.0" encoding="utf-8"?>
 <p:sld xmlns:a="http://schemas.openxmlformats.org/drawingml/2006/main" xmlns:r="http://schemas.openxmlformats.org/officeDocument/2006/relationships" xmlns:p="http://schemas.openxmlformats.org/presentationml/2006/main">
   <p:cSld>
     <p:spTree>
@@ -26396,7 +26933,7 @@
                 <a:ea typeface="Verdana" panose="020B0604030504040204" pitchFamily="34" charset="0"/>
               </a:rPr>
               <a:pPr/>
-              <a:t>26</a:t>
+              <a:t>27</a:t>
             </a:fld>
             <a:endParaRPr lang="ru-RU" sz="2400" spc="-1" dirty="0">
               <a:solidFill>
@@ -30747,7 +31284,7 @@
         </p:nvSpPr>
         <p:spPr>
           <a:xfrm>
-            <a:off x="1847528" y="29474"/>
+            <a:off x="1991544" y="17287"/>
             <a:ext cx="7920880" cy="827739"/>
           </a:xfrm>
         </p:spPr>
@@ -30765,7 +31302,7 @@
                 <a:latin typeface="Verdana" panose="020B0604030504040204" pitchFamily="34" charset="0"/>
                 <a:ea typeface="Verdana" panose="020B0604030504040204" pitchFamily="34" charset="0"/>
               </a:rPr>
-              <a:t>Мотивация</a:t>
+              <a:t>Примеры задач</a:t>
             </a:r>
           </a:p>
         </p:txBody>
@@ -30909,10 +31446,57 @@
       </p:cxnSp>
       <p:sp>
         <p:nvSpPr>
-          <p:cNvPr id="11" name="TextBox 10">
+          <p:cNvPr id="11" name="Прямоугольник 10">
             <a:extLst>
               <a:ext uri="{FF2B5EF4-FFF2-40B4-BE49-F238E27FC236}">
-                <a16:creationId xmlns:a16="http://schemas.microsoft.com/office/drawing/2014/main" id="{58CCDE01-714B-4879-B483-A10A718E7E4F}"/>
+                <a16:creationId xmlns:a16="http://schemas.microsoft.com/office/drawing/2014/main" id="{63A165CA-3B0E-4C5E-B52D-E957B7A1BAD0}"/>
+              </a:ext>
+            </a:extLst>
+          </p:cNvPr>
+          <p:cNvSpPr/>
+          <p:nvPr/>
+        </p:nvSpPr>
+        <p:spPr>
+          <a:xfrm>
+            <a:off x="11556540" y="138599"/>
+            <a:ext cx="314510" cy="523220"/>
+          </a:xfrm>
+          <a:prstGeom prst="rect">
+            <a:avLst/>
+          </a:prstGeom>
+        </p:spPr>
+        <p:txBody>
+          <a:bodyPr wrap="none">
+            <a:spAutoFit/>
+          </a:bodyPr>
+          <a:lstStyle/>
+          <a:p>
+            <a:r>
+              <a:rPr lang="en-US" sz="2800" dirty="0">
+                <a:solidFill>
+                  <a:schemeClr val="bg1"/>
+                </a:solidFill>
+                <a:latin typeface="Verdana" panose="020B0604030504040204" pitchFamily="34" charset="0"/>
+                <a:ea typeface="Verdana" panose="020B0604030504040204" pitchFamily="34" charset="0"/>
+              </a:rPr>
+              <a:t>.</a:t>
+            </a:r>
+            <a:endParaRPr lang="ru-RU" sz="2800" dirty="0">
+              <a:solidFill>
+                <a:schemeClr val="bg1"/>
+              </a:solidFill>
+              <a:latin typeface="Verdana" panose="020B0604030504040204" pitchFamily="34" charset="0"/>
+              <a:ea typeface="Verdana" panose="020B0604030504040204" pitchFamily="34" charset="0"/>
+            </a:endParaRPr>
+          </a:p>
+        </p:txBody>
+      </p:sp>
+      <p:sp>
+        <p:nvSpPr>
+          <p:cNvPr id="10" name="TextBox 9">
+            <a:extLst>
+              <a:ext uri="{FF2B5EF4-FFF2-40B4-BE49-F238E27FC236}">
+                <a16:creationId xmlns:a16="http://schemas.microsoft.com/office/drawing/2014/main" id="{CECB526C-CC06-44B2-AE27-34F879A528C6}"/>
               </a:ext>
             </a:extLst>
           </p:cNvPr>
@@ -30921,8 +31505,8 @@
         </p:nvSpPr>
         <p:spPr>
           <a:xfrm>
-            <a:off x="4249420" y="6374021"/>
-            <a:ext cx="6121400" cy="380104"/>
+            <a:off x="407368" y="980728"/>
+            <a:ext cx="10729192" cy="646331"/>
           </a:xfrm>
           <a:prstGeom prst="rect">
             <a:avLst/>
@@ -30936,25 +31520,1143 @@
           <a:lstStyle/>
           <a:p>
             <a:r>
-              <a:rPr lang="ru-RU" dirty="0">
+              <a:rPr lang="en-US" b="1" dirty="0">
                 <a:solidFill>
                   <a:schemeClr val="bg1"/>
                 </a:solidFill>
+                <a:latin typeface="Verdana" panose="020B0604030504040204" pitchFamily="34" charset="0"/>
+                <a:ea typeface="Verdana" panose="020B0604030504040204" pitchFamily="34" charset="0"/>
               </a:rPr>
-              <a:t>https://www.kaggle.com/</a:t>
+              <a:t>Exploring Mental Health Data</a:t>
             </a:r>
+          </a:p>
+          <a:p>
+            <a:r>
+              <a:rPr lang="ru-RU" b="1" dirty="0" smtClean="0">
+                <a:solidFill>
+                  <a:schemeClr val="bg1"/>
+                </a:solidFill>
+                <a:latin typeface="Verdana" panose="020B0604030504040204" pitchFamily="34" charset="0"/>
+                <a:ea typeface="Verdana" panose="020B0604030504040204" pitchFamily="34" charset="0"/>
+              </a:rPr>
+              <a:t>(</a:t>
+            </a:r>
+            <a:r>
+              <a:rPr lang="en-US" b="1" dirty="0">
+                <a:solidFill>
+                  <a:schemeClr val="bg1"/>
+                </a:solidFill>
+                <a:latin typeface="Verdana" panose="020B0604030504040204" pitchFamily="34" charset="0"/>
+                <a:ea typeface="Verdana" panose="020B0604030504040204" pitchFamily="34" charset="0"/>
+              </a:rPr>
+              <a:t>https://www.kaggle.com/c/playground-series-s4e11</a:t>
+            </a:r>
+            <a:r>
+              <a:rPr lang="ru-RU" b="1" dirty="0" smtClean="0">
+                <a:solidFill>
+                  <a:schemeClr val="bg1"/>
+                </a:solidFill>
+                <a:latin typeface="Verdana" panose="020B0604030504040204" pitchFamily="34" charset="0"/>
+                <a:ea typeface="Verdana" panose="020B0604030504040204" pitchFamily="34" charset="0"/>
+              </a:rPr>
+              <a:t>)</a:t>
+            </a:r>
+            <a:endParaRPr lang="en-US" b="1" dirty="0">
+              <a:solidFill>
+                <a:schemeClr val="bg1"/>
+              </a:solidFill>
+              <a:latin typeface="Verdana" panose="020B0604030504040204" pitchFamily="34" charset="0"/>
+              <a:ea typeface="Verdana" panose="020B0604030504040204" pitchFamily="34" charset="0"/>
+            </a:endParaRPr>
+          </a:p>
+        </p:txBody>
+      </p:sp>
+      <p:sp>
+        <p:nvSpPr>
+          <p:cNvPr id="17" name="TextBox 16">
+            <a:extLst>
+              <a:ext uri="{FF2B5EF4-FFF2-40B4-BE49-F238E27FC236}">
+                <a16:creationId xmlns:a16="http://schemas.microsoft.com/office/drawing/2014/main" id="{387B420B-E02A-41D4-89E0-630C5BC59E5D}"/>
+              </a:ext>
+            </a:extLst>
+          </p:cNvPr>
+          <p:cNvSpPr txBox="1"/>
+          <p:nvPr/>
+        </p:nvSpPr>
+        <p:spPr>
+          <a:xfrm>
+            <a:off x="479376" y="1556792"/>
+            <a:ext cx="8246536" cy="923330"/>
+          </a:xfrm>
+          <a:prstGeom prst="rect">
+            <a:avLst/>
+          </a:prstGeom>
+          <a:noFill/>
+        </p:spPr>
+        <p:txBody>
+          <a:bodyPr wrap="square">
+            <a:spAutoFit/>
+          </a:bodyPr>
+          <a:lstStyle/>
+          <a:p>
+            <a:r>
+              <a:rPr lang="en-US" dirty="0">
+                <a:solidFill>
+                  <a:schemeClr val="bg1"/>
+                </a:solidFill>
+                <a:latin typeface="Montserrat" panose="00000500000000000000" pitchFamily="2" charset="-52"/>
+              </a:rPr>
+              <a:t>The objective of this challenge is to forecast sticker sales in different countries. "At </a:t>
+            </a:r>
+            <a:r>
+              <a:rPr lang="en-US" dirty="0" err="1">
+                <a:solidFill>
+                  <a:schemeClr val="bg1"/>
+                </a:solidFill>
+                <a:latin typeface="Montserrat" panose="00000500000000000000" pitchFamily="2" charset="-52"/>
+              </a:rPr>
+              <a:t>Kaggle</a:t>
+            </a:r>
+            <a:r>
+              <a:rPr lang="en-US" dirty="0">
+                <a:solidFill>
+                  <a:schemeClr val="bg1"/>
+                </a:solidFill>
+                <a:latin typeface="Montserrat" panose="00000500000000000000" pitchFamily="2" charset="-52"/>
+              </a:rPr>
+              <a:t>, we take stickers seriously!"</a:t>
+            </a:r>
+            <a:endParaRPr lang="ru-RU" dirty="0">
+              <a:solidFill>
+                <a:schemeClr val="bg1"/>
+              </a:solidFill>
+              <a:latin typeface="Montserrat" panose="00000500000000000000" pitchFamily="2" charset="-52"/>
+            </a:endParaRPr>
+          </a:p>
+        </p:txBody>
+      </p:sp>
+      <p:sp>
+        <p:nvSpPr>
+          <p:cNvPr id="16" name="TextBox 15">
+            <a:extLst>
+              <a:ext uri="{FF2B5EF4-FFF2-40B4-BE49-F238E27FC236}">
+                <a16:creationId xmlns:a16="http://schemas.microsoft.com/office/drawing/2014/main" id="{CECB526C-CC06-44B2-AE27-34F879A528C6}"/>
+              </a:ext>
+            </a:extLst>
+          </p:cNvPr>
+          <p:cNvSpPr txBox="1"/>
+          <p:nvPr/>
+        </p:nvSpPr>
+        <p:spPr>
+          <a:xfrm>
+            <a:off x="479376" y="3933056"/>
+            <a:ext cx="10729192" cy="646331"/>
+          </a:xfrm>
+          <a:prstGeom prst="rect">
+            <a:avLst/>
+          </a:prstGeom>
+          <a:noFill/>
+        </p:spPr>
+        <p:txBody>
+          <a:bodyPr wrap="square">
+            <a:spAutoFit/>
+          </a:bodyPr>
+          <a:lstStyle/>
+          <a:p>
+            <a:r>
+              <a:rPr lang="en-US" b="1" dirty="0">
+                <a:solidFill>
+                  <a:schemeClr val="bg1"/>
+                </a:solidFill>
+                <a:latin typeface="Verdana" panose="020B0604030504040204" pitchFamily="34" charset="0"/>
+                <a:ea typeface="Verdana" panose="020B0604030504040204" pitchFamily="34" charset="0"/>
+              </a:rPr>
+              <a:t>Child Mind Institute — Problematic Internet Use</a:t>
+            </a:r>
+          </a:p>
+          <a:p>
+            <a:r>
+              <a:rPr lang="ru-RU" b="1" dirty="0" smtClean="0">
+                <a:solidFill>
+                  <a:schemeClr val="bg1"/>
+                </a:solidFill>
+                <a:latin typeface="Verdana" panose="020B0604030504040204" pitchFamily="34" charset="0"/>
+                <a:ea typeface="Verdana" panose="020B0604030504040204" pitchFamily="34" charset="0"/>
+              </a:rPr>
+              <a:t>(</a:t>
+            </a:r>
+            <a:r>
+              <a:rPr lang="en-US" b="1" dirty="0">
+                <a:solidFill>
+                  <a:schemeClr val="bg1"/>
+                </a:solidFill>
+                <a:latin typeface="Verdana" panose="020B0604030504040204" pitchFamily="34" charset="0"/>
+                <a:ea typeface="Verdana" panose="020B0604030504040204" pitchFamily="34" charset="0"/>
+              </a:rPr>
+              <a:t>https://</a:t>
+            </a:r>
+            <a:r>
+              <a:rPr lang="en-US" b="1" dirty="0" smtClean="0">
+                <a:solidFill>
+                  <a:schemeClr val="bg1"/>
+                </a:solidFill>
+                <a:latin typeface="Verdana" panose="020B0604030504040204" pitchFamily="34" charset="0"/>
+                <a:ea typeface="Verdana" panose="020B0604030504040204" pitchFamily="34" charset="0"/>
+              </a:rPr>
+              <a:t>www.kaggle.com/c/child-mind-institute-problematic-internet-use</a:t>
+            </a:r>
+            <a:r>
+              <a:rPr lang="ru-RU" b="1" dirty="0" smtClean="0">
+                <a:solidFill>
+                  <a:schemeClr val="bg1"/>
+                </a:solidFill>
+                <a:latin typeface="Verdana" panose="020B0604030504040204" pitchFamily="34" charset="0"/>
+                <a:ea typeface="Verdana" panose="020B0604030504040204" pitchFamily="34" charset="0"/>
+              </a:rPr>
+              <a:t>)</a:t>
+            </a:r>
+            <a:endParaRPr lang="en-US" b="1" dirty="0">
+              <a:solidFill>
+                <a:schemeClr val="bg1"/>
+              </a:solidFill>
+              <a:latin typeface="Verdana" panose="020B0604030504040204" pitchFamily="34" charset="0"/>
+              <a:ea typeface="Verdana" panose="020B0604030504040204" pitchFamily="34" charset="0"/>
+            </a:endParaRPr>
+          </a:p>
+        </p:txBody>
+      </p:sp>
+      <p:sp>
+        <p:nvSpPr>
+          <p:cNvPr id="20" name="TextBox 19">
+            <a:extLst>
+              <a:ext uri="{FF2B5EF4-FFF2-40B4-BE49-F238E27FC236}">
+                <a16:creationId xmlns:a16="http://schemas.microsoft.com/office/drawing/2014/main" id="{387B420B-E02A-41D4-89E0-630C5BC59E5D}"/>
+              </a:ext>
+            </a:extLst>
+          </p:cNvPr>
+          <p:cNvSpPr txBox="1"/>
+          <p:nvPr/>
+        </p:nvSpPr>
+        <p:spPr>
+          <a:xfrm>
+            <a:off x="551384" y="4581128"/>
+            <a:ext cx="8246536" cy="646331"/>
+          </a:xfrm>
+          <a:prstGeom prst="rect">
+            <a:avLst/>
+          </a:prstGeom>
+          <a:noFill/>
+        </p:spPr>
+        <p:txBody>
+          <a:bodyPr wrap="square">
+            <a:spAutoFit/>
+          </a:bodyPr>
+          <a:lstStyle/>
+          <a:p>
+            <a:r>
+              <a:rPr lang="en-US" dirty="0">
+                <a:solidFill>
+                  <a:schemeClr val="bg1"/>
+                </a:solidFill>
+                <a:latin typeface="Montserrat" panose="00000500000000000000" pitchFamily="2" charset="-52"/>
+              </a:rPr>
+              <a:t>The objectives of this challenge is to predict insurance premiums based on various factors.</a:t>
+            </a:r>
+            <a:endParaRPr lang="ru-RU" dirty="0">
+              <a:solidFill>
+                <a:schemeClr val="bg1"/>
+              </a:solidFill>
+              <a:latin typeface="Montserrat" panose="00000500000000000000" pitchFamily="2" charset="-52"/>
+            </a:endParaRPr>
           </a:p>
         </p:txBody>
       </p:sp>
       <p:pic>
         <p:nvPicPr>
-          <p:cNvPr id="12" name="Рисунок 11">
+          <p:cNvPr id="3" name="Рисунок 2"/>
+          <p:cNvPicPr>
+            <a:picLocks noChangeAspect="1"/>
+          </p:cNvPicPr>
+          <p:nvPr/>
+        </p:nvPicPr>
+        <p:blipFill>
+          <a:blip r:embed="rId4">
+            <a:clrChange>
+              <a:clrFrom>
+                <a:srgbClr val="1C1D20"/>
+              </a:clrFrom>
+              <a:clrTo>
+                <a:srgbClr val="1C1D20">
+                  <a:alpha val="0"/>
+                </a:srgbClr>
+              </a:clrTo>
+            </a:clrChange>
+          </a:blip>
+          <a:stretch>
+            <a:fillRect/>
+          </a:stretch>
+        </p:blipFill>
+        <p:spPr>
+          <a:xfrm>
+            <a:off x="5087888" y="2060848"/>
+            <a:ext cx="6900639" cy="1830486"/>
+          </a:xfrm>
+          <a:prstGeom prst="rect">
+            <a:avLst/>
+          </a:prstGeom>
+        </p:spPr>
+      </p:pic>
+      <p:pic>
+        <p:nvPicPr>
+          <p:cNvPr id="5" name="Рисунок 4"/>
+          <p:cNvPicPr>
+            <a:picLocks noChangeAspect="1"/>
+          </p:cNvPicPr>
+          <p:nvPr/>
+        </p:nvPicPr>
+        <p:blipFill>
+          <a:blip r:embed="rId5">
+            <a:clrChange>
+              <a:clrFrom>
+                <a:srgbClr val="1C1D20"/>
+              </a:clrFrom>
+              <a:clrTo>
+                <a:srgbClr val="1C1D20">
+                  <a:alpha val="0"/>
+                </a:srgbClr>
+              </a:clrTo>
+            </a:clrChange>
+          </a:blip>
+          <a:stretch>
+            <a:fillRect/>
+          </a:stretch>
+        </p:blipFill>
+        <p:spPr>
+          <a:xfrm>
+            <a:off x="5303912" y="4941168"/>
+            <a:ext cx="5933728" cy="1874519"/>
+          </a:xfrm>
+          <a:prstGeom prst="rect">
+            <a:avLst/>
+          </a:prstGeom>
+        </p:spPr>
+      </p:pic>
+    </p:spTree>
+    <p:extLst>
+      <p:ext uri="{BB962C8B-B14F-4D97-AF65-F5344CB8AC3E}">
+        <p14:creationId xmlns:p14="http://schemas.microsoft.com/office/powerpoint/2010/main" val="3433096798"/>
+      </p:ext>
+    </p:extLst>
+  </p:cSld>
+  <p:clrMapOvr>
+    <a:masterClrMapping/>
+  </p:clrMapOvr>
+  <p:timing>
+    <p:tnLst>
+      <p:par>
+        <p:cTn id="1" dur="indefinite" restart="never" nodeType="tmRoot">
+          <p:childTnLst>
+            <p:seq concurrent="1" nextAc="seek">
+              <p:cTn id="2" dur="indefinite" nodeType="mainSeq">
+                <p:childTnLst>
+                  <p:par>
+                    <p:cTn id="3" fill="hold">
+                      <p:stCondLst>
+                        <p:cond delay="indefinite"/>
+                      </p:stCondLst>
+                      <p:childTnLst>
+                        <p:par>
+                          <p:cTn id="4" fill="hold">
+                            <p:stCondLst>
+                              <p:cond delay="0"/>
+                            </p:stCondLst>
+                            <p:childTnLst>
+                              <p:par>
+                                <p:cTn id="5" presetID="1" presetClass="entr" presetSubtype="0" fill="hold" grpId="0" nodeType="clickEffect">
+                                  <p:stCondLst>
+                                    <p:cond delay="0"/>
+                                  </p:stCondLst>
+                                  <p:childTnLst>
+                                    <p:set>
+                                      <p:cBhvr>
+                                        <p:cTn id="6" dur="1" fill="hold">
+                                          <p:stCondLst>
+                                            <p:cond delay="0"/>
+                                          </p:stCondLst>
+                                        </p:cTn>
+                                        <p:tgtEl>
+                                          <p:spTgt spid="10"/>
+                                        </p:tgtEl>
+                                        <p:attrNameLst>
+                                          <p:attrName>style.visibility</p:attrName>
+                                        </p:attrNameLst>
+                                      </p:cBhvr>
+                                      <p:to>
+                                        <p:strVal val="visible"/>
+                                      </p:to>
+                                    </p:set>
+                                  </p:childTnLst>
+                                </p:cTn>
+                              </p:par>
+                              <p:par>
+                                <p:cTn id="7" presetID="1" presetClass="entr" presetSubtype="0" fill="hold" grpId="0" nodeType="withEffect">
+                                  <p:stCondLst>
+                                    <p:cond delay="0"/>
+                                  </p:stCondLst>
+                                  <p:childTnLst>
+                                    <p:set>
+                                      <p:cBhvr>
+                                        <p:cTn id="8" dur="1" fill="hold">
+                                          <p:stCondLst>
+                                            <p:cond delay="0"/>
+                                          </p:stCondLst>
+                                        </p:cTn>
+                                        <p:tgtEl>
+                                          <p:spTgt spid="17"/>
+                                        </p:tgtEl>
+                                        <p:attrNameLst>
+                                          <p:attrName>style.visibility</p:attrName>
+                                        </p:attrNameLst>
+                                      </p:cBhvr>
+                                      <p:to>
+                                        <p:strVal val="visible"/>
+                                      </p:to>
+                                    </p:set>
+                                  </p:childTnLst>
+                                </p:cTn>
+                              </p:par>
+                              <p:par>
+                                <p:cTn id="9" presetID="1" presetClass="entr" presetSubtype="0" fill="hold" nodeType="withEffect">
+                                  <p:stCondLst>
+                                    <p:cond delay="0"/>
+                                  </p:stCondLst>
+                                  <p:childTnLst>
+                                    <p:set>
+                                      <p:cBhvr>
+                                        <p:cTn id="10" dur="1" fill="hold">
+                                          <p:stCondLst>
+                                            <p:cond delay="0"/>
+                                          </p:stCondLst>
+                                        </p:cTn>
+                                        <p:tgtEl>
+                                          <p:spTgt spid="3"/>
+                                        </p:tgtEl>
+                                        <p:attrNameLst>
+                                          <p:attrName>style.visibility</p:attrName>
+                                        </p:attrNameLst>
+                                      </p:cBhvr>
+                                      <p:to>
+                                        <p:strVal val="visible"/>
+                                      </p:to>
+                                    </p:set>
+                                  </p:childTnLst>
+                                </p:cTn>
+                              </p:par>
+                            </p:childTnLst>
+                          </p:cTn>
+                        </p:par>
+                      </p:childTnLst>
+                    </p:cTn>
+                  </p:par>
+                  <p:par>
+                    <p:cTn id="11" fill="hold">
+                      <p:stCondLst>
+                        <p:cond delay="indefinite"/>
+                      </p:stCondLst>
+                      <p:childTnLst>
+                        <p:par>
+                          <p:cTn id="12" fill="hold">
+                            <p:stCondLst>
+                              <p:cond delay="0"/>
+                            </p:stCondLst>
+                            <p:childTnLst>
+                              <p:par>
+                                <p:cTn id="13" presetID="1" presetClass="entr" presetSubtype="0" fill="hold" grpId="0" nodeType="clickEffect">
+                                  <p:stCondLst>
+                                    <p:cond delay="0"/>
+                                  </p:stCondLst>
+                                  <p:childTnLst>
+                                    <p:set>
+                                      <p:cBhvr>
+                                        <p:cTn id="14" dur="1" fill="hold">
+                                          <p:stCondLst>
+                                            <p:cond delay="0"/>
+                                          </p:stCondLst>
+                                        </p:cTn>
+                                        <p:tgtEl>
+                                          <p:spTgt spid="16"/>
+                                        </p:tgtEl>
+                                        <p:attrNameLst>
+                                          <p:attrName>style.visibility</p:attrName>
+                                        </p:attrNameLst>
+                                      </p:cBhvr>
+                                      <p:to>
+                                        <p:strVal val="visible"/>
+                                      </p:to>
+                                    </p:set>
+                                  </p:childTnLst>
+                                </p:cTn>
+                              </p:par>
+                              <p:par>
+                                <p:cTn id="15" presetID="1" presetClass="entr" presetSubtype="0" fill="hold" grpId="0" nodeType="withEffect">
+                                  <p:stCondLst>
+                                    <p:cond delay="0"/>
+                                  </p:stCondLst>
+                                  <p:childTnLst>
+                                    <p:set>
+                                      <p:cBhvr>
+                                        <p:cTn id="16" dur="1" fill="hold">
+                                          <p:stCondLst>
+                                            <p:cond delay="0"/>
+                                          </p:stCondLst>
+                                        </p:cTn>
+                                        <p:tgtEl>
+                                          <p:spTgt spid="20"/>
+                                        </p:tgtEl>
+                                        <p:attrNameLst>
+                                          <p:attrName>style.visibility</p:attrName>
+                                        </p:attrNameLst>
+                                      </p:cBhvr>
+                                      <p:to>
+                                        <p:strVal val="visible"/>
+                                      </p:to>
+                                    </p:set>
+                                  </p:childTnLst>
+                                </p:cTn>
+                              </p:par>
+                              <p:par>
+                                <p:cTn id="17" presetID="1" presetClass="entr" presetSubtype="0" fill="hold" nodeType="withEffect">
+                                  <p:stCondLst>
+                                    <p:cond delay="0"/>
+                                  </p:stCondLst>
+                                  <p:childTnLst>
+                                    <p:set>
+                                      <p:cBhvr>
+                                        <p:cTn id="18" dur="1" fill="hold">
+                                          <p:stCondLst>
+                                            <p:cond delay="0"/>
+                                          </p:stCondLst>
+                                        </p:cTn>
+                                        <p:tgtEl>
+                                          <p:spTgt spid="5"/>
+                                        </p:tgtEl>
+                                        <p:attrNameLst>
+                                          <p:attrName>style.visibility</p:attrName>
+                                        </p:attrNameLst>
+                                      </p:cBhvr>
+                                      <p:to>
+                                        <p:strVal val="visible"/>
+                                      </p:to>
+                                    </p:set>
+                                  </p:childTnLst>
+                                </p:cTn>
+                              </p:par>
+                            </p:childTnLst>
+                          </p:cTn>
+                        </p:par>
+                      </p:childTnLst>
+                    </p:cTn>
+                  </p:par>
+                  <p:par>
+                    <p:cTn id="19" fill="hold">
+                      <p:stCondLst>
+                        <p:cond delay="indefinite"/>
+                      </p:stCondLst>
+                      <p:childTnLst>
+                        <p:par>
+                          <p:cTn id="20" fill="hold">
+                            <p:stCondLst>
+                              <p:cond delay="0"/>
+                            </p:stCondLst>
+                            <p:childTnLst>
+                              <p:par>
+                                <p:cTn id="21" presetID="1" presetClass="entr" presetSubtype="0" fill="hold" grpId="0" nodeType="clickEffect">
+                                  <p:stCondLst>
+                                    <p:cond delay="0"/>
+                                  </p:stCondLst>
+                                  <p:childTnLst>
+                                    <p:set>
+                                      <p:cBhvr>
+                                        <p:cTn id="22" dur="1" fill="hold">
+                                          <p:stCondLst>
+                                            <p:cond delay="0"/>
+                                          </p:stCondLst>
+                                        </p:cTn>
+                                        <p:tgtEl>
+                                          <p:spTgt spid="11"/>
+                                        </p:tgtEl>
+                                        <p:attrNameLst>
+                                          <p:attrName>style.visibility</p:attrName>
+                                        </p:attrNameLst>
+                                      </p:cBhvr>
+                                      <p:to>
+                                        <p:strVal val="visible"/>
+                                      </p:to>
+                                    </p:set>
+                                  </p:childTnLst>
+                                </p:cTn>
+                              </p:par>
+                            </p:childTnLst>
+                          </p:cTn>
+                        </p:par>
+                      </p:childTnLst>
+                    </p:cTn>
+                  </p:par>
+                </p:childTnLst>
+              </p:cTn>
+              <p:prevCondLst>
+                <p:cond evt="onPrev" delay="0">
+                  <p:tgtEl>
+                    <p:sldTgt/>
+                  </p:tgtEl>
+                </p:cond>
+              </p:prevCondLst>
+              <p:nextCondLst>
+                <p:cond evt="onNext" delay="0">
+                  <p:tgtEl>
+                    <p:sldTgt/>
+                  </p:tgtEl>
+                </p:cond>
+              </p:nextCondLst>
+            </p:seq>
+          </p:childTnLst>
+        </p:cTn>
+      </p:par>
+    </p:tnLst>
+    <p:bldLst>
+      <p:bldP spid="11" grpId="0"/>
+      <p:bldP spid="10" grpId="0"/>
+      <p:bldP spid="17" grpId="0"/>
+      <p:bldP spid="16" grpId="0"/>
+      <p:bldP spid="20" grpId="0"/>
+    </p:bldLst>
+  </p:timing>
+</p:sld>
+</file>
+
+<file path=ppt/slides/slide7.xml><?xml version="1.0" encoding="utf-8"?>
+<p:sld xmlns:a="http://schemas.openxmlformats.org/drawingml/2006/main" xmlns:r="http://schemas.openxmlformats.org/officeDocument/2006/relationships" xmlns:p="http://schemas.openxmlformats.org/presentationml/2006/main">
+  <p:cSld>
+    <p:spTree>
+      <p:nvGrpSpPr>
+        <p:cNvPr id="1" name=""/>
+        <p:cNvGrpSpPr/>
+        <p:nvPr/>
+      </p:nvGrpSpPr>
+      <p:grpSpPr>
+        <a:xfrm>
+          <a:off x="0" y="0"/>
+          <a:ext cx="0" cy="0"/>
+          <a:chOff x="0" y="0"/>
+          <a:chExt cx="0" cy="0"/>
+        </a:xfrm>
+      </p:grpSpPr>
+      <p:sp>
+        <p:nvSpPr>
+          <p:cNvPr id="2" name="Заголовок 1"/>
+          <p:cNvSpPr>
+            <a:spLocks noGrp="1"/>
+          </p:cNvSpPr>
+          <p:nvPr>
+            <p:ph type="title"/>
+          </p:nvPr>
+        </p:nvSpPr>
+        <p:spPr>
+          <a:xfrm>
+            <a:off x="1991544" y="17287"/>
+            <a:ext cx="7920880" cy="827739"/>
+          </a:xfrm>
+        </p:spPr>
+        <p:txBody>
+          <a:bodyPr>
+            <a:normAutofit/>
+          </a:bodyPr>
+          <a:lstStyle/>
+          <a:p>
+            <a:r>
+              <a:rPr lang="ru-RU" sz="3200" b="1" dirty="0" smtClean="0">
+                <a:solidFill>
+                  <a:schemeClr val="bg1"/>
+                </a:solidFill>
+                <a:latin typeface="Verdana" panose="020B0604030504040204" pitchFamily="34" charset="0"/>
+                <a:ea typeface="Verdana" panose="020B0604030504040204" pitchFamily="34" charset="0"/>
+              </a:rPr>
+              <a:t>Примеры ВКР</a:t>
+            </a:r>
+            <a:endParaRPr lang="ru-RU" sz="3200" b="1" dirty="0">
+              <a:solidFill>
+                <a:schemeClr val="bg1"/>
+              </a:solidFill>
+              <a:latin typeface="Verdana" panose="020B0604030504040204" pitchFamily="34" charset="0"/>
+              <a:ea typeface="Verdana" panose="020B0604030504040204" pitchFamily="34" charset="0"/>
+            </a:endParaRPr>
+          </a:p>
+        </p:txBody>
+      </p:sp>
+      <p:sp>
+        <p:nvSpPr>
+          <p:cNvPr id="8" name="Номер слайда 7"/>
+          <p:cNvSpPr>
+            <a:spLocks noGrp="1"/>
+          </p:cNvSpPr>
+          <p:nvPr>
+            <p:ph type="sldNum" idx="4294967295"/>
+          </p:nvPr>
+        </p:nvSpPr>
+        <p:spPr>
+          <a:xfrm>
+            <a:off x="11235591" y="6475125"/>
+            <a:ext cx="956409" cy="382875"/>
+          </a:xfrm>
+          <a:prstGeom prst="rect">
+            <a:avLst/>
+          </a:prstGeom>
+        </p:spPr>
+        <p:txBody>
+          <a:bodyPr/>
+          <a:lstStyle/>
+          <a:p>
+            <a:fld id="{3CD50FA3-7693-4AD1-9E83-82DEDF06D4CE}" type="slidenum">
+              <a:rPr lang="ru-RU" sz="2400" spc="-1">
+                <a:solidFill>
+                  <a:schemeClr val="bg1"/>
+                </a:solidFill>
+                <a:latin typeface="Verdana" panose="020B0604030504040204" pitchFamily="34" charset="0"/>
+                <a:ea typeface="Verdana" panose="020B0604030504040204" pitchFamily="34" charset="0"/>
+              </a:rPr>
+              <a:pPr/>
+              <a:t>7</a:t>
+            </a:fld>
+            <a:endParaRPr lang="ru-RU" sz="2400" spc="-1" dirty="0">
+              <a:solidFill>
+                <a:schemeClr val="bg1"/>
+              </a:solidFill>
+              <a:latin typeface="Verdana" panose="020B0604030504040204" pitchFamily="34" charset="0"/>
+              <a:ea typeface="Verdana" panose="020B0604030504040204" pitchFamily="34" charset="0"/>
+            </a:endParaRPr>
+          </a:p>
+        </p:txBody>
+      </p:sp>
+      <p:pic>
+        <p:nvPicPr>
+          <p:cNvPr id="14" name="Picture 2"/>
+          <p:cNvPicPr>
+            <a:picLocks noChangeAspect="1" noChangeArrowheads="1"/>
+          </p:cNvPicPr>
+          <p:nvPr/>
+        </p:nvPicPr>
+        <p:blipFill>
+          <a:blip r:embed="rId3" cstate="print">
+            <a:extLst>
+              <a:ext uri="{28A0092B-C50C-407E-A947-70E740481C1C}">
+                <a14:useLocalDpi xmlns:a14="http://schemas.microsoft.com/office/drawing/2010/main" val="0"/>
+              </a:ext>
+            </a:extLst>
+          </a:blip>
+          <a:srcRect/>
+          <a:stretch>
+            <a:fillRect/>
+          </a:stretch>
+        </p:blipFill>
+        <p:spPr bwMode="auto">
+          <a:xfrm>
+            <a:off x="0" y="0"/>
+            <a:ext cx="1769838" cy="1121419"/>
+          </a:xfrm>
+          <a:prstGeom prst="rect">
+            <a:avLst/>
+          </a:prstGeom>
+          <a:noFill/>
+          <a:ln>
+            <a:noFill/>
+          </a:ln>
+          <a:extLst>
+            <a:ext uri="{909E8E84-426E-40DD-AFC4-6F175D3DCCD1}">
+              <a14:hiddenFill xmlns:a14="http://schemas.microsoft.com/office/drawing/2010/main">
+                <a:solidFill>
+                  <a:schemeClr val="accent1"/>
+                </a:solidFill>
+              </a14:hiddenFill>
+            </a:ext>
+            <a:ext uri="{91240B29-F687-4F45-9708-019B960494DF}">
+              <a14:hiddenLine xmlns:a14="http://schemas.microsoft.com/office/drawing/2010/main" w="9525">
+                <a:solidFill>
+                  <a:schemeClr val="tx1"/>
+                </a:solidFill>
+                <a:miter lim="800000"/>
+                <a:headEnd/>
+                <a:tailEnd/>
+              </a14:hiddenLine>
+            </a:ext>
+          </a:extLst>
+        </p:spPr>
+      </p:pic>
+      <p:cxnSp>
+        <p:nvCxnSpPr>
+          <p:cNvPr id="15" name="Прямая соединительная линия 14"/>
+          <p:cNvCxnSpPr>
+            <a:cxnSpLocks/>
+          </p:cNvCxnSpPr>
+          <p:nvPr/>
+        </p:nvCxnSpPr>
+        <p:spPr>
+          <a:xfrm>
+            <a:off x="0" y="884681"/>
+            <a:ext cx="12192000" cy="21704"/>
+          </a:xfrm>
+          <a:prstGeom prst="line">
+            <a:avLst/>
+          </a:prstGeom>
+          <a:ln w="28575">
+            <a:solidFill>
+              <a:schemeClr val="bg1">
+                <a:lumMod val="95000"/>
+              </a:schemeClr>
+            </a:solidFill>
+          </a:ln>
+        </p:spPr>
+        <p:style>
+          <a:lnRef idx="1">
+            <a:schemeClr val="accent3"/>
+          </a:lnRef>
+          <a:fillRef idx="0">
+            <a:schemeClr val="accent3"/>
+          </a:fillRef>
+          <a:effectRef idx="0">
+            <a:schemeClr val="accent3"/>
+          </a:effectRef>
+          <a:fontRef idx="minor">
+            <a:schemeClr val="tx1"/>
+          </a:fontRef>
+        </p:style>
+      </p:cxnSp>
+      <p:sp>
+        <p:nvSpPr>
+          <p:cNvPr id="11" name="Прямоугольник 10">
             <a:extLst>
               <a:ext uri="{FF2B5EF4-FFF2-40B4-BE49-F238E27FC236}">
-                <a16:creationId xmlns:a16="http://schemas.microsoft.com/office/drawing/2014/main" id="{E2D0E585-D80C-48E0-BC6B-5B252805AB17}"/>
+                <a16:creationId xmlns:a16="http://schemas.microsoft.com/office/drawing/2014/main" id="{63A165CA-3B0E-4C5E-B52D-E957B7A1BAD0}"/>
               </a:ext>
             </a:extLst>
           </p:cNvPr>
+          <p:cNvSpPr/>
+          <p:nvPr/>
+        </p:nvSpPr>
+        <p:spPr>
+          <a:xfrm>
+            <a:off x="11556540" y="138599"/>
+            <a:ext cx="314510" cy="523220"/>
+          </a:xfrm>
+          <a:prstGeom prst="rect">
+            <a:avLst/>
+          </a:prstGeom>
+        </p:spPr>
+        <p:txBody>
+          <a:bodyPr wrap="none">
+            <a:spAutoFit/>
+          </a:bodyPr>
+          <a:lstStyle/>
+          <a:p>
+            <a:r>
+              <a:rPr lang="en-US" sz="2800" dirty="0">
+                <a:solidFill>
+                  <a:schemeClr val="bg1"/>
+                </a:solidFill>
+                <a:latin typeface="Verdana" panose="020B0604030504040204" pitchFamily="34" charset="0"/>
+                <a:ea typeface="Verdana" panose="020B0604030504040204" pitchFamily="34" charset="0"/>
+              </a:rPr>
+              <a:t>.</a:t>
+            </a:r>
+            <a:endParaRPr lang="ru-RU" sz="2800" dirty="0">
+              <a:solidFill>
+                <a:schemeClr val="bg1"/>
+              </a:solidFill>
+              <a:latin typeface="Verdana" panose="020B0604030504040204" pitchFamily="34" charset="0"/>
+              <a:ea typeface="Verdana" panose="020B0604030504040204" pitchFamily="34" charset="0"/>
+            </a:endParaRPr>
+          </a:p>
+        </p:txBody>
+      </p:sp>
+      <p:sp>
+        <p:nvSpPr>
+          <p:cNvPr id="21" name="Прямоугольник 20"/>
+          <p:cNvSpPr/>
+          <p:nvPr/>
+        </p:nvSpPr>
+        <p:spPr>
+          <a:xfrm>
+            <a:off x="263352" y="908720"/>
+            <a:ext cx="8437588" cy="1323439"/>
+          </a:xfrm>
+          <a:prstGeom prst="rect">
+            <a:avLst/>
+          </a:prstGeom>
+        </p:spPr>
+        <p:txBody>
+          <a:bodyPr wrap="square">
+            <a:spAutoFit/>
+          </a:bodyPr>
+          <a:lstStyle/>
+          <a:p>
+            <a:r>
+              <a:rPr lang="ru-RU" sz="1600" dirty="0">
+                <a:solidFill>
+                  <a:schemeClr val="bg1"/>
+                </a:solidFill>
+              </a:rPr>
+              <a:t>Разработка антивирусного решения на основе нейронных сетей : магистерская диссертация / А. А. </a:t>
+            </a:r>
+            <a:r>
+              <a:rPr lang="ru-RU" sz="1600" dirty="0" err="1">
+                <a:solidFill>
+                  <a:schemeClr val="bg1"/>
+                </a:solidFill>
+              </a:rPr>
+              <a:t>Калиберда</a:t>
+            </a:r>
+            <a:r>
+              <a:rPr lang="ru-RU" sz="1600" dirty="0">
+                <a:solidFill>
+                  <a:schemeClr val="bg1"/>
+                </a:solidFill>
+              </a:rPr>
+              <a:t> ; Уральский федеральный университет имени первого Президента России Б. Н. Ельцина, Институт радиоэлектроники и информационных технологий-РТФ, Кафедра информационных технологий и систем управления. — Екатеринбург, 2024. — 52 с. — </a:t>
+            </a:r>
+            <a:r>
+              <a:rPr lang="ru-RU" sz="1600" dirty="0" err="1">
+                <a:solidFill>
+                  <a:schemeClr val="bg1"/>
+                </a:solidFill>
+              </a:rPr>
+              <a:t>Библиогр</a:t>
+            </a:r>
+            <a:r>
+              <a:rPr lang="ru-RU" sz="1600" dirty="0">
+                <a:solidFill>
+                  <a:schemeClr val="bg1"/>
+                </a:solidFill>
+              </a:rPr>
+              <a:t>.: с. 45-50 (60 назв</a:t>
+            </a:r>
+            <a:r>
+              <a:rPr lang="ru-RU" sz="1600" dirty="0" smtClean="0">
+                <a:solidFill>
+                  <a:schemeClr val="bg1"/>
+                </a:solidFill>
+              </a:rPr>
+              <a:t>.).</a:t>
+            </a:r>
+            <a:r>
+              <a:rPr lang="en-US" sz="1600" dirty="0" smtClean="0">
+                <a:solidFill>
+                  <a:schemeClr val="bg1"/>
+                </a:solidFill>
+              </a:rPr>
+              <a:t> </a:t>
+            </a:r>
+            <a:r>
+              <a:rPr lang="ru-RU" sz="1600" dirty="0" smtClean="0">
+                <a:solidFill>
+                  <a:schemeClr val="bg1"/>
+                </a:solidFill>
+              </a:rPr>
+              <a:t>https</a:t>
+            </a:r>
+            <a:r>
+              <a:rPr lang="ru-RU" sz="1600" dirty="0">
+                <a:solidFill>
+                  <a:schemeClr val="bg1"/>
+                </a:solidFill>
+              </a:rPr>
+              <a:t>://elar.urfu.ru/handle/10995/140331</a:t>
+            </a:r>
+          </a:p>
+        </p:txBody>
+      </p:sp>
+      <p:sp>
+        <p:nvSpPr>
+          <p:cNvPr id="22" name="Прямоугольник 21"/>
+          <p:cNvSpPr/>
+          <p:nvPr/>
+        </p:nvSpPr>
+        <p:spPr>
+          <a:xfrm>
+            <a:off x="263352" y="2420888"/>
+            <a:ext cx="8509596" cy="1569660"/>
+          </a:xfrm>
+          <a:prstGeom prst="rect">
+            <a:avLst/>
+          </a:prstGeom>
+        </p:spPr>
+        <p:txBody>
+          <a:bodyPr wrap="square">
+            <a:spAutoFit/>
+          </a:bodyPr>
+          <a:lstStyle/>
+          <a:p>
+            <a:r>
+              <a:rPr lang="ru-RU" sz="1600" dirty="0">
+                <a:solidFill>
+                  <a:schemeClr val="bg1"/>
+                </a:solidFill>
+              </a:rPr>
+              <a:t>Разработка инструмента для автоматического выявления уязвимостей в исходном коде на основе глубоких нейронных сетей : магистерская диссертация / З. Р. </a:t>
+            </a:r>
+            <a:r>
+              <a:rPr lang="ru-RU" sz="1600" dirty="0" err="1">
+                <a:solidFill>
+                  <a:schemeClr val="bg1"/>
+                </a:solidFill>
+              </a:rPr>
+              <a:t>Русинова</a:t>
+            </a:r>
+            <a:r>
+              <a:rPr lang="ru-RU" sz="1600" dirty="0">
+                <a:solidFill>
+                  <a:schemeClr val="bg1"/>
+                </a:solidFill>
+              </a:rPr>
+              <a:t> ; Уральский федеральный университет имени первого Президента России Б. Н. Ельцина, Институт радиоэлектроники и информационных технологий-РТФ, Кафедра информационных технологий и систем управления. — Екатеринбург, 2024. — 81 с. — </a:t>
+            </a:r>
+            <a:r>
+              <a:rPr lang="ru-RU" sz="1600" dirty="0" err="1">
+                <a:solidFill>
+                  <a:schemeClr val="bg1"/>
+                </a:solidFill>
+              </a:rPr>
+              <a:t>Библиогр</a:t>
+            </a:r>
+            <a:r>
+              <a:rPr lang="ru-RU" sz="1600" dirty="0">
+                <a:solidFill>
+                  <a:schemeClr val="bg1"/>
+                </a:solidFill>
+              </a:rPr>
+              <a:t>.: с. 74-81 (59 назв</a:t>
+            </a:r>
+            <a:r>
+              <a:rPr lang="ru-RU" sz="1600" dirty="0" smtClean="0">
+                <a:solidFill>
+                  <a:schemeClr val="bg1"/>
+                </a:solidFill>
+              </a:rPr>
+              <a:t>.). https</a:t>
+            </a:r>
+            <a:r>
+              <a:rPr lang="ru-RU" sz="1600" dirty="0">
+                <a:solidFill>
+                  <a:schemeClr val="bg1"/>
+                </a:solidFill>
+              </a:rPr>
+              <a:t>://elar.urfu.ru/handle/10995/140355</a:t>
+            </a:r>
+          </a:p>
+        </p:txBody>
+      </p:sp>
+      <p:sp>
+        <p:nvSpPr>
+          <p:cNvPr id="26" name="Прямоугольник 25"/>
+          <p:cNvSpPr/>
+          <p:nvPr/>
+        </p:nvSpPr>
+        <p:spPr>
+          <a:xfrm>
+            <a:off x="191344" y="4005064"/>
+            <a:ext cx="8352928" cy="1323439"/>
+          </a:xfrm>
+          <a:prstGeom prst="rect">
+            <a:avLst/>
+          </a:prstGeom>
+        </p:spPr>
+        <p:txBody>
+          <a:bodyPr wrap="square">
+            <a:spAutoFit/>
+          </a:bodyPr>
+          <a:lstStyle/>
+          <a:p>
+            <a:r>
+              <a:rPr lang="ru-RU" sz="1600" dirty="0" smtClean="0">
+                <a:solidFill>
+                  <a:schemeClr val="bg1"/>
+                </a:solidFill>
+              </a:rPr>
+              <a:t>Сравнение </a:t>
+            </a:r>
+            <a:r>
+              <a:rPr lang="ru-RU" sz="1600" dirty="0">
+                <a:solidFill>
+                  <a:schemeClr val="bg1"/>
+                </a:solidFill>
+              </a:rPr>
+              <a:t>реализаций </a:t>
+            </a:r>
+            <a:r>
+              <a:rPr lang="ru-RU" sz="1600" dirty="0" err="1">
+                <a:solidFill>
+                  <a:schemeClr val="bg1"/>
+                </a:solidFill>
+              </a:rPr>
+              <a:t>бустинг</a:t>
+            </a:r>
+            <a:r>
+              <a:rPr lang="ru-RU" sz="1600" dirty="0">
+                <a:solidFill>
+                  <a:schemeClr val="bg1"/>
+                </a:solidFill>
+              </a:rPr>
+              <a:t> моделей на различных данных : магистерская диссертация / В. И. Онуфриенко ; Уральский федеральный университет имени первого Президента России Б. Н. Ельцина, Институт радиоэлектроники и информационных технологий-РТФ, Кафедра информационных технологий и систем управления. — Екатеринбург, 2024. — 119 с. — </a:t>
+            </a:r>
+            <a:r>
+              <a:rPr lang="ru-RU" sz="1600" dirty="0" err="1">
+                <a:solidFill>
+                  <a:schemeClr val="bg1"/>
+                </a:solidFill>
+              </a:rPr>
+              <a:t>Библиогр</a:t>
+            </a:r>
+            <a:r>
+              <a:rPr lang="ru-RU" sz="1600" dirty="0">
+                <a:solidFill>
+                  <a:schemeClr val="bg1"/>
+                </a:solidFill>
+              </a:rPr>
+              <a:t>.: с. 117-119 (25 назв</a:t>
+            </a:r>
+            <a:r>
+              <a:rPr lang="ru-RU" sz="1600" dirty="0" smtClean="0">
+                <a:solidFill>
+                  <a:schemeClr val="bg1"/>
+                </a:solidFill>
+              </a:rPr>
+              <a:t>.). https</a:t>
+            </a:r>
+            <a:r>
+              <a:rPr lang="ru-RU" sz="1600" dirty="0">
+                <a:solidFill>
+                  <a:schemeClr val="bg1"/>
+                </a:solidFill>
+              </a:rPr>
+              <a:t>://</a:t>
+            </a:r>
+            <a:r>
+              <a:rPr lang="ru-RU" sz="1600" dirty="0" smtClean="0">
+                <a:solidFill>
+                  <a:schemeClr val="bg1"/>
+                </a:solidFill>
+              </a:rPr>
+              <a:t>elar.urfu.ru/handle/10995/140528</a:t>
+            </a:r>
+            <a:endParaRPr lang="ru-RU" sz="1600" dirty="0">
+              <a:solidFill>
+                <a:schemeClr val="bg1"/>
+              </a:solidFill>
+            </a:endParaRPr>
+          </a:p>
+        </p:txBody>
+      </p:sp>
+      <p:pic>
+        <p:nvPicPr>
+          <p:cNvPr id="3" name="Рисунок 2"/>
           <p:cNvPicPr>
             <a:picLocks noChangeAspect="1"/>
           </p:cNvPicPr>
@@ -30968,8 +32670,8 @@
         </p:blipFill>
         <p:spPr>
           <a:xfrm>
-            <a:off x="9876469" y="4020787"/>
-            <a:ext cx="2106731" cy="2106731"/>
+            <a:off x="9336360" y="980728"/>
+            <a:ext cx="2295525" cy="1976437"/>
           </a:xfrm>
           <a:prstGeom prst="rect">
             <a:avLst/>
@@ -30978,13 +32680,7 @@
       </p:pic>
       <p:pic>
         <p:nvPicPr>
-          <p:cNvPr id="13" name="Рисунок 12">
-            <a:extLst>
-              <a:ext uri="{FF2B5EF4-FFF2-40B4-BE49-F238E27FC236}">
-                <a16:creationId xmlns:a16="http://schemas.microsoft.com/office/drawing/2014/main" id="{AE0F0C7C-6CEE-4492-B0A3-6A0137426E17}"/>
-              </a:ext>
-            </a:extLst>
-          </p:cNvPr>
+          <p:cNvPr id="4" name="Рисунок 3"/>
           <p:cNvPicPr>
             <a:picLocks noChangeAspect="1"/>
           </p:cNvPicPr>
@@ -30998,246 +32694,65 @@
         </p:blipFill>
         <p:spPr>
           <a:xfrm>
-            <a:off x="9962630" y="1573035"/>
-            <a:ext cx="1755140" cy="1755140"/>
+            <a:off x="335360" y="5373216"/>
+            <a:ext cx="4158098" cy="1342171"/>
           </a:xfrm>
           <a:prstGeom prst="rect">
             <a:avLst/>
           </a:prstGeom>
         </p:spPr>
       </p:pic>
-      <p:sp>
-        <p:nvSpPr>
-          <p:cNvPr id="16" name="TextBox 15">
-            <a:extLst>
-              <a:ext uri="{FF2B5EF4-FFF2-40B4-BE49-F238E27FC236}">
-                <a16:creationId xmlns:a16="http://schemas.microsoft.com/office/drawing/2014/main" id="{9D2038D1-A9E6-4BEA-8826-8951C5A7A57D}"/>
-              </a:ext>
-            </a:extLst>
-          </p:cNvPr>
-          <p:cNvSpPr txBox="1"/>
+      <p:pic>
+        <p:nvPicPr>
+          <p:cNvPr id="5" name="Рисунок 4"/>
+          <p:cNvPicPr>
+            <a:picLocks noChangeAspect="1"/>
+          </p:cNvPicPr>
           <p:nvPr/>
-        </p:nvSpPr>
+        </p:nvPicPr>
+        <p:blipFill rotWithShape="1">
+          <a:blip r:embed="rId6"/>
+          <a:srcRect r="943"/>
+          <a:stretch/>
+        </p:blipFill>
         <p:spPr>
           <a:xfrm>
-            <a:off x="470307" y="1468521"/>
-            <a:ext cx="7920880" cy="380104"/>
+            <a:off x="4655840" y="5373216"/>
+            <a:ext cx="4469306" cy="1346497"/>
           </a:xfrm>
           <a:prstGeom prst="rect">
             <a:avLst/>
           </a:prstGeom>
-          <a:noFill/>
         </p:spPr>
-        <p:txBody>
-          <a:bodyPr wrap="square">
-            <a:spAutoFit/>
-          </a:bodyPr>
-          <a:lstStyle/>
-          <a:p>
-            <a:r>
-              <a:rPr lang="en-US" b="1" dirty="0">
-                <a:solidFill>
-                  <a:schemeClr val="bg1"/>
-                </a:solidFill>
-                <a:latin typeface="Montserrat" panose="00000500000000000000" pitchFamily="2" charset="-52"/>
-              </a:rPr>
-              <a:t>Natural Language Processing with Disaster Tweets</a:t>
-            </a:r>
-          </a:p>
-        </p:txBody>
-      </p:sp>
-      <p:sp>
-        <p:nvSpPr>
-          <p:cNvPr id="20" name="TextBox 19">
-            <a:extLst>
-              <a:ext uri="{FF2B5EF4-FFF2-40B4-BE49-F238E27FC236}">
-                <a16:creationId xmlns:a16="http://schemas.microsoft.com/office/drawing/2014/main" id="{9ABD0D79-BFCE-4C99-A35A-05770C0AB631}"/>
-              </a:ext>
-            </a:extLst>
-          </p:cNvPr>
-          <p:cNvSpPr txBox="1"/>
+      </p:pic>
+      <p:pic>
+        <p:nvPicPr>
+          <p:cNvPr id="6" name="Рисунок 5"/>
+          <p:cNvPicPr>
+            <a:picLocks noChangeAspect="1"/>
+          </p:cNvPicPr>
           <p:nvPr/>
-        </p:nvSpPr>
+        </p:nvPicPr>
+        <p:blipFill>
+          <a:blip r:embed="rId7"/>
+          <a:stretch>
+            <a:fillRect/>
+          </a:stretch>
+        </p:blipFill>
         <p:spPr>
           <a:xfrm>
-            <a:off x="863259" y="1778846"/>
-            <a:ext cx="8879024" cy="1818959"/>
+            <a:off x="9137074" y="3284984"/>
+            <a:ext cx="3032527" cy="2346598"/>
           </a:xfrm>
           <a:prstGeom prst="rect">
             <a:avLst/>
           </a:prstGeom>
-          <a:noFill/>
         </p:spPr>
-        <p:txBody>
-          <a:bodyPr wrap="square">
-            <a:spAutoFit/>
-          </a:bodyPr>
-          <a:lstStyle/>
-          <a:p>
-            <a:pPr algn="just" fontAlgn="base"/>
-            <a:r>
-              <a:rPr lang="en-US" dirty="0">
-                <a:solidFill>
-                  <a:schemeClr val="bg1"/>
-                </a:solidFill>
-                <a:latin typeface="Montserrat" panose="00000500000000000000" pitchFamily="2" charset="-52"/>
-              </a:rPr>
-              <a:t>The </a:t>
-            </a:r>
-            <a:r>
-              <a:rPr lang="en-US" dirty="0" err="1">
-                <a:solidFill>
-                  <a:schemeClr val="bg1"/>
-                </a:solidFill>
-                <a:latin typeface="Montserrat" panose="00000500000000000000" pitchFamily="2" charset="-52"/>
-              </a:rPr>
-              <a:t>ubiquitousness</a:t>
-            </a:r>
-            <a:r>
-              <a:rPr lang="en-US" dirty="0">
-                <a:solidFill>
-                  <a:schemeClr val="bg1"/>
-                </a:solidFill>
-                <a:latin typeface="Montserrat" panose="00000500000000000000" pitchFamily="2" charset="-52"/>
-              </a:rPr>
-              <a:t> of smartphones enables people to announce an emergency they’re observing in real-time. Because of this, more agencies are interested in </a:t>
-            </a:r>
-            <a:r>
-              <a:rPr lang="en-US" dirty="0" err="1">
-                <a:solidFill>
-                  <a:schemeClr val="bg1"/>
-                </a:solidFill>
-                <a:latin typeface="Montserrat" panose="00000500000000000000" pitchFamily="2" charset="-52"/>
-              </a:rPr>
-              <a:t>programatically</a:t>
-            </a:r>
-            <a:r>
-              <a:rPr lang="en-US" dirty="0">
-                <a:solidFill>
-                  <a:schemeClr val="bg1"/>
-                </a:solidFill>
-                <a:latin typeface="Montserrat" panose="00000500000000000000" pitchFamily="2" charset="-52"/>
-              </a:rPr>
-              <a:t> monitoring Twitter (i.e. disaster relief organizations and news agencies).</a:t>
-            </a:r>
-          </a:p>
-          <a:p>
-            <a:pPr algn="just" fontAlgn="base"/>
-            <a:r>
-              <a:rPr lang="en-US" dirty="0">
-                <a:solidFill>
-                  <a:schemeClr val="bg1"/>
-                </a:solidFill>
-                <a:latin typeface="Montserrat" panose="00000500000000000000" pitchFamily="2" charset="-52"/>
-              </a:rPr>
-              <a:t>But, it’s not always clear whether a person’s words are actually announcing a disaster. </a:t>
-            </a:r>
-          </a:p>
-        </p:txBody>
-      </p:sp>
-      <p:sp>
-        <p:nvSpPr>
-          <p:cNvPr id="21" name="TextBox 20">
-            <a:extLst>
-              <a:ext uri="{FF2B5EF4-FFF2-40B4-BE49-F238E27FC236}">
-                <a16:creationId xmlns:a16="http://schemas.microsoft.com/office/drawing/2014/main" id="{EF644A3C-D459-43DF-8D1B-6EC597BDA859}"/>
-              </a:ext>
-            </a:extLst>
-          </p:cNvPr>
-          <p:cNvSpPr txBox="1"/>
-          <p:nvPr/>
-        </p:nvSpPr>
-        <p:spPr>
-          <a:xfrm>
-            <a:off x="908993" y="4261365"/>
-            <a:ext cx="8787407" cy="2106731"/>
-          </a:xfrm>
-          <a:prstGeom prst="rect">
-            <a:avLst/>
-          </a:prstGeom>
-          <a:noFill/>
-        </p:spPr>
-        <p:txBody>
-          <a:bodyPr wrap="square">
-            <a:spAutoFit/>
-          </a:bodyPr>
-          <a:lstStyle/>
-          <a:p>
-            <a:pPr algn="just"/>
-            <a:r>
-              <a:rPr lang="en-US" dirty="0">
-                <a:solidFill>
-                  <a:schemeClr val="bg1"/>
-                </a:solidFill>
-                <a:latin typeface="Montserrat" panose="00000500000000000000" pitchFamily="2" charset="-52"/>
-              </a:rPr>
-              <a:t>The data comes from Vesta's real-world e-commerce transactions and contains a wide range of features from device type to product features. You also have the opportunity to create new features to improve your results.</a:t>
-            </a:r>
-          </a:p>
-          <a:p>
-            <a:pPr algn="just"/>
-            <a:r>
-              <a:rPr lang="en-US" dirty="0">
-                <a:solidFill>
-                  <a:schemeClr val="bg1"/>
-                </a:solidFill>
-                <a:latin typeface="Montserrat" panose="00000500000000000000" pitchFamily="2" charset="-52"/>
-              </a:rPr>
-              <a:t>If successful, you’ll improve the efficacy of fraudulent transaction alerts for millions of people around the world, helping hundreds of thousands of businesses reduce their fraud loss and increase their revenue. </a:t>
-            </a:r>
-            <a:endParaRPr lang="ru-RU" dirty="0">
-              <a:solidFill>
-                <a:schemeClr val="bg1"/>
-              </a:solidFill>
-              <a:latin typeface="Montserrat" panose="00000500000000000000" pitchFamily="2" charset="-52"/>
-            </a:endParaRPr>
-          </a:p>
-        </p:txBody>
-      </p:sp>
-      <p:sp>
-        <p:nvSpPr>
-          <p:cNvPr id="22" name="TextBox 21">
-            <a:extLst>
-              <a:ext uri="{FF2B5EF4-FFF2-40B4-BE49-F238E27FC236}">
-                <a16:creationId xmlns:a16="http://schemas.microsoft.com/office/drawing/2014/main" id="{F57FB55F-3645-494D-A053-896A2F36ED91}"/>
-              </a:ext>
-            </a:extLst>
-          </p:cNvPr>
-          <p:cNvSpPr txBox="1"/>
-          <p:nvPr/>
-        </p:nvSpPr>
-        <p:spPr>
-          <a:xfrm>
-            <a:off x="460960" y="3950191"/>
-            <a:ext cx="7920880" cy="380104"/>
-          </a:xfrm>
-          <a:prstGeom prst="rect">
-            <a:avLst/>
-          </a:prstGeom>
-          <a:noFill/>
-        </p:spPr>
-        <p:txBody>
-          <a:bodyPr wrap="square">
-            <a:spAutoFit/>
-          </a:bodyPr>
-          <a:lstStyle/>
-          <a:p>
-            <a:r>
-              <a:rPr lang="en-US" b="1" dirty="0">
-                <a:solidFill>
-                  <a:schemeClr val="bg1"/>
-                </a:solidFill>
-                <a:latin typeface="Montserrat" panose="00000500000000000000" pitchFamily="2" charset="-52"/>
-              </a:rPr>
-              <a:t>IEEE-CIS Fraud Detection</a:t>
-            </a:r>
-          </a:p>
-        </p:txBody>
-      </p:sp>
+      </p:pic>
     </p:spTree>
     <p:extLst>
       <p:ext uri="{BB962C8B-B14F-4D97-AF65-F5344CB8AC3E}">
-        <p14:creationId xmlns:p14="http://schemas.microsoft.com/office/powerpoint/2010/main" val="3718420773"/>
+        <p14:creationId xmlns:p14="http://schemas.microsoft.com/office/powerpoint/2010/main" val="2318057788"/>
       </p:ext>
     </p:extLst>
   </p:cSld>
@@ -31247,14 +32762,331 @@
   <p:timing>
     <p:tnLst>
       <p:par>
-        <p:cTn id="1" dur="indefinite" restart="never" nodeType="tmRoot"/>
+        <p:cTn id="1" dur="indefinite" restart="never" nodeType="tmRoot">
+          <p:childTnLst>
+            <p:seq concurrent="1" nextAc="seek">
+              <p:cTn id="2" dur="indefinite" nodeType="mainSeq">
+                <p:childTnLst>
+                  <p:par>
+                    <p:cTn id="3" fill="hold">
+                      <p:stCondLst>
+                        <p:cond delay="indefinite"/>
+                      </p:stCondLst>
+                      <p:childTnLst>
+                        <p:par>
+                          <p:cTn id="4" fill="hold">
+                            <p:stCondLst>
+                              <p:cond delay="0"/>
+                            </p:stCondLst>
+                            <p:childTnLst>
+                              <p:par>
+                                <p:cTn id="5" presetID="1" presetClass="entr" presetSubtype="0" fill="hold" grpId="0" nodeType="clickEffect">
+                                  <p:stCondLst>
+                                    <p:cond delay="0"/>
+                                  </p:stCondLst>
+                                  <p:childTnLst>
+                                    <p:set>
+                                      <p:cBhvr>
+                                        <p:cTn id="6" dur="1" fill="hold">
+                                          <p:stCondLst>
+                                            <p:cond delay="0"/>
+                                          </p:stCondLst>
+                                        </p:cTn>
+                                        <p:tgtEl>
+                                          <p:spTgt spid="21"/>
+                                        </p:tgtEl>
+                                        <p:attrNameLst>
+                                          <p:attrName>style.visibility</p:attrName>
+                                        </p:attrNameLst>
+                                      </p:cBhvr>
+                                      <p:to>
+                                        <p:strVal val="visible"/>
+                                      </p:to>
+                                    </p:set>
+                                  </p:childTnLst>
+                                </p:cTn>
+                              </p:par>
+                              <p:par>
+                                <p:cTn id="7" presetID="1" presetClass="entr" presetSubtype="0" fill="hold" nodeType="withEffect">
+                                  <p:stCondLst>
+                                    <p:cond delay="0"/>
+                                  </p:stCondLst>
+                                  <p:childTnLst>
+                                    <p:set>
+                                      <p:cBhvr>
+                                        <p:cTn id="8" dur="1" fill="hold">
+                                          <p:stCondLst>
+                                            <p:cond delay="0"/>
+                                          </p:stCondLst>
+                                        </p:cTn>
+                                        <p:tgtEl>
+                                          <p:spTgt spid="3"/>
+                                        </p:tgtEl>
+                                        <p:attrNameLst>
+                                          <p:attrName>style.visibility</p:attrName>
+                                        </p:attrNameLst>
+                                      </p:cBhvr>
+                                      <p:to>
+                                        <p:strVal val="visible"/>
+                                      </p:to>
+                                    </p:set>
+                                  </p:childTnLst>
+                                </p:cTn>
+                              </p:par>
+                            </p:childTnLst>
+                          </p:cTn>
+                        </p:par>
+                      </p:childTnLst>
+                    </p:cTn>
+                  </p:par>
+                  <p:par>
+                    <p:cTn id="9" fill="hold">
+                      <p:stCondLst>
+                        <p:cond delay="indefinite"/>
+                      </p:stCondLst>
+                      <p:childTnLst>
+                        <p:par>
+                          <p:cTn id="10" fill="hold">
+                            <p:stCondLst>
+                              <p:cond delay="0"/>
+                            </p:stCondLst>
+                            <p:childTnLst>
+                              <p:par>
+                                <p:cTn id="11" presetID="1" presetClass="entr" presetSubtype="0" fill="hold" grpId="0" nodeType="clickEffect">
+                                  <p:stCondLst>
+                                    <p:cond delay="0"/>
+                                  </p:stCondLst>
+                                  <p:childTnLst>
+                                    <p:set>
+                                      <p:cBhvr>
+                                        <p:cTn id="12" dur="1" fill="hold">
+                                          <p:stCondLst>
+                                            <p:cond delay="0"/>
+                                          </p:stCondLst>
+                                        </p:cTn>
+                                        <p:tgtEl>
+                                          <p:spTgt spid="22"/>
+                                        </p:tgtEl>
+                                        <p:attrNameLst>
+                                          <p:attrName>style.visibility</p:attrName>
+                                        </p:attrNameLst>
+                                      </p:cBhvr>
+                                      <p:to>
+                                        <p:strVal val="visible"/>
+                                      </p:to>
+                                    </p:set>
+                                  </p:childTnLst>
+                                </p:cTn>
+                              </p:par>
+                              <p:par>
+                                <p:cTn id="13" presetID="1" presetClass="entr" presetSubtype="0" fill="hold" nodeType="withEffect">
+                                  <p:stCondLst>
+                                    <p:cond delay="0"/>
+                                  </p:stCondLst>
+                                  <p:childTnLst>
+                                    <p:set>
+                                      <p:cBhvr>
+                                        <p:cTn id="14" dur="1" fill="hold">
+                                          <p:stCondLst>
+                                            <p:cond delay="0"/>
+                                          </p:stCondLst>
+                                        </p:cTn>
+                                        <p:tgtEl>
+                                          <p:spTgt spid="6"/>
+                                        </p:tgtEl>
+                                        <p:attrNameLst>
+                                          <p:attrName>style.visibility</p:attrName>
+                                        </p:attrNameLst>
+                                      </p:cBhvr>
+                                      <p:to>
+                                        <p:strVal val="visible"/>
+                                      </p:to>
+                                    </p:set>
+                                  </p:childTnLst>
+                                </p:cTn>
+                              </p:par>
+                            </p:childTnLst>
+                          </p:cTn>
+                        </p:par>
+                      </p:childTnLst>
+                    </p:cTn>
+                  </p:par>
+                  <p:par>
+                    <p:cTn id="15" fill="hold">
+                      <p:stCondLst>
+                        <p:cond delay="indefinite"/>
+                      </p:stCondLst>
+                      <p:childTnLst>
+                        <p:par>
+                          <p:cTn id="16" fill="hold">
+                            <p:stCondLst>
+                              <p:cond delay="0"/>
+                            </p:stCondLst>
+                            <p:childTnLst>
+                              <p:par>
+                                <p:cTn id="17" presetID="1" presetClass="entr" presetSubtype="0" fill="hold" grpId="0" nodeType="clickEffect">
+                                  <p:stCondLst>
+                                    <p:cond delay="0"/>
+                                  </p:stCondLst>
+                                  <p:childTnLst>
+                                    <p:set>
+                                      <p:cBhvr>
+                                        <p:cTn id="18" dur="1" fill="hold">
+                                          <p:stCondLst>
+                                            <p:cond delay="0"/>
+                                          </p:stCondLst>
+                                        </p:cTn>
+                                        <p:tgtEl>
+                                          <p:spTgt spid="26"/>
+                                        </p:tgtEl>
+                                        <p:attrNameLst>
+                                          <p:attrName>style.visibility</p:attrName>
+                                        </p:attrNameLst>
+                                      </p:cBhvr>
+                                      <p:to>
+                                        <p:strVal val="visible"/>
+                                      </p:to>
+                                    </p:set>
+                                  </p:childTnLst>
+                                </p:cTn>
+                              </p:par>
+                            </p:childTnLst>
+                          </p:cTn>
+                        </p:par>
+                      </p:childTnLst>
+                    </p:cTn>
+                  </p:par>
+                  <p:par>
+                    <p:cTn id="19" fill="hold">
+                      <p:stCondLst>
+                        <p:cond delay="indefinite"/>
+                      </p:stCondLst>
+                      <p:childTnLst>
+                        <p:par>
+                          <p:cTn id="20" fill="hold">
+                            <p:stCondLst>
+                              <p:cond delay="0"/>
+                            </p:stCondLst>
+                            <p:childTnLst>
+                              <p:par>
+                                <p:cTn id="21" presetID="1" presetClass="entr" presetSubtype="0" fill="hold" grpId="0" nodeType="clickEffect">
+                                  <p:stCondLst>
+                                    <p:cond delay="0"/>
+                                  </p:stCondLst>
+                                  <p:childTnLst>
+                                    <p:set>
+                                      <p:cBhvr>
+                                        <p:cTn id="22" dur="1" fill="hold">
+                                          <p:stCondLst>
+                                            <p:cond delay="0"/>
+                                          </p:stCondLst>
+                                        </p:cTn>
+                                        <p:tgtEl>
+                                          <p:spTgt spid="11"/>
+                                        </p:tgtEl>
+                                        <p:attrNameLst>
+                                          <p:attrName>style.visibility</p:attrName>
+                                        </p:attrNameLst>
+                                      </p:cBhvr>
+                                      <p:to>
+                                        <p:strVal val="visible"/>
+                                      </p:to>
+                                    </p:set>
+                                  </p:childTnLst>
+                                </p:cTn>
+                              </p:par>
+                              <p:par>
+                                <p:cTn id="23" presetID="1" presetClass="entr" presetSubtype="0" fill="hold" nodeType="withEffect">
+                                  <p:stCondLst>
+                                    <p:cond delay="0"/>
+                                  </p:stCondLst>
+                                  <p:childTnLst>
+                                    <p:set>
+                                      <p:cBhvr>
+                                        <p:cTn id="24" dur="1" fill="hold">
+                                          <p:stCondLst>
+                                            <p:cond delay="0"/>
+                                          </p:stCondLst>
+                                        </p:cTn>
+                                        <p:tgtEl>
+                                          <p:spTgt spid="4"/>
+                                        </p:tgtEl>
+                                        <p:attrNameLst>
+                                          <p:attrName>style.visibility</p:attrName>
+                                        </p:attrNameLst>
+                                      </p:cBhvr>
+                                      <p:to>
+                                        <p:strVal val="visible"/>
+                                      </p:to>
+                                    </p:set>
+                                  </p:childTnLst>
+                                </p:cTn>
+                              </p:par>
+                              <p:par>
+                                <p:cTn id="25" presetID="1" presetClass="entr" presetSubtype="0" fill="hold" nodeType="withEffect">
+                                  <p:stCondLst>
+                                    <p:cond delay="0"/>
+                                  </p:stCondLst>
+                                  <p:childTnLst>
+                                    <p:set>
+                                      <p:cBhvr>
+                                        <p:cTn id="26" dur="1" fill="hold">
+                                          <p:stCondLst>
+                                            <p:cond delay="0"/>
+                                          </p:stCondLst>
+                                        </p:cTn>
+                                        <p:tgtEl>
+                                          <p:spTgt spid="5"/>
+                                        </p:tgtEl>
+                                        <p:attrNameLst>
+                                          <p:attrName>style.visibility</p:attrName>
+                                        </p:attrNameLst>
+                                      </p:cBhvr>
+                                      <p:to>
+                                        <p:strVal val="visible"/>
+                                      </p:to>
+                                    </p:set>
+                                  </p:childTnLst>
+                                </p:cTn>
+                              </p:par>
+                            </p:childTnLst>
+                          </p:cTn>
+                        </p:par>
+                      </p:childTnLst>
+                    </p:cTn>
+                  </p:par>
+                </p:childTnLst>
+              </p:cTn>
+              <p:prevCondLst>
+                <p:cond evt="onPrev" delay="0">
+                  <p:tgtEl>
+                    <p:sldTgt/>
+                  </p:tgtEl>
+                </p:cond>
+              </p:prevCondLst>
+              <p:nextCondLst>
+                <p:cond evt="onNext" delay="0">
+                  <p:tgtEl>
+                    <p:sldTgt/>
+                  </p:tgtEl>
+                </p:cond>
+              </p:nextCondLst>
+            </p:seq>
+          </p:childTnLst>
+        </p:cTn>
       </p:par>
     </p:tnLst>
+    <p:bldLst>
+      <p:bldP spid="11" grpId="0"/>
+      <p:bldP spid="21" grpId="0"/>
+      <p:bldP spid="22" grpId="0"/>
+      <p:bldP spid="26" grpId="0"/>
+    </p:bldLst>
   </p:timing>
 </p:sld>
 </file>
 
-<file path=ppt/slides/slide7.xml><?xml version="1.0" encoding="utf-8"?>
+<file path=ppt/slides/slide8.xml><?xml version="1.0" encoding="utf-8"?>
 <p:sld xmlns:a="http://schemas.openxmlformats.org/drawingml/2006/main" xmlns:r="http://schemas.openxmlformats.org/officeDocument/2006/relationships" xmlns:p="http://schemas.openxmlformats.org/presentationml/2006/main">
   <p:cSld>
     <p:spTree>
@@ -31303,7 +33135,7 @@
                 <a:ea typeface="Verdana" panose="020B0604030504040204" pitchFamily="34" charset="0"/>
               </a:rPr>
               <a:pPr/>
-              <a:t>7</a:t>
+              <a:t>8</a:t>
             </a:fld>
             <a:endParaRPr lang="ru-RU" sz="2400" spc="-1" dirty="0">
               <a:solidFill>
@@ -31560,7 +33392,7 @@
 </p:sld>
 </file>
 
-<file path=ppt/slides/slide8.xml><?xml version="1.0" encoding="utf-8"?>
+<file path=ppt/slides/slide9.xml><?xml version="1.0" encoding="utf-8"?>
 <p:sld xmlns:a="http://schemas.openxmlformats.org/drawingml/2006/main" xmlns:r="http://schemas.openxmlformats.org/officeDocument/2006/relationships" xmlns:p="http://schemas.openxmlformats.org/presentationml/2006/main">
   <p:cSld>
     <p:spTree>
@@ -31609,7 +33441,7 @@
                 <a:ea typeface="Verdana" panose="020B0604030504040204" pitchFamily="34" charset="0"/>
               </a:rPr>
               <a:pPr/>
-              <a:t>8</a:t>
+              <a:t>9</a:t>
             </a:fld>
             <a:endParaRPr lang="ru-RU" sz="2400" spc="-1" dirty="0">
               <a:solidFill>
@@ -32135,730 +33967,6 @@
       <p:bldP spid="21" grpId="0"/>
       <p:bldP spid="4" grpId="0"/>
       <p:bldP spid="5" grpId="0"/>
-    </p:bldLst>
-  </p:timing>
-</p:sld>
-</file>
-
-<file path=ppt/slides/slide9.xml><?xml version="1.0" encoding="utf-8"?>
-<p:sld xmlns:a="http://schemas.openxmlformats.org/drawingml/2006/main" xmlns:r="http://schemas.openxmlformats.org/officeDocument/2006/relationships" xmlns:p="http://schemas.openxmlformats.org/presentationml/2006/main">
-  <p:cSld>
-    <p:spTree>
-      <p:nvGrpSpPr>
-        <p:cNvPr id="1" name=""/>
-        <p:cNvGrpSpPr/>
-        <p:nvPr/>
-      </p:nvGrpSpPr>
-      <p:grpSpPr>
-        <a:xfrm>
-          <a:off x="0" y="0"/>
-          <a:ext cx="0" cy="0"/>
-          <a:chOff x="0" y="0"/>
-          <a:chExt cx="0" cy="0"/>
-        </a:xfrm>
-      </p:grpSpPr>
-      <p:sp>
-        <p:nvSpPr>
-          <p:cNvPr id="8" name="Номер слайда 7"/>
-          <p:cNvSpPr>
-            <a:spLocks noGrp="1"/>
-          </p:cNvSpPr>
-          <p:nvPr>
-            <p:ph type="sldNum" idx="4294967295"/>
-          </p:nvPr>
-        </p:nvSpPr>
-        <p:spPr>
-          <a:xfrm>
-            <a:off x="11235591" y="6475125"/>
-            <a:ext cx="956409" cy="382875"/>
-          </a:xfrm>
-          <a:prstGeom prst="rect">
-            <a:avLst/>
-          </a:prstGeom>
-        </p:spPr>
-        <p:txBody>
-          <a:bodyPr/>
-          <a:lstStyle/>
-          <a:p>
-            <a:fld id="{3CD50FA3-7693-4AD1-9E83-82DEDF06D4CE}" type="slidenum">
-              <a:rPr lang="ru-RU" sz="2400" spc="-1">
-                <a:solidFill>
-                  <a:schemeClr val="bg1"/>
-                </a:solidFill>
-                <a:latin typeface="Verdana" panose="020B0604030504040204" pitchFamily="34" charset="0"/>
-                <a:ea typeface="Verdana" panose="020B0604030504040204" pitchFamily="34" charset="0"/>
-              </a:rPr>
-              <a:pPr/>
-              <a:t>9</a:t>
-            </a:fld>
-            <a:endParaRPr lang="ru-RU" sz="2400" spc="-1" dirty="0">
-              <a:solidFill>
-                <a:schemeClr val="bg1"/>
-              </a:solidFill>
-              <a:latin typeface="Verdana" panose="020B0604030504040204" pitchFamily="34" charset="0"/>
-              <a:ea typeface="Verdana" panose="020B0604030504040204" pitchFamily="34" charset="0"/>
-            </a:endParaRPr>
-          </a:p>
-        </p:txBody>
-      </p:sp>
-      <p:pic>
-        <p:nvPicPr>
-          <p:cNvPr id="12" name="Picture 2"/>
-          <p:cNvPicPr>
-            <a:picLocks noChangeAspect="1" noChangeArrowheads="1"/>
-          </p:cNvPicPr>
-          <p:nvPr/>
-        </p:nvPicPr>
-        <p:blipFill>
-          <a:blip r:embed="rId3" cstate="print">
-            <a:extLst>
-              <a:ext uri="{28A0092B-C50C-407E-A947-70E740481C1C}">
-                <a14:useLocalDpi xmlns:a14="http://schemas.microsoft.com/office/drawing/2010/main" val="0"/>
-              </a:ext>
-            </a:extLst>
-          </a:blip>
-          <a:srcRect/>
-          <a:stretch>
-            <a:fillRect/>
-          </a:stretch>
-        </p:blipFill>
-        <p:spPr bwMode="auto">
-          <a:xfrm>
-            <a:off x="0" y="0"/>
-            <a:ext cx="1769838" cy="1121419"/>
-          </a:xfrm>
-          <a:prstGeom prst="rect">
-            <a:avLst/>
-          </a:prstGeom>
-          <a:noFill/>
-          <a:ln>
-            <a:noFill/>
-          </a:ln>
-          <a:extLst>
-            <a:ext uri="{909E8E84-426E-40DD-AFC4-6F175D3DCCD1}">
-              <a14:hiddenFill xmlns:a14="http://schemas.microsoft.com/office/drawing/2010/main">
-                <a:solidFill>
-                  <a:schemeClr val="accent1"/>
-                </a:solidFill>
-              </a14:hiddenFill>
-            </a:ext>
-            <a:ext uri="{91240B29-F687-4F45-9708-019B960494DF}">
-              <a14:hiddenLine xmlns:a14="http://schemas.microsoft.com/office/drawing/2010/main" w="9525">
-                <a:solidFill>
-                  <a:schemeClr val="tx1"/>
-                </a:solidFill>
-                <a:miter lim="800000"/>
-                <a:headEnd/>
-                <a:tailEnd/>
-              </a14:hiddenLine>
-            </a:ext>
-          </a:extLst>
-        </p:spPr>
-      </p:pic>
-      <p:cxnSp>
-        <p:nvCxnSpPr>
-          <p:cNvPr id="14" name="Прямая соединительная линия 13"/>
-          <p:cNvCxnSpPr>
-            <a:cxnSpLocks/>
-          </p:cNvCxnSpPr>
-          <p:nvPr/>
-        </p:nvCxnSpPr>
-        <p:spPr>
-          <a:xfrm>
-            <a:off x="0" y="884681"/>
-            <a:ext cx="12192000" cy="21704"/>
-          </a:xfrm>
-          <a:prstGeom prst="line">
-            <a:avLst/>
-          </a:prstGeom>
-          <a:ln w="28575">
-            <a:solidFill>
-              <a:schemeClr val="bg1">
-                <a:lumMod val="95000"/>
-              </a:schemeClr>
-            </a:solidFill>
-          </a:ln>
-        </p:spPr>
-        <p:style>
-          <a:lnRef idx="1">
-            <a:schemeClr val="accent3"/>
-          </a:lnRef>
-          <a:fillRef idx="0">
-            <a:schemeClr val="accent3"/>
-          </a:fillRef>
-          <a:effectRef idx="0">
-            <a:schemeClr val="accent3"/>
-          </a:effectRef>
-          <a:fontRef idx="minor">
-            <a:schemeClr val="tx1"/>
-          </a:fontRef>
-        </p:style>
-      </p:cxnSp>
-      <p:sp>
-        <p:nvSpPr>
-          <p:cNvPr id="21" name="Прямоугольник 20">
-            <a:extLst>
-              <a:ext uri="{FF2B5EF4-FFF2-40B4-BE49-F238E27FC236}">
-                <a16:creationId xmlns:a16="http://schemas.microsoft.com/office/drawing/2014/main" id="{07DA0CA1-74EB-40CF-9E51-E165A13A71BD}"/>
-              </a:ext>
-            </a:extLst>
-          </p:cNvPr>
-          <p:cNvSpPr/>
-          <p:nvPr/>
-        </p:nvSpPr>
-        <p:spPr>
-          <a:xfrm>
-            <a:off x="11556540" y="138599"/>
-            <a:ext cx="314510" cy="523220"/>
-          </a:xfrm>
-          <a:prstGeom prst="rect">
-            <a:avLst/>
-          </a:prstGeom>
-        </p:spPr>
-        <p:txBody>
-          <a:bodyPr wrap="none">
-            <a:spAutoFit/>
-          </a:bodyPr>
-          <a:lstStyle/>
-          <a:p>
-            <a:r>
-              <a:rPr lang="en-US" sz="2800" dirty="0">
-                <a:solidFill>
-                  <a:schemeClr val="bg1"/>
-                </a:solidFill>
-                <a:latin typeface="Verdana" panose="020B0604030504040204" pitchFamily="34" charset="0"/>
-                <a:ea typeface="Verdana" panose="020B0604030504040204" pitchFamily="34" charset="0"/>
-              </a:rPr>
-              <a:t>.</a:t>
-            </a:r>
-            <a:endParaRPr lang="ru-RU" sz="2800" dirty="0">
-              <a:solidFill>
-                <a:schemeClr val="bg1"/>
-              </a:solidFill>
-              <a:latin typeface="Verdana" panose="020B0604030504040204" pitchFamily="34" charset="0"/>
-              <a:ea typeface="Verdana" panose="020B0604030504040204" pitchFamily="34" charset="0"/>
-            </a:endParaRPr>
-          </a:p>
-        </p:txBody>
-      </p:sp>
-      <p:sp>
-        <p:nvSpPr>
-          <p:cNvPr id="11" name="Прямоугольник 10">
-            <a:extLst>
-              <a:ext uri="{FF2B5EF4-FFF2-40B4-BE49-F238E27FC236}">
-                <a16:creationId xmlns:a16="http://schemas.microsoft.com/office/drawing/2014/main" id="{9D8A01F7-D3FC-4FAD-8C8B-430469CDA6A6}"/>
-              </a:ext>
-            </a:extLst>
-          </p:cNvPr>
-          <p:cNvSpPr/>
-          <p:nvPr/>
-        </p:nvSpPr>
-        <p:spPr>
-          <a:xfrm>
-            <a:off x="0" y="1268760"/>
-            <a:ext cx="12072664" cy="1692771"/>
-          </a:xfrm>
-          <a:prstGeom prst="rect">
-            <a:avLst/>
-          </a:prstGeom>
-        </p:spPr>
-        <p:txBody>
-          <a:bodyPr wrap="square">
-            <a:spAutoFit/>
-          </a:bodyPr>
-          <a:lstStyle/>
-          <a:p>
-            <a:r>
-              <a:rPr lang="ru-RU" sz="2800" dirty="0">
-                <a:solidFill>
-                  <a:schemeClr val="bg1"/>
-                </a:solidFill>
-                <a:latin typeface="Verdana" panose="020B0604030504040204" pitchFamily="34" charset="0"/>
-                <a:ea typeface="Verdana" panose="020B0604030504040204" pitchFamily="34" charset="0"/>
-                <a:cs typeface="Verdana" panose="020B0604030504040204" pitchFamily="34" charset="0"/>
-              </a:rPr>
-              <a:t>Бинарная классификация </a:t>
-            </a:r>
-            <a:r>
-              <a:rPr lang="ru-RU" sz="2800" dirty="0" smtClean="0">
-                <a:solidFill>
-                  <a:schemeClr val="bg1"/>
-                </a:solidFill>
-                <a:latin typeface="Verdana" panose="020B0604030504040204" pitchFamily="34" charset="0"/>
-                <a:ea typeface="Verdana" panose="020B0604030504040204" pitchFamily="34" charset="0"/>
-                <a:cs typeface="Verdana" panose="020B0604030504040204" pitchFamily="34" charset="0"/>
-              </a:rPr>
-              <a:t>(</a:t>
-            </a:r>
-            <a:r>
-              <a:rPr lang="ru-RU" sz="2800" dirty="0" err="1" smtClean="0">
-                <a:solidFill>
-                  <a:schemeClr val="bg1"/>
-                </a:solidFill>
-                <a:latin typeface="Verdana" panose="020B0604030504040204" pitchFamily="34" charset="0"/>
-                <a:ea typeface="Verdana" panose="020B0604030504040204" pitchFamily="34" charset="0"/>
-                <a:cs typeface="Verdana" panose="020B0604030504040204" pitchFamily="34" charset="0"/>
-              </a:rPr>
-              <a:t>двухклассовая</a:t>
-            </a:r>
-            <a:r>
-              <a:rPr lang="ru-RU" sz="2800" dirty="0" smtClean="0">
-                <a:solidFill>
-                  <a:schemeClr val="bg1"/>
-                </a:solidFill>
-                <a:latin typeface="Verdana" panose="020B0604030504040204" pitchFamily="34" charset="0"/>
-                <a:ea typeface="Verdana" panose="020B0604030504040204" pitchFamily="34" charset="0"/>
-                <a:cs typeface="Verdana" panose="020B0604030504040204" pitchFamily="34" charset="0"/>
-              </a:rPr>
-              <a:t> </a:t>
-            </a:r>
-            <a:r>
-              <a:rPr lang="ru-RU" sz="2800" dirty="0">
-                <a:solidFill>
-                  <a:schemeClr val="bg1"/>
-                </a:solidFill>
-                <a:latin typeface="Verdana" panose="020B0604030504040204" pitchFamily="34" charset="0"/>
-                <a:ea typeface="Verdana" panose="020B0604030504040204" pitchFamily="34" charset="0"/>
-                <a:cs typeface="Verdana" panose="020B0604030504040204" pitchFamily="34" charset="0"/>
-              </a:rPr>
-              <a:t>классификация )</a:t>
-            </a:r>
-            <a:endParaRPr lang="ru-RU" sz="2800" dirty="0">
-              <a:solidFill>
-                <a:schemeClr val="bg1"/>
-              </a:solidFill>
-              <a:latin typeface="Verdana" panose="020B0604030504040204" pitchFamily="34" charset="0"/>
-              <a:ea typeface="Verdana" panose="020B0604030504040204" pitchFamily="34" charset="0"/>
-              <a:cs typeface="Verdana" panose="020B0604030504040204" pitchFamily="34" charset="0"/>
-            </a:endParaRPr>
-          </a:p>
-          <a:p>
-            <a:endParaRPr lang="ru-RU" sz="2800" dirty="0">
-              <a:solidFill>
-                <a:schemeClr val="bg1"/>
-              </a:solidFill>
-              <a:latin typeface="Verdana" panose="020B0604030504040204" pitchFamily="34" charset="0"/>
-              <a:ea typeface="Verdana" panose="020B0604030504040204" pitchFamily="34" charset="0"/>
-              <a:cs typeface="Verdana" panose="020B0604030504040204" pitchFamily="34" charset="0"/>
-            </a:endParaRPr>
-          </a:p>
-          <a:p>
-            <a:r>
-              <a:rPr lang="ru-RU" sz="2400" dirty="0">
-                <a:solidFill>
-                  <a:schemeClr val="bg1"/>
-                </a:solidFill>
-                <a:latin typeface="Verdana" panose="020B0604030504040204" pitchFamily="34" charset="0"/>
-                <a:ea typeface="Verdana" panose="020B0604030504040204" pitchFamily="34" charset="0"/>
-                <a:cs typeface="Verdana" panose="020B0604030504040204" pitchFamily="34" charset="0"/>
-              </a:rPr>
-              <a:t>Самый технически простой случай, который служит основой для решения более сложных задач.</a:t>
-            </a:r>
-            <a:endParaRPr lang="ru-RU" dirty="0">
-              <a:solidFill>
-                <a:schemeClr val="bg1"/>
-              </a:solidFill>
-              <a:latin typeface="Verdana" panose="020B0604030504040204" pitchFamily="34" charset="0"/>
-              <a:ea typeface="Verdana" panose="020B0604030504040204" pitchFamily="34" charset="0"/>
-              <a:cs typeface="Verdana" panose="020B0604030504040204" pitchFamily="34" charset="0"/>
-            </a:endParaRPr>
-          </a:p>
-        </p:txBody>
-      </p:sp>
-      <p:pic>
-        <p:nvPicPr>
-          <p:cNvPr id="13" name="Picture 2" descr="Image Classifier - Cats🐱 vs Dogs🐶 - Towards Data Science">
-            <a:extLst>
-              <a:ext uri="{FF2B5EF4-FFF2-40B4-BE49-F238E27FC236}">
-                <a16:creationId xmlns:a16="http://schemas.microsoft.com/office/drawing/2014/main" id="{6E8652D6-3622-4194-819C-98E14200B387}"/>
-              </a:ext>
-            </a:extLst>
-          </p:cNvPr>
-          <p:cNvPicPr>
-            <a:picLocks noChangeAspect="1" noChangeArrowheads="1"/>
-          </p:cNvPicPr>
-          <p:nvPr/>
-        </p:nvPicPr>
-        <p:blipFill>
-          <a:blip r:embed="rId4" cstate="print">
-            <a:extLst>
-              <a:ext uri="{28A0092B-C50C-407E-A947-70E740481C1C}">
-                <a14:useLocalDpi xmlns:a14="http://schemas.microsoft.com/office/drawing/2010/main" val="0"/>
-              </a:ext>
-            </a:extLst>
-          </a:blip>
-          <a:srcRect/>
-          <a:stretch>
-            <a:fillRect/>
-          </a:stretch>
-        </p:blipFill>
-        <p:spPr bwMode="auto">
-          <a:xfrm>
-            <a:off x="-11930" y="3645024"/>
-            <a:ext cx="4146482" cy="2332397"/>
-          </a:xfrm>
-          <a:prstGeom prst="rect">
-            <a:avLst/>
-          </a:prstGeom>
-          <a:noFill/>
-          <a:extLst>
-            <a:ext uri="{909E8E84-426E-40DD-AFC4-6F175D3DCCD1}">
-              <a14:hiddenFill xmlns:a14="http://schemas.microsoft.com/office/drawing/2010/main">
-                <a:solidFill>
-                  <a:srgbClr val="FFFFFF"/>
-                </a:solidFill>
-              </a14:hiddenFill>
-            </a:ext>
-          </a:extLst>
-        </p:spPr>
-      </p:pic>
-      <p:pic>
-        <p:nvPicPr>
-          <p:cNvPr id="15" name="Picture 4" descr="The Great War Between Good And Evil - Good Vs Evil Cartoon ...">
-            <a:extLst>
-              <a:ext uri="{FF2B5EF4-FFF2-40B4-BE49-F238E27FC236}">
-                <a16:creationId xmlns:a16="http://schemas.microsoft.com/office/drawing/2014/main" id="{5713E765-965F-466A-9A8C-12B7674DBCD4}"/>
-              </a:ext>
-            </a:extLst>
-          </p:cNvPr>
-          <p:cNvPicPr>
-            <a:picLocks noChangeAspect="1" noChangeArrowheads="1"/>
-          </p:cNvPicPr>
-          <p:nvPr/>
-        </p:nvPicPr>
-        <p:blipFill rotWithShape="1">
-          <a:blip r:embed="rId5">
-            <a:extLst>
-              <a:ext uri="{28A0092B-C50C-407E-A947-70E740481C1C}">
-                <a14:useLocalDpi xmlns:a14="http://schemas.microsoft.com/office/drawing/2010/main" val="0"/>
-              </a:ext>
-            </a:extLst>
-          </a:blip>
-          <a:srcRect l="26128" t="15442" r="21989" b="8072"/>
-          <a:stretch/>
-        </p:blipFill>
-        <p:spPr bwMode="auto">
-          <a:xfrm>
-            <a:off x="7896200" y="3356992"/>
-            <a:ext cx="3913853" cy="2575335"/>
-          </a:xfrm>
-          <a:prstGeom prst="rect">
-            <a:avLst/>
-          </a:prstGeom>
-          <a:noFill/>
-          <a:extLst>
-            <a:ext uri="{909E8E84-426E-40DD-AFC4-6F175D3DCCD1}">
-              <a14:hiddenFill xmlns:a14="http://schemas.microsoft.com/office/drawing/2010/main">
-                <a:solidFill>
-                  <a:srgbClr val="FFFFFF"/>
-                </a:solidFill>
-              </a14:hiddenFill>
-            </a:ext>
-          </a:extLst>
-        </p:spPr>
-      </p:pic>
-      <p:pic>
-        <p:nvPicPr>
-          <p:cNvPr id="16" name="Picture 6" descr="Healthy Living And Unhealthy Lifestyle Comparison, Healthy Fit ...">
-            <a:extLst>
-              <a:ext uri="{FF2B5EF4-FFF2-40B4-BE49-F238E27FC236}">
-                <a16:creationId xmlns:a16="http://schemas.microsoft.com/office/drawing/2014/main" id="{48CA30B7-6BEC-4B31-8C35-03F952E8FB8E}"/>
-              </a:ext>
-            </a:extLst>
-          </p:cNvPr>
-          <p:cNvPicPr>
-            <a:picLocks noChangeAspect="1" noChangeArrowheads="1"/>
-          </p:cNvPicPr>
-          <p:nvPr/>
-        </p:nvPicPr>
-        <p:blipFill rotWithShape="1">
-          <a:blip r:embed="rId6" cstate="print">
-            <a:extLst>
-              <a:ext uri="{28A0092B-C50C-407E-A947-70E740481C1C}">
-                <a14:useLocalDpi xmlns:a14="http://schemas.microsoft.com/office/drawing/2010/main" val="0"/>
-              </a:ext>
-            </a:extLst>
-          </a:blip>
-          <a:srcRect l="6034" t="8368" r="4679" b="7798"/>
-          <a:stretch/>
-        </p:blipFill>
-        <p:spPr bwMode="auto">
-          <a:xfrm>
-            <a:off x="4367808" y="3356992"/>
-            <a:ext cx="3240360" cy="3042475"/>
-          </a:xfrm>
-          <a:prstGeom prst="rect">
-            <a:avLst/>
-          </a:prstGeom>
-          <a:noFill/>
-          <a:extLst>
-            <a:ext uri="{909E8E84-426E-40DD-AFC4-6F175D3DCCD1}">
-              <a14:hiddenFill xmlns:a14="http://schemas.microsoft.com/office/drawing/2010/main">
-                <a:solidFill>
-                  <a:srgbClr val="FFFFFF"/>
-                </a:solidFill>
-              </a14:hiddenFill>
-            </a:ext>
-          </a:extLst>
-        </p:spPr>
-      </p:pic>
-      <p:sp>
-        <p:nvSpPr>
-          <p:cNvPr id="17" name="Нижний колонтитул 6"/>
-          <p:cNvSpPr>
-            <a:spLocks noGrp="1"/>
-          </p:cNvSpPr>
-          <p:nvPr>
-            <p:ph type="ftr" idx="4294967295"/>
-          </p:nvPr>
-        </p:nvSpPr>
-        <p:spPr>
-          <a:xfrm>
-            <a:off x="3143672" y="176904"/>
-            <a:ext cx="7180730" cy="484915"/>
-          </a:xfrm>
-          <a:prstGeom prst="rect">
-            <a:avLst/>
-          </a:prstGeom>
-        </p:spPr>
-        <p:txBody>
-          <a:bodyPr/>
-          <a:lstStyle/>
-          <a:p>
-            <a:r>
-              <a:rPr lang="ru-RU" sz="3200" b="1" spc="-1" dirty="0">
-                <a:solidFill>
-                  <a:schemeClr val="bg1"/>
-                </a:solidFill>
-                <a:latin typeface="Verdana" panose="020B0604030504040204" pitchFamily="34" charset="0"/>
-                <a:ea typeface="Verdana" panose="020B0604030504040204" pitchFamily="34" charset="0"/>
-              </a:rPr>
-              <a:t>Типы классов</a:t>
-            </a:r>
-          </a:p>
-        </p:txBody>
-      </p:sp>
-    </p:spTree>
-    <p:extLst>
-      <p:ext uri="{BB962C8B-B14F-4D97-AF65-F5344CB8AC3E}">
-        <p14:creationId xmlns:p14="http://schemas.microsoft.com/office/powerpoint/2010/main" val="3839313772"/>
-      </p:ext>
-    </p:extLst>
-  </p:cSld>
-  <p:clrMapOvr>
-    <a:masterClrMapping/>
-  </p:clrMapOvr>
-  <p:timing>
-    <p:tnLst>
-      <p:par>
-        <p:cTn id="1" dur="indefinite" restart="never" nodeType="tmRoot">
-          <p:childTnLst>
-            <p:seq concurrent="1" nextAc="seek">
-              <p:cTn id="2" dur="indefinite" nodeType="mainSeq">
-                <p:childTnLst>
-                  <p:par>
-                    <p:cTn id="3" fill="hold">
-                      <p:stCondLst>
-                        <p:cond delay="indefinite"/>
-                      </p:stCondLst>
-                      <p:childTnLst>
-                        <p:par>
-                          <p:cTn id="4" fill="hold">
-                            <p:stCondLst>
-                              <p:cond delay="0"/>
-                            </p:stCondLst>
-                            <p:childTnLst>
-                              <p:par>
-                                <p:cTn id="5" presetID="1" presetClass="entr" presetSubtype="0" fill="hold" nodeType="clickEffect">
-                                  <p:stCondLst>
-                                    <p:cond delay="0"/>
-                                  </p:stCondLst>
-                                  <p:childTnLst>
-                                    <p:set>
-                                      <p:cBhvr>
-                                        <p:cTn id="6" dur="1" fill="hold">
-                                          <p:stCondLst>
-                                            <p:cond delay="0"/>
-                                          </p:stCondLst>
-                                        </p:cTn>
-                                        <p:tgtEl>
-                                          <p:spTgt spid="16"/>
-                                        </p:tgtEl>
-                                        <p:attrNameLst>
-                                          <p:attrName>style.visibility</p:attrName>
-                                        </p:attrNameLst>
-                                      </p:cBhvr>
-                                      <p:to>
-                                        <p:strVal val="visible"/>
-                                      </p:to>
-                                    </p:set>
-                                  </p:childTnLst>
-                                </p:cTn>
-                              </p:par>
-                            </p:childTnLst>
-                          </p:cTn>
-                        </p:par>
-                      </p:childTnLst>
-                    </p:cTn>
-                  </p:par>
-                  <p:par>
-                    <p:cTn id="7" fill="hold">
-                      <p:stCondLst>
-                        <p:cond delay="indefinite"/>
-                      </p:stCondLst>
-                      <p:childTnLst>
-                        <p:par>
-                          <p:cTn id="8" fill="hold">
-                            <p:stCondLst>
-                              <p:cond delay="0"/>
-                            </p:stCondLst>
-                            <p:childTnLst>
-                              <p:par>
-                                <p:cTn id="9" presetID="1" presetClass="entr" presetSubtype="0" fill="hold" nodeType="clickEffect">
-                                  <p:stCondLst>
-                                    <p:cond delay="0"/>
-                                  </p:stCondLst>
-                                  <p:childTnLst>
-                                    <p:set>
-                                      <p:cBhvr>
-                                        <p:cTn id="10" dur="1" fill="hold">
-                                          <p:stCondLst>
-                                            <p:cond delay="0"/>
-                                          </p:stCondLst>
-                                        </p:cTn>
-                                        <p:tgtEl>
-                                          <p:spTgt spid="13"/>
-                                        </p:tgtEl>
-                                        <p:attrNameLst>
-                                          <p:attrName>style.visibility</p:attrName>
-                                        </p:attrNameLst>
-                                      </p:cBhvr>
-                                      <p:to>
-                                        <p:strVal val="visible"/>
-                                      </p:to>
-                                    </p:set>
-                                  </p:childTnLst>
-                                </p:cTn>
-                              </p:par>
-                            </p:childTnLst>
-                          </p:cTn>
-                        </p:par>
-                      </p:childTnLst>
-                    </p:cTn>
-                  </p:par>
-                  <p:par>
-                    <p:cTn id="11" fill="hold">
-                      <p:stCondLst>
-                        <p:cond delay="indefinite"/>
-                      </p:stCondLst>
-                      <p:childTnLst>
-                        <p:par>
-                          <p:cTn id="12" fill="hold">
-                            <p:stCondLst>
-                              <p:cond delay="0"/>
-                            </p:stCondLst>
-                            <p:childTnLst>
-                              <p:par>
-                                <p:cTn id="13" presetID="1" presetClass="entr" presetSubtype="0" fill="hold" nodeType="clickEffect">
-                                  <p:stCondLst>
-                                    <p:cond delay="0"/>
-                                  </p:stCondLst>
-                                  <p:childTnLst>
-                                    <p:set>
-                                      <p:cBhvr>
-                                        <p:cTn id="14" dur="1" fill="hold">
-                                          <p:stCondLst>
-                                            <p:cond delay="0"/>
-                                          </p:stCondLst>
-                                        </p:cTn>
-                                        <p:tgtEl>
-                                          <p:spTgt spid="15"/>
-                                        </p:tgtEl>
-                                        <p:attrNameLst>
-                                          <p:attrName>style.visibility</p:attrName>
-                                        </p:attrNameLst>
-                                      </p:cBhvr>
-                                      <p:to>
-                                        <p:strVal val="visible"/>
-                                      </p:to>
-                                    </p:set>
-                                  </p:childTnLst>
-                                </p:cTn>
-                              </p:par>
-                            </p:childTnLst>
-                          </p:cTn>
-                        </p:par>
-                      </p:childTnLst>
-                    </p:cTn>
-                  </p:par>
-                  <p:par>
-                    <p:cTn id="15" fill="hold">
-                      <p:stCondLst>
-                        <p:cond delay="indefinite"/>
-                      </p:stCondLst>
-                      <p:childTnLst>
-                        <p:par>
-                          <p:cTn id="16" fill="hold">
-                            <p:stCondLst>
-                              <p:cond delay="0"/>
-                            </p:stCondLst>
-                            <p:childTnLst>
-                              <p:par>
-                                <p:cTn id="17" presetID="1" presetClass="entr" presetSubtype="0" fill="hold" grpId="0" nodeType="clickEffect">
-                                  <p:stCondLst>
-                                    <p:cond delay="0"/>
-                                  </p:stCondLst>
-                                  <p:childTnLst>
-                                    <p:set>
-                                      <p:cBhvr>
-                                        <p:cTn id="18" dur="1" fill="hold">
-                                          <p:stCondLst>
-                                            <p:cond delay="0"/>
-                                          </p:stCondLst>
-                                        </p:cTn>
-                                        <p:tgtEl>
-                                          <p:spTgt spid="21"/>
-                                        </p:tgtEl>
-                                        <p:attrNameLst>
-                                          <p:attrName>style.visibility</p:attrName>
-                                        </p:attrNameLst>
-                                      </p:cBhvr>
-                                      <p:to>
-                                        <p:strVal val="visible"/>
-                                      </p:to>
-                                    </p:set>
-                                  </p:childTnLst>
-                                </p:cTn>
-                              </p:par>
-                            </p:childTnLst>
-                          </p:cTn>
-                        </p:par>
-                      </p:childTnLst>
-                    </p:cTn>
-                  </p:par>
-                </p:childTnLst>
-              </p:cTn>
-              <p:prevCondLst>
-                <p:cond evt="onPrev" delay="0">
-                  <p:tgtEl>
-                    <p:sldTgt/>
-                  </p:tgtEl>
-                </p:cond>
-              </p:prevCondLst>
-              <p:nextCondLst>
-                <p:cond evt="onNext" delay="0">
-                  <p:tgtEl>
-                    <p:sldTgt/>
-                  </p:tgtEl>
-                </p:cond>
-              </p:nextCondLst>
-            </p:seq>
-          </p:childTnLst>
-        </p:cTn>
-      </p:par>
-    </p:tnLst>
-    <p:bldLst>
-      <p:bldP spid="21" grpId="0"/>
     </p:bldLst>
   </p:timing>
 </p:sld>
